--- a/exports/pptx/lessons/middle-module-09-subtraction-nikhilam/day-06-why-it-works.pptx
+++ b/exports/pptx/lessons/middle-module-09-subtraction-nikhilam/day-06-why-it-works.pptx
@@ -16,9 +16,18 @@
     <p:sldId id="264" r:id="rId10"/>
     <p:sldId id="265" r:id="rId11"/>
     <p:sldId id="266" r:id="rId12"/>
+    <p:sldId id="267" r:id="rId13"/>
+    <p:sldId id="268" r:id="rId14"/>
+    <p:sldId id="269" r:id="rId15"/>
+    <p:sldId id="270" r:id="rId16"/>
+    <p:sldId id="271" r:id="rId17"/>
+    <p:sldId id="272" r:id="rId18"/>
+    <p:sldId id="273" r:id="rId19"/>
+    <p:sldId id="274" r:id="rId20"/>
+    <p:sldId id="275" r:id="rId21"/>
   </p:sldIdLst>
   <p:notesMasterIdLst>
-    <p:notesMasterId r:id="rId13"/>
+    <p:notesMasterId r:id="rId22"/>
   </p:notesMasterIdLst>
   <p:sldSz cx="9144000" cy="5143500"/>
   <p:notesSz cx="5143500" cy="9144000"/>
@@ -730,6 +739,710 @@
 </p:notes>
 </file>
 
+<file path=ppt/notesSlides/notesSlide12.xml><?xml version="1.0" encoding="utf-8"?>
+<p:notes xmlns:a="http://schemas.openxmlformats.org/drawingml/2006/main" xmlns:r="http://schemas.openxmlformats.org/officeDocument/2006/relationships" xmlns:p="http://schemas.openxmlformats.org/presentationml/2006/main">
+  <p:cSld>
+    <p:spTree>
+      <p:nvGrpSpPr>
+        <p:cNvPr id="1" name=""/>
+        <p:cNvGrpSpPr/>
+        <p:nvPr/>
+      </p:nvGrpSpPr>
+      <p:grpSpPr>
+        <a:xfrm>
+          <a:off x="0" y="0"/>
+          <a:ext cx="0" cy="0"/>
+          <a:chOff x="0" y="0"/>
+          <a:chExt cx="0" cy="0"/>
+        </a:xfrm>
+      </p:grpSpPr>
+      <p:sp>
+        <p:nvSpPr>
+          <p:cNvPr id="2" name="Slide Image Placeholder 1"/>
+          <p:cNvSpPr>
+            <a:spLocks noGrp="1" noRot="1" noChangeAspect="1"/>
+          </p:cNvSpPr>
+          <p:nvPr>
+            <p:ph type="sldImg"/>
+          </p:nvPr>
+        </p:nvSpPr>
+        <p:spPr/>
+      </p:sp>
+      <p:sp>
+        <p:nvSpPr>
+          <p:cNvPr id="3" name="Notes Placeholder 2"/>
+          <p:cNvSpPr>
+            <a:spLocks noGrp="1"/>
+          </p:cNvSpPr>
+          <p:nvPr>
+            <p:ph type="body" idx="1"/>
+          </p:nvPr>
+        </p:nvSpPr>
+        <p:spPr/>
+        <p:txBody>
+          <a:bodyPr/>
+          <a:lstStyle/>
+          <a:p>
+            <a:r>
+              <a:rPr lang="en-US" dirty="0"/>
+              <a:t/>
+            </a:r>
+            <a:endParaRPr lang="en-US" dirty="0"/>
+          </a:p>
+        </p:txBody>
+      </p:sp>
+      <p:sp>
+        <p:nvSpPr>
+          <p:cNvPr id="4" name="Slide Number Placeholder 3"/>
+          <p:cNvSpPr>
+            <a:spLocks noGrp="1"/>
+          </p:cNvSpPr>
+          <p:nvPr>
+            <p:ph type="sldNum" sz="quarter" idx="10"/>
+          </p:nvPr>
+        </p:nvSpPr>
+        <p:spPr/>
+        <p:txBody>
+          <a:bodyPr/>
+          <a:lstStyle/>
+          <a:p>
+            <a:fld id="{F7021451-1387-4CA6-816F-3879F97B5CBC}" type="slidenum">
+              <a:rPr lang="en-US"/>
+              <a:t>12</a:t>
+            </a:fld>
+            <a:endParaRPr lang="en-US"/>
+          </a:p>
+        </p:txBody>
+      </p:sp>
+    </p:spTree>
+    <p:extLst>
+      <p:ext uri="{BB962C8B-B14F-4D97-AF65-F5344CB8AC3E}">
+        <p14:creationId xmlns:p14="http://schemas.microsoft.com/office/powerpoint/2010/main" val="1024086991"/>
+      </p:ext>
+    </p:extLst>
+  </p:cSld>
+  <p:clrMapOvr>
+    <a:masterClrMapping/>
+  </p:clrMapOvr>
+</p:notes>
+</file>
+
+<file path=ppt/notesSlides/notesSlide13.xml><?xml version="1.0" encoding="utf-8"?>
+<p:notes xmlns:a="http://schemas.openxmlformats.org/drawingml/2006/main" xmlns:r="http://schemas.openxmlformats.org/officeDocument/2006/relationships" xmlns:p="http://schemas.openxmlformats.org/presentationml/2006/main">
+  <p:cSld>
+    <p:spTree>
+      <p:nvGrpSpPr>
+        <p:cNvPr id="1" name=""/>
+        <p:cNvGrpSpPr/>
+        <p:nvPr/>
+      </p:nvGrpSpPr>
+      <p:grpSpPr>
+        <a:xfrm>
+          <a:off x="0" y="0"/>
+          <a:ext cx="0" cy="0"/>
+          <a:chOff x="0" y="0"/>
+          <a:chExt cx="0" cy="0"/>
+        </a:xfrm>
+      </p:grpSpPr>
+      <p:sp>
+        <p:nvSpPr>
+          <p:cNvPr id="2" name="Slide Image Placeholder 1"/>
+          <p:cNvSpPr>
+            <a:spLocks noGrp="1" noRot="1" noChangeAspect="1"/>
+          </p:cNvSpPr>
+          <p:nvPr>
+            <p:ph type="sldImg"/>
+          </p:nvPr>
+        </p:nvSpPr>
+        <p:spPr/>
+      </p:sp>
+      <p:sp>
+        <p:nvSpPr>
+          <p:cNvPr id="3" name="Notes Placeholder 2"/>
+          <p:cNvSpPr>
+            <a:spLocks noGrp="1"/>
+          </p:cNvSpPr>
+          <p:nvPr>
+            <p:ph type="body" idx="1"/>
+          </p:nvPr>
+        </p:nvSpPr>
+        <p:spPr/>
+        <p:txBody>
+          <a:bodyPr/>
+          <a:lstStyle/>
+          <a:p>
+            <a:r>
+              <a:rPr lang="en-US" dirty="0"/>
+              <a:t/>
+            </a:r>
+            <a:endParaRPr lang="en-US" dirty="0"/>
+          </a:p>
+        </p:txBody>
+      </p:sp>
+      <p:sp>
+        <p:nvSpPr>
+          <p:cNvPr id="4" name="Slide Number Placeholder 3"/>
+          <p:cNvSpPr>
+            <a:spLocks noGrp="1"/>
+          </p:cNvSpPr>
+          <p:nvPr>
+            <p:ph type="sldNum" sz="quarter" idx="10"/>
+          </p:nvPr>
+        </p:nvSpPr>
+        <p:spPr/>
+        <p:txBody>
+          <a:bodyPr/>
+          <a:lstStyle/>
+          <a:p>
+            <a:fld id="{F7021451-1387-4CA6-816F-3879F97B5CBC}" type="slidenum">
+              <a:rPr lang="en-US"/>
+              <a:t>13</a:t>
+            </a:fld>
+            <a:endParaRPr lang="en-US"/>
+          </a:p>
+        </p:txBody>
+      </p:sp>
+    </p:spTree>
+    <p:extLst>
+      <p:ext uri="{BB962C8B-B14F-4D97-AF65-F5344CB8AC3E}">
+        <p14:creationId xmlns:p14="http://schemas.microsoft.com/office/powerpoint/2010/main" val="1024086991"/>
+      </p:ext>
+    </p:extLst>
+  </p:cSld>
+  <p:clrMapOvr>
+    <a:masterClrMapping/>
+  </p:clrMapOvr>
+</p:notes>
+</file>
+
+<file path=ppt/notesSlides/notesSlide14.xml><?xml version="1.0" encoding="utf-8"?>
+<p:notes xmlns:a="http://schemas.openxmlformats.org/drawingml/2006/main" xmlns:r="http://schemas.openxmlformats.org/officeDocument/2006/relationships" xmlns:p="http://schemas.openxmlformats.org/presentationml/2006/main">
+  <p:cSld>
+    <p:spTree>
+      <p:nvGrpSpPr>
+        <p:cNvPr id="1" name=""/>
+        <p:cNvGrpSpPr/>
+        <p:nvPr/>
+      </p:nvGrpSpPr>
+      <p:grpSpPr>
+        <a:xfrm>
+          <a:off x="0" y="0"/>
+          <a:ext cx="0" cy="0"/>
+          <a:chOff x="0" y="0"/>
+          <a:chExt cx="0" cy="0"/>
+        </a:xfrm>
+      </p:grpSpPr>
+      <p:sp>
+        <p:nvSpPr>
+          <p:cNvPr id="2" name="Slide Image Placeholder 1"/>
+          <p:cNvSpPr>
+            <a:spLocks noGrp="1" noRot="1" noChangeAspect="1"/>
+          </p:cNvSpPr>
+          <p:nvPr>
+            <p:ph type="sldImg"/>
+          </p:nvPr>
+        </p:nvSpPr>
+        <p:spPr/>
+      </p:sp>
+      <p:sp>
+        <p:nvSpPr>
+          <p:cNvPr id="3" name="Notes Placeholder 2"/>
+          <p:cNvSpPr>
+            <a:spLocks noGrp="1"/>
+          </p:cNvSpPr>
+          <p:nvPr>
+            <p:ph type="body" idx="1"/>
+          </p:nvPr>
+        </p:nvSpPr>
+        <p:spPr/>
+        <p:txBody>
+          <a:bodyPr/>
+          <a:lstStyle/>
+          <a:p>
+            <a:r>
+              <a:rPr lang="en-US" dirty="0"/>
+              <a:t/>
+            </a:r>
+            <a:endParaRPr lang="en-US" dirty="0"/>
+          </a:p>
+        </p:txBody>
+      </p:sp>
+      <p:sp>
+        <p:nvSpPr>
+          <p:cNvPr id="4" name="Slide Number Placeholder 3"/>
+          <p:cNvSpPr>
+            <a:spLocks noGrp="1"/>
+          </p:cNvSpPr>
+          <p:nvPr>
+            <p:ph type="sldNum" sz="quarter" idx="10"/>
+          </p:nvPr>
+        </p:nvSpPr>
+        <p:spPr/>
+        <p:txBody>
+          <a:bodyPr/>
+          <a:lstStyle/>
+          <a:p>
+            <a:fld id="{F7021451-1387-4CA6-816F-3879F97B5CBC}" type="slidenum">
+              <a:rPr lang="en-US"/>
+              <a:t>14</a:t>
+            </a:fld>
+            <a:endParaRPr lang="en-US"/>
+          </a:p>
+        </p:txBody>
+      </p:sp>
+    </p:spTree>
+    <p:extLst>
+      <p:ext uri="{BB962C8B-B14F-4D97-AF65-F5344CB8AC3E}">
+        <p14:creationId xmlns:p14="http://schemas.microsoft.com/office/powerpoint/2010/main" val="1024086991"/>
+      </p:ext>
+    </p:extLst>
+  </p:cSld>
+  <p:clrMapOvr>
+    <a:masterClrMapping/>
+  </p:clrMapOvr>
+</p:notes>
+</file>
+
+<file path=ppt/notesSlides/notesSlide15.xml><?xml version="1.0" encoding="utf-8"?>
+<p:notes xmlns:a="http://schemas.openxmlformats.org/drawingml/2006/main" xmlns:r="http://schemas.openxmlformats.org/officeDocument/2006/relationships" xmlns:p="http://schemas.openxmlformats.org/presentationml/2006/main">
+  <p:cSld>
+    <p:spTree>
+      <p:nvGrpSpPr>
+        <p:cNvPr id="1" name=""/>
+        <p:cNvGrpSpPr/>
+        <p:nvPr/>
+      </p:nvGrpSpPr>
+      <p:grpSpPr>
+        <a:xfrm>
+          <a:off x="0" y="0"/>
+          <a:ext cx="0" cy="0"/>
+          <a:chOff x="0" y="0"/>
+          <a:chExt cx="0" cy="0"/>
+        </a:xfrm>
+      </p:grpSpPr>
+      <p:sp>
+        <p:nvSpPr>
+          <p:cNvPr id="2" name="Slide Image Placeholder 1"/>
+          <p:cNvSpPr>
+            <a:spLocks noGrp="1" noRot="1" noChangeAspect="1"/>
+          </p:cNvSpPr>
+          <p:nvPr>
+            <p:ph type="sldImg"/>
+          </p:nvPr>
+        </p:nvSpPr>
+        <p:spPr/>
+      </p:sp>
+      <p:sp>
+        <p:nvSpPr>
+          <p:cNvPr id="3" name="Notes Placeholder 2"/>
+          <p:cNvSpPr>
+            <a:spLocks noGrp="1"/>
+          </p:cNvSpPr>
+          <p:nvPr>
+            <p:ph type="body" idx="1"/>
+          </p:nvPr>
+        </p:nvSpPr>
+        <p:spPr/>
+        <p:txBody>
+          <a:bodyPr/>
+          <a:lstStyle/>
+          <a:p>
+            <a:r>
+              <a:rPr lang="en-US" dirty="0"/>
+              <a:t/>
+            </a:r>
+            <a:endParaRPr lang="en-US" dirty="0"/>
+          </a:p>
+        </p:txBody>
+      </p:sp>
+      <p:sp>
+        <p:nvSpPr>
+          <p:cNvPr id="4" name="Slide Number Placeholder 3"/>
+          <p:cNvSpPr>
+            <a:spLocks noGrp="1"/>
+          </p:cNvSpPr>
+          <p:nvPr>
+            <p:ph type="sldNum" sz="quarter" idx="10"/>
+          </p:nvPr>
+        </p:nvSpPr>
+        <p:spPr/>
+        <p:txBody>
+          <a:bodyPr/>
+          <a:lstStyle/>
+          <a:p>
+            <a:fld id="{F7021451-1387-4CA6-816F-3879F97B5CBC}" type="slidenum">
+              <a:rPr lang="en-US"/>
+              <a:t>15</a:t>
+            </a:fld>
+            <a:endParaRPr lang="en-US"/>
+          </a:p>
+        </p:txBody>
+      </p:sp>
+    </p:spTree>
+    <p:extLst>
+      <p:ext uri="{BB962C8B-B14F-4D97-AF65-F5344CB8AC3E}">
+        <p14:creationId xmlns:p14="http://schemas.microsoft.com/office/powerpoint/2010/main" val="1024086991"/>
+      </p:ext>
+    </p:extLst>
+  </p:cSld>
+  <p:clrMapOvr>
+    <a:masterClrMapping/>
+  </p:clrMapOvr>
+</p:notes>
+</file>
+
+<file path=ppt/notesSlides/notesSlide16.xml><?xml version="1.0" encoding="utf-8"?>
+<p:notes xmlns:a="http://schemas.openxmlformats.org/drawingml/2006/main" xmlns:r="http://schemas.openxmlformats.org/officeDocument/2006/relationships" xmlns:p="http://schemas.openxmlformats.org/presentationml/2006/main">
+  <p:cSld>
+    <p:spTree>
+      <p:nvGrpSpPr>
+        <p:cNvPr id="1" name=""/>
+        <p:cNvGrpSpPr/>
+        <p:nvPr/>
+      </p:nvGrpSpPr>
+      <p:grpSpPr>
+        <a:xfrm>
+          <a:off x="0" y="0"/>
+          <a:ext cx="0" cy="0"/>
+          <a:chOff x="0" y="0"/>
+          <a:chExt cx="0" cy="0"/>
+        </a:xfrm>
+      </p:grpSpPr>
+      <p:sp>
+        <p:nvSpPr>
+          <p:cNvPr id="2" name="Slide Image Placeholder 1"/>
+          <p:cNvSpPr>
+            <a:spLocks noGrp="1" noRot="1" noChangeAspect="1"/>
+          </p:cNvSpPr>
+          <p:nvPr>
+            <p:ph type="sldImg"/>
+          </p:nvPr>
+        </p:nvSpPr>
+        <p:spPr/>
+      </p:sp>
+      <p:sp>
+        <p:nvSpPr>
+          <p:cNvPr id="3" name="Notes Placeholder 2"/>
+          <p:cNvSpPr>
+            <a:spLocks noGrp="1"/>
+          </p:cNvSpPr>
+          <p:nvPr>
+            <p:ph type="body" idx="1"/>
+          </p:nvPr>
+        </p:nvSpPr>
+        <p:spPr/>
+        <p:txBody>
+          <a:bodyPr/>
+          <a:lstStyle/>
+          <a:p>
+            <a:r>
+              <a:rPr lang="en-US" dirty="0"/>
+              <a:t/>
+            </a:r>
+            <a:endParaRPr lang="en-US" dirty="0"/>
+          </a:p>
+        </p:txBody>
+      </p:sp>
+      <p:sp>
+        <p:nvSpPr>
+          <p:cNvPr id="4" name="Slide Number Placeholder 3"/>
+          <p:cNvSpPr>
+            <a:spLocks noGrp="1"/>
+          </p:cNvSpPr>
+          <p:nvPr>
+            <p:ph type="sldNum" sz="quarter" idx="10"/>
+          </p:nvPr>
+        </p:nvSpPr>
+        <p:spPr/>
+        <p:txBody>
+          <a:bodyPr/>
+          <a:lstStyle/>
+          <a:p>
+            <a:fld id="{F7021451-1387-4CA6-816F-3879F97B5CBC}" type="slidenum">
+              <a:rPr lang="en-US"/>
+              <a:t>16</a:t>
+            </a:fld>
+            <a:endParaRPr lang="en-US"/>
+          </a:p>
+        </p:txBody>
+      </p:sp>
+    </p:spTree>
+    <p:extLst>
+      <p:ext uri="{BB962C8B-B14F-4D97-AF65-F5344CB8AC3E}">
+        <p14:creationId xmlns:p14="http://schemas.microsoft.com/office/powerpoint/2010/main" val="1024086991"/>
+      </p:ext>
+    </p:extLst>
+  </p:cSld>
+  <p:clrMapOvr>
+    <a:masterClrMapping/>
+  </p:clrMapOvr>
+</p:notes>
+</file>
+
+<file path=ppt/notesSlides/notesSlide17.xml><?xml version="1.0" encoding="utf-8"?>
+<p:notes xmlns:a="http://schemas.openxmlformats.org/drawingml/2006/main" xmlns:r="http://schemas.openxmlformats.org/officeDocument/2006/relationships" xmlns:p="http://schemas.openxmlformats.org/presentationml/2006/main">
+  <p:cSld>
+    <p:spTree>
+      <p:nvGrpSpPr>
+        <p:cNvPr id="1" name=""/>
+        <p:cNvGrpSpPr/>
+        <p:nvPr/>
+      </p:nvGrpSpPr>
+      <p:grpSpPr>
+        <a:xfrm>
+          <a:off x="0" y="0"/>
+          <a:ext cx="0" cy="0"/>
+          <a:chOff x="0" y="0"/>
+          <a:chExt cx="0" cy="0"/>
+        </a:xfrm>
+      </p:grpSpPr>
+      <p:sp>
+        <p:nvSpPr>
+          <p:cNvPr id="2" name="Slide Image Placeholder 1"/>
+          <p:cNvSpPr>
+            <a:spLocks noGrp="1" noRot="1" noChangeAspect="1"/>
+          </p:cNvSpPr>
+          <p:nvPr>
+            <p:ph type="sldImg"/>
+          </p:nvPr>
+        </p:nvSpPr>
+        <p:spPr/>
+      </p:sp>
+      <p:sp>
+        <p:nvSpPr>
+          <p:cNvPr id="3" name="Notes Placeholder 2"/>
+          <p:cNvSpPr>
+            <a:spLocks noGrp="1"/>
+          </p:cNvSpPr>
+          <p:nvPr>
+            <p:ph type="body" idx="1"/>
+          </p:nvPr>
+        </p:nvSpPr>
+        <p:spPr/>
+        <p:txBody>
+          <a:bodyPr/>
+          <a:lstStyle/>
+          <a:p>
+            <a:r>
+              <a:rPr lang="en-US" dirty="0"/>
+              <a:t/>
+            </a:r>
+            <a:endParaRPr lang="en-US" dirty="0"/>
+          </a:p>
+        </p:txBody>
+      </p:sp>
+      <p:sp>
+        <p:nvSpPr>
+          <p:cNvPr id="4" name="Slide Number Placeholder 3"/>
+          <p:cNvSpPr>
+            <a:spLocks noGrp="1"/>
+          </p:cNvSpPr>
+          <p:nvPr>
+            <p:ph type="sldNum" sz="quarter" idx="10"/>
+          </p:nvPr>
+        </p:nvSpPr>
+        <p:spPr/>
+        <p:txBody>
+          <a:bodyPr/>
+          <a:lstStyle/>
+          <a:p>
+            <a:fld id="{F7021451-1387-4CA6-816F-3879F97B5CBC}" type="slidenum">
+              <a:rPr lang="en-US"/>
+              <a:t>17</a:t>
+            </a:fld>
+            <a:endParaRPr lang="en-US"/>
+          </a:p>
+        </p:txBody>
+      </p:sp>
+    </p:spTree>
+    <p:extLst>
+      <p:ext uri="{BB962C8B-B14F-4D97-AF65-F5344CB8AC3E}">
+        <p14:creationId xmlns:p14="http://schemas.microsoft.com/office/powerpoint/2010/main" val="1024086991"/>
+      </p:ext>
+    </p:extLst>
+  </p:cSld>
+  <p:clrMapOvr>
+    <a:masterClrMapping/>
+  </p:clrMapOvr>
+</p:notes>
+</file>
+
+<file path=ppt/notesSlides/notesSlide18.xml><?xml version="1.0" encoding="utf-8"?>
+<p:notes xmlns:a="http://schemas.openxmlformats.org/drawingml/2006/main" xmlns:r="http://schemas.openxmlformats.org/officeDocument/2006/relationships" xmlns:p="http://schemas.openxmlformats.org/presentationml/2006/main">
+  <p:cSld>
+    <p:spTree>
+      <p:nvGrpSpPr>
+        <p:cNvPr id="1" name=""/>
+        <p:cNvGrpSpPr/>
+        <p:nvPr/>
+      </p:nvGrpSpPr>
+      <p:grpSpPr>
+        <a:xfrm>
+          <a:off x="0" y="0"/>
+          <a:ext cx="0" cy="0"/>
+          <a:chOff x="0" y="0"/>
+          <a:chExt cx="0" cy="0"/>
+        </a:xfrm>
+      </p:grpSpPr>
+      <p:sp>
+        <p:nvSpPr>
+          <p:cNvPr id="2" name="Slide Image Placeholder 1"/>
+          <p:cNvSpPr>
+            <a:spLocks noGrp="1" noRot="1" noChangeAspect="1"/>
+          </p:cNvSpPr>
+          <p:nvPr>
+            <p:ph type="sldImg"/>
+          </p:nvPr>
+        </p:nvSpPr>
+        <p:spPr/>
+      </p:sp>
+      <p:sp>
+        <p:nvSpPr>
+          <p:cNvPr id="3" name="Notes Placeholder 2"/>
+          <p:cNvSpPr>
+            <a:spLocks noGrp="1"/>
+          </p:cNvSpPr>
+          <p:nvPr>
+            <p:ph type="body" idx="1"/>
+          </p:nvPr>
+        </p:nvSpPr>
+        <p:spPr/>
+        <p:txBody>
+          <a:bodyPr/>
+          <a:lstStyle/>
+          <a:p>
+            <a:r>
+              <a:rPr lang="en-US" dirty="0"/>
+              <a:t/>
+            </a:r>
+            <a:endParaRPr lang="en-US" dirty="0"/>
+          </a:p>
+        </p:txBody>
+      </p:sp>
+      <p:sp>
+        <p:nvSpPr>
+          <p:cNvPr id="4" name="Slide Number Placeholder 3"/>
+          <p:cNvSpPr>
+            <a:spLocks noGrp="1"/>
+          </p:cNvSpPr>
+          <p:nvPr>
+            <p:ph type="sldNum" sz="quarter" idx="10"/>
+          </p:nvPr>
+        </p:nvSpPr>
+        <p:spPr/>
+        <p:txBody>
+          <a:bodyPr/>
+          <a:lstStyle/>
+          <a:p>
+            <a:fld id="{F7021451-1387-4CA6-816F-3879F97B5CBC}" type="slidenum">
+              <a:rPr lang="en-US"/>
+              <a:t>18</a:t>
+            </a:fld>
+            <a:endParaRPr lang="en-US"/>
+          </a:p>
+        </p:txBody>
+      </p:sp>
+    </p:spTree>
+    <p:extLst>
+      <p:ext uri="{BB962C8B-B14F-4D97-AF65-F5344CB8AC3E}">
+        <p14:creationId xmlns:p14="http://schemas.microsoft.com/office/powerpoint/2010/main" val="1024086991"/>
+      </p:ext>
+    </p:extLst>
+  </p:cSld>
+  <p:clrMapOvr>
+    <a:masterClrMapping/>
+  </p:clrMapOvr>
+</p:notes>
+</file>
+
+<file path=ppt/notesSlides/notesSlide19.xml><?xml version="1.0" encoding="utf-8"?>
+<p:notes xmlns:a="http://schemas.openxmlformats.org/drawingml/2006/main" xmlns:r="http://schemas.openxmlformats.org/officeDocument/2006/relationships" xmlns:p="http://schemas.openxmlformats.org/presentationml/2006/main">
+  <p:cSld>
+    <p:spTree>
+      <p:nvGrpSpPr>
+        <p:cNvPr id="1" name=""/>
+        <p:cNvGrpSpPr/>
+        <p:nvPr/>
+      </p:nvGrpSpPr>
+      <p:grpSpPr>
+        <a:xfrm>
+          <a:off x="0" y="0"/>
+          <a:ext cx="0" cy="0"/>
+          <a:chOff x="0" y="0"/>
+          <a:chExt cx="0" cy="0"/>
+        </a:xfrm>
+      </p:grpSpPr>
+      <p:sp>
+        <p:nvSpPr>
+          <p:cNvPr id="2" name="Slide Image Placeholder 1"/>
+          <p:cNvSpPr>
+            <a:spLocks noGrp="1" noRot="1" noChangeAspect="1"/>
+          </p:cNvSpPr>
+          <p:nvPr>
+            <p:ph type="sldImg"/>
+          </p:nvPr>
+        </p:nvSpPr>
+        <p:spPr/>
+      </p:sp>
+      <p:sp>
+        <p:nvSpPr>
+          <p:cNvPr id="3" name="Notes Placeholder 2"/>
+          <p:cNvSpPr>
+            <a:spLocks noGrp="1"/>
+          </p:cNvSpPr>
+          <p:nvPr>
+            <p:ph type="body" idx="1"/>
+          </p:nvPr>
+        </p:nvSpPr>
+        <p:spPr/>
+        <p:txBody>
+          <a:bodyPr/>
+          <a:lstStyle/>
+          <a:p>
+            <a:r>
+              <a:rPr lang="en-US" dirty="0"/>
+              <a:t/>
+            </a:r>
+            <a:endParaRPr lang="en-US" dirty="0"/>
+          </a:p>
+        </p:txBody>
+      </p:sp>
+      <p:sp>
+        <p:nvSpPr>
+          <p:cNvPr id="4" name="Slide Number Placeholder 3"/>
+          <p:cNvSpPr>
+            <a:spLocks noGrp="1"/>
+          </p:cNvSpPr>
+          <p:nvPr>
+            <p:ph type="sldNum" sz="quarter" idx="10"/>
+          </p:nvPr>
+        </p:nvSpPr>
+        <p:spPr/>
+        <p:txBody>
+          <a:bodyPr/>
+          <a:lstStyle/>
+          <a:p>
+            <a:fld id="{F7021451-1387-4CA6-816F-3879F97B5CBC}" type="slidenum">
+              <a:rPr lang="en-US"/>
+              <a:t>19</a:t>
+            </a:fld>
+            <a:endParaRPr lang="en-US"/>
+          </a:p>
+        </p:txBody>
+      </p:sp>
+    </p:spTree>
+    <p:extLst>
+      <p:ext uri="{BB962C8B-B14F-4D97-AF65-F5344CB8AC3E}">
+        <p14:creationId xmlns:p14="http://schemas.microsoft.com/office/powerpoint/2010/main" val="1024086991"/>
+      </p:ext>
+    </p:extLst>
+  </p:cSld>
+  <p:clrMapOvr>
+    <a:masterClrMapping/>
+  </p:clrMapOvr>
+</p:notes>
+</file>
+
 <file path=ppt/notesSlides/notesSlide2.xml><?xml version="1.0" encoding="utf-8"?>
 <p:notes xmlns:a="http://schemas.openxmlformats.org/drawingml/2006/main" xmlns:r="http://schemas.openxmlformats.org/officeDocument/2006/relationships" xmlns:p="http://schemas.openxmlformats.org/presentationml/2006/main">
   <p:cSld>
@@ -800,6 +1513,94 @@
             <a:fld id="{F7021451-1387-4CA6-816F-3879F97B5CBC}" type="slidenum">
               <a:rPr lang="en-US"/>
               <a:t>2</a:t>
+            </a:fld>
+            <a:endParaRPr lang="en-US"/>
+          </a:p>
+        </p:txBody>
+      </p:sp>
+    </p:spTree>
+    <p:extLst>
+      <p:ext uri="{BB962C8B-B14F-4D97-AF65-F5344CB8AC3E}">
+        <p14:creationId xmlns:p14="http://schemas.microsoft.com/office/powerpoint/2010/main" val="1024086991"/>
+      </p:ext>
+    </p:extLst>
+  </p:cSld>
+  <p:clrMapOvr>
+    <a:masterClrMapping/>
+  </p:clrMapOvr>
+</p:notes>
+</file>
+
+<file path=ppt/notesSlides/notesSlide20.xml><?xml version="1.0" encoding="utf-8"?>
+<p:notes xmlns:a="http://schemas.openxmlformats.org/drawingml/2006/main" xmlns:r="http://schemas.openxmlformats.org/officeDocument/2006/relationships" xmlns:p="http://schemas.openxmlformats.org/presentationml/2006/main">
+  <p:cSld>
+    <p:spTree>
+      <p:nvGrpSpPr>
+        <p:cNvPr id="1" name=""/>
+        <p:cNvGrpSpPr/>
+        <p:nvPr/>
+      </p:nvGrpSpPr>
+      <p:grpSpPr>
+        <a:xfrm>
+          <a:off x="0" y="0"/>
+          <a:ext cx="0" cy="0"/>
+          <a:chOff x="0" y="0"/>
+          <a:chExt cx="0" cy="0"/>
+        </a:xfrm>
+      </p:grpSpPr>
+      <p:sp>
+        <p:nvSpPr>
+          <p:cNvPr id="2" name="Slide Image Placeholder 1"/>
+          <p:cNvSpPr>
+            <a:spLocks noGrp="1" noRot="1" noChangeAspect="1"/>
+          </p:cNvSpPr>
+          <p:nvPr>
+            <p:ph type="sldImg"/>
+          </p:nvPr>
+        </p:nvSpPr>
+        <p:spPr/>
+      </p:sp>
+      <p:sp>
+        <p:nvSpPr>
+          <p:cNvPr id="3" name="Notes Placeholder 2"/>
+          <p:cNvSpPr>
+            <a:spLocks noGrp="1"/>
+          </p:cNvSpPr>
+          <p:nvPr>
+            <p:ph type="body" idx="1"/>
+          </p:nvPr>
+        </p:nvSpPr>
+        <p:spPr/>
+        <p:txBody>
+          <a:bodyPr/>
+          <a:lstStyle/>
+          <a:p>
+            <a:r>
+              <a:rPr lang="en-US" dirty="0"/>
+              <a:t/>
+            </a:r>
+            <a:endParaRPr lang="en-US" dirty="0"/>
+          </a:p>
+        </p:txBody>
+      </p:sp>
+      <p:sp>
+        <p:nvSpPr>
+          <p:cNvPr id="4" name="Slide Number Placeholder 3"/>
+          <p:cNvSpPr>
+            <a:spLocks noGrp="1"/>
+          </p:cNvSpPr>
+          <p:nvPr>
+            <p:ph type="sldNum" sz="quarter" idx="10"/>
+          </p:nvPr>
+        </p:nvSpPr>
+        <p:spPr/>
+        <p:txBody>
+          <a:bodyPr/>
+          <a:lstStyle/>
+          <a:p>
+            <a:fld id="{F7021451-1387-4CA6-816F-3879F97B5CBC}" type="slidenum">
+              <a:rPr lang="en-US"/>
+              <a:t>20</a:t>
             </a:fld>
             <a:endParaRPr lang="en-US"/>
           </a:p>
@@ -2011,194 +2812,6 @@
         </p:nvSpPr>
         <p:spPr>
           <a:xfrm>
-            <a:off x="406301" y="1223963"/>
-            <a:ext cx="8498026" cy="274290"/>
-          </a:xfrm>
-          <a:prstGeom prst="rect">
-            <a:avLst/>
-          </a:prstGeom>
-          <a:noFill/>
-          <a:ln/>
-        </p:spPr>
-        <p:txBody>
-          <a:bodyPr wrap="square" lIns="0" tIns="0" rIns="0" bIns="0" rtlCol="0" anchor="t"/>
-          <a:lstStyle/>
-          <a:p>
-            <a:pPr algn="l" indent="0" marL="0">
-              <a:lnSpc>
-                <a:spcPts val="2160"/>
-              </a:lnSpc>
-              <a:spcBef>
-                <a:spcPts val="600"/>
-              </a:spcBef>
-              <a:spcAft>
-                <a:spcPts val="800"/>
-              </a:spcAft>
-              <a:buNone/>
-            </a:pPr>
-            <a:r>
-              <a:rPr lang="en-US" sz="1800" b="1" dirty="0">
-                <a:solidFill>
-                  <a:srgbClr val="FE4447"/>
-                </a:solidFill>
-                <a:latin typeface="Georgia" pitchFamily="34" charset="0"/>
-                <a:ea typeface="Georgia" pitchFamily="34" charset="-122"/>
-                <a:cs typeface="Georgia" pitchFamily="34" charset="-120"/>
-              </a:rPr>
-              <a:t>Learning objective</a:t>
-            </a:r>
-            <a:endParaRPr lang="en-US" sz="1800" dirty="0"/>
-          </a:p>
-        </p:txBody>
-      </p:sp>
-      <p:sp>
-        <p:nvSpPr>
-          <p:cNvPr id="6" name="Text 4"/>
-          <p:cNvSpPr/>
-          <p:nvPr/>
-        </p:nvSpPr>
-        <p:spPr>
-          <a:xfrm>
-            <a:off x="406301" y="1637854"/>
-            <a:ext cx="8498026" cy="445591"/>
-          </a:xfrm>
-          <a:prstGeom prst="rect">
-            <a:avLst/>
-          </a:prstGeom>
-          <a:noFill/>
-          <a:ln/>
-        </p:spPr>
-        <p:txBody>
-          <a:bodyPr wrap="square" lIns="0" tIns="0" rIns="0" bIns="0" rtlCol="0" anchor="t"/>
-          <a:lstStyle/>
-          <a:p>
-            <a:pPr algn="l" indent="0" marL="0">
-              <a:lnSpc>
-                <a:spcPts val="1680"/>
-              </a:lnSpc>
-              <a:spcBef>
-                <a:spcPts val="300"/>
-              </a:spcBef>
-              <a:spcAft>
-                <a:spcPts val="300"/>
-              </a:spcAft>
-              <a:buNone/>
-            </a:pPr>
-            <a:r>
-              <a:rPr lang="en-US" sz="1200" dirty="0">
-                <a:solidFill>
-                  <a:srgbClr val="1C2833"/>
-                </a:solidFill>
-                <a:latin typeface="Arial" pitchFamily="34" charset="0"/>
-                <a:ea typeface="Arial" pitchFamily="34" charset="-122"/>
-                <a:cs typeface="Arial" pitchFamily="34" charset="-120"/>
-              </a:rPr>
-              <a:t>By the end of this lesson, students will explain </a:t>
-            </a:r>
-            <a:pPr algn="l" indent="0" marL="0">
-              <a:lnSpc>
-                <a:spcPts val="1680"/>
-              </a:lnSpc>
-              <a:spcBef>
-                <a:spcPts val="300"/>
-              </a:spcBef>
-              <a:spcAft>
-                <a:spcPts val="300"/>
-              </a:spcAft>
-              <a:buNone/>
-            </a:pPr>
-            <a:r>
-              <a:rPr lang="en-US" sz="1200" i="1" dirty="0">
-                <a:solidFill>
-                  <a:srgbClr val="1C2833"/>
-                </a:solidFill>
-                <a:latin typeface="Arial" pitchFamily="34" charset="0"/>
-                <a:ea typeface="Arial" pitchFamily="34" charset="-122"/>
-                <a:cs typeface="Arial" pitchFamily="34" charset="-120"/>
-              </a:rPr>
-              <a:t>why</a:t>
-            </a:r>
-            <a:pPr algn="l" indent="0" marL="0">
-              <a:lnSpc>
-                <a:spcPts val="1680"/>
-              </a:lnSpc>
-              <a:spcBef>
-                <a:spcPts val="300"/>
-              </a:spcBef>
-              <a:spcAft>
-                <a:spcPts val="300"/>
-              </a:spcAft>
-              <a:buNone/>
-            </a:pPr>
-            <a:r>
-              <a:rPr lang="en-US" sz="1200" dirty="0">
-                <a:solidFill>
-                  <a:srgbClr val="1C2833"/>
-                </a:solidFill>
-                <a:latin typeface="Arial" pitchFamily="34" charset="0"/>
-                <a:ea typeface="Arial" pitchFamily="34" charset="-122"/>
-                <a:cs typeface="Arial" pitchFamily="34" charset="-120"/>
-              </a:rPr>
-              <a:t> the Nikhilam rule produces the correct answer, using the identity </a:t>
-            </a:r>
-            <a:pPr algn="l" indent="0" marL="0">
-              <a:lnSpc>
-                <a:spcPts val="1680"/>
-              </a:lnSpc>
-              <a:spcBef>
-                <a:spcPts val="300"/>
-              </a:spcBef>
-              <a:spcAft>
-                <a:spcPts val="300"/>
-              </a:spcAft>
-              <a:buNone/>
-            </a:pPr>
-            <a:r>
-              <a:rPr lang="en-US" sz="1200" dirty="0">
-                <a:solidFill>
-                  <a:srgbClr val="1C2833"/>
-                </a:solidFill>
-                <a:latin typeface="Arial" pitchFamily="34" charset="0"/>
-                <a:ea typeface="Arial" pitchFamily="34" charset="-122"/>
-                <a:cs typeface="Arial" pitchFamily="34" charset="-120"/>
-              </a:rPr>
-              <a:t>10ⁿ − A = (10ⁿ − 1) − A + 1</a:t>
-            </a:r>
-            <a:pPr algn="l" indent="0" marL="0">
-              <a:lnSpc>
-                <a:spcPts val="1680"/>
-              </a:lnSpc>
-              <a:spcBef>
-                <a:spcPts val="300"/>
-              </a:spcBef>
-              <a:spcAft>
-                <a:spcPts val="300"/>
-              </a:spcAft>
-              <a:buNone/>
-            </a:pPr>
-            <a:r>
-              <a:rPr lang="en-US" sz="1200" dirty="0">
-                <a:solidFill>
-                  <a:srgbClr val="1C2833"/>
-                </a:solidFill>
-                <a:latin typeface="Arial" pitchFamily="34" charset="0"/>
-                <a:ea typeface="Arial" pitchFamily="34" charset="-122"/>
-                <a:cs typeface="Arial" pitchFamily="34" charset="-120"/>
-              </a:rPr>
-              <a:t>, and will draw a bar-model that shows the same idea visually.</a:t>
-            </a:r>
-            <a:endParaRPr lang="en-US" sz="1200" dirty="0"/>
-          </a:p>
-        </p:txBody>
-      </p:sp>
-      <p:sp>
-        <p:nvSpPr>
-          <p:cNvPr id="7" name="Text 5"/>
-          <p:cNvSpPr/>
-          <p:nvPr/>
-        </p:nvSpPr>
-        <p:spPr>
-          <a:xfrm>
             <a:off x="406301" y="4434929"/>
             <a:ext cx="8498026" cy="213271"/>
           </a:xfrm>
@@ -2343,7 +2956,7 @@
                 <a:ea typeface="Georgia" pitchFamily="34" charset="-122"/>
                 <a:cs typeface="Georgia" pitchFamily="34" charset="-120"/>
               </a:rPr>
-              <a:t>Teacher notes</a:t>
+              <a:t>Core (20 min) — The mathematical reason (cont.)</a:t>
             </a:r>
             <a:endParaRPr lang="en-US" sz="1800" dirty="0"/>
           </a:p>
@@ -2358,7 +2971,7 @@
         <p:spPr>
           <a:xfrm>
             <a:off x="406301" y="870942"/>
-            <a:ext cx="8498026" cy="1289149"/>
+            <a:ext cx="8498026" cy="213271"/>
           </a:xfrm>
           <a:prstGeom prst="rect">
             <a:avLst/>
@@ -2391,8 +3004,254 @@
                 <a:ea typeface="Arial" pitchFamily="34" charset="-122"/>
                 <a:cs typeface="Arial" pitchFamily="34" charset="-120"/>
               </a:rPr>
-              <a:t>– The most common student error in the paragraph: confusing "the last digit takes from 10" with "you add 1 at the end." These are the SAME operation, just expressed differently — </a:t>
-            </a:r>
+              <a:t>Now compare with the sūtra direct version:</a:t>
+            </a:r>
+            <a:endParaRPr lang="en-US" sz="1200" dirty="0"/>
+          </a:p>
+        </p:txBody>
+      </p:sp>
+      <p:sp>
+        <p:nvSpPr>
+          <p:cNvPr id="5" name="Text 3"/>
+          <p:cNvSpPr/>
+          <p:nvPr/>
+        </p:nvSpPr>
+        <p:spPr>
+          <a:xfrm>
+            <a:off x="406301" y="1173063"/>
+            <a:ext cx="8331398" cy="952202"/>
+          </a:xfrm>
+          <a:prstGeom prst="rect">
+            <a:avLst/>
+          </a:prstGeom>
+          <a:solidFill>
+            <a:srgbClr val="F4F8F9"/>
+          </a:solidFill>
+          <a:ln/>
+        </p:spPr>
+        <p:txBody>
+          <a:bodyPr wrap="square" rtlCol="0" anchor="ctr"/>
+          <a:lstStyle/>
+          <a:p>
+            <a:pPr indent="0" marL="0">
+              <a:buNone/>
+            </a:pPr>
+            <a:endParaRPr lang="en-US" dirty="0"/>
+          </a:p>
+        </p:txBody>
+      </p:sp>
+      <p:sp>
+        <p:nvSpPr>
+          <p:cNvPr id="6" name="Shape 4"/>
+          <p:cNvSpPr/>
+          <p:nvPr/>
+        </p:nvSpPr>
+        <p:spPr>
+          <a:xfrm>
+            <a:off x="430113" y="1173063"/>
+            <a:ext cx="0" cy="952202"/>
+          </a:xfrm>
+          <a:prstGeom prst="line">
+            <a:avLst/>
+          </a:prstGeom>
+          <a:noFill/>
+          <a:ln w="47625">
+            <a:solidFill>
+              <a:srgbClr val="277884"/>
+            </a:solidFill>
+            <a:prstDash val="solid"/>
+          </a:ln>
+        </p:spPr>
+      </p:sp>
+      <p:sp>
+        <p:nvSpPr>
+          <p:cNvPr id="7" name="Text 5"/>
+          <p:cNvSpPr/>
+          <p:nvPr/>
+        </p:nvSpPr>
+        <p:spPr>
+          <a:xfrm>
+            <a:off x="631627" y="1300014"/>
+            <a:ext cx="8086939" cy="174575"/>
+          </a:xfrm>
+          <a:prstGeom prst="rect">
+            <a:avLst/>
+          </a:prstGeom>
+          <a:noFill/>
+          <a:ln/>
+        </p:spPr>
+        <p:txBody>
+          <a:bodyPr wrap="square" lIns="0" tIns="0" rIns="0" bIns="0" rtlCol="0" anchor="t"/>
+          <a:lstStyle/>
+          <a:p>
+            <a:pPr algn="l" indent="0" marL="0">
+              <a:lnSpc>
+                <a:spcPts val="1375"/>
+              </a:lnSpc>
+              <a:buNone/>
+            </a:pPr>
+            <a:r>
+              <a:rPr lang="en-US" sz="1100" dirty="0">
+                <a:solidFill>
+                  <a:srgbClr val="1C2833"/>
+                </a:solidFill>
+                <a:latin typeface="Courier New" pitchFamily="34" charset="0"/>
+                <a:ea typeface="Courier New" pitchFamily="34" charset="-122"/>
+                <a:cs typeface="Courier New" pitchFamily="34" charset="-120"/>
+              </a:rPr>
+              <a:t>1000 − 567</a:t>
+            </a:r>
+            <a:endParaRPr lang="en-US" sz="1100" dirty="0"/>
+          </a:p>
+        </p:txBody>
+      </p:sp>
+      <p:sp>
+        <p:nvSpPr>
+          <p:cNvPr id="8" name="Text 6"/>
+          <p:cNvSpPr/>
+          <p:nvPr/>
+        </p:nvSpPr>
+        <p:spPr>
+          <a:xfrm>
+            <a:off x="631627" y="1474589"/>
+            <a:ext cx="8086939" cy="174575"/>
+          </a:xfrm>
+          <a:prstGeom prst="rect">
+            <a:avLst/>
+          </a:prstGeom>
+          <a:noFill/>
+          <a:ln/>
+        </p:spPr>
+        <p:txBody>
+          <a:bodyPr wrap="square" lIns="0" tIns="0" rIns="0" bIns="0" rtlCol="0" anchor="t"/>
+          <a:lstStyle/>
+          <a:p>
+            <a:pPr algn="l" indent="0" marL="0">
+              <a:lnSpc>
+                <a:spcPts val="1375"/>
+              </a:lnSpc>
+              <a:buNone/>
+            </a:pPr>
+            <a:r>
+              <a:rPr lang="en-US" sz="1100" dirty="0">
+                <a:solidFill>
+                  <a:srgbClr val="1C2833"/>
+                </a:solidFill>
+                <a:latin typeface="Courier New" pitchFamily="34" charset="0"/>
+                <a:ea typeface="Courier New" pitchFamily="34" charset="-122"/>
+                <a:cs typeface="Courier New" pitchFamily="34" charset="-120"/>
+              </a:rPr>
+              <a:t>= (9-5)(9-6)(10-7)         ← Nikhilam, last from 10</a:t>
+            </a:r>
+            <a:endParaRPr lang="en-US" sz="1100" dirty="0"/>
+          </a:p>
+        </p:txBody>
+      </p:sp>
+      <p:sp>
+        <p:nvSpPr>
+          <p:cNvPr id="9" name="Text 7"/>
+          <p:cNvSpPr/>
+          <p:nvPr/>
+        </p:nvSpPr>
+        <p:spPr>
+          <a:xfrm>
+            <a:off x="631627" y="1649164"/>
+            <a:ext cx="8086939" cy="174575"/>
+          </a:xfrm>
+          <a:prstGeom prst="rect">
+            <a:avLst/>
+          </a:prstGeom>
+          <a:noFill/>
+          <a:ln/>
+        </p:spPr>
+        <p:txBody>
+          <a:bodyPr wrap="square" lIns="0" tIns="0" rIns="0" bIns="0" rtlCol="0" anchor="t"/>
+          <a:lstStyle/>
+          <a:p>
+            <a:pPr algn="l" indent="0" marL="0">
+              <a:lnSpc>
+                <a:spcPts val="1375"/>
+              </a:lnSpc>
+              <a:buNone/>
+            </a:pPr>
+            <a:r>
+              <a:rPr lang="en-US" sz="1100" dirty="0">
+                <a:solidFill>
+                  <a:srgbClr val="1C2833"/>
+                </a:solidFill>
+                <a:latin typeface="Courier New" pitchFamily="34" charset="0"/>
+                <a:ea typeface="Courier New" pitchFamily="34" charset="-122"/>
+                <a:cs typeface="Courier New" pitchFamily="34" charset="-120"/>
+              </a:rPr>
+              <a:t>= 4 3 3</a:t>
+            </a:r>
+            <a:endParaRPr lang="en-US" sz="1100" dirty="0"/>
+          </a:p>
+        </p:txBody>
+      </p:sp>
+      <p:sp>
+        <p:nvSpPr>
+          <p:cNvPr id="10" name="Text 8"/>
+          <p:cNvSpPr/>
+          <p:nvPr/>
+        </p:nvSpPr>
+        <p:spPr>
+          <a:xfrm>
+            <a:off x="631627" y="1823740"/>
+            <a:ext cx="8086939" cy="174575"/>
+          </a:xfrm>
+          <a:prstGeom prst="rect">
+            <a:avLst/>
+          </a:prstGeom>
+          <a:noFill/>
+          <a:ln/>
+        </p:spPr>
+        <p:txBody>
+          <a:bodyPr wrap="square" lIns="0" tIns="0" rIns="0" bIns="0" rtlCol="0" anchor="t"/>
+          <a:lstStyle/>
+          <a:p>
+            <a:pPr algn="l" indent="0" marL="0">
+              <a:lnSpc>
+                <a:spcPts val="1375"/>
+              </a:lnSpc>
+              <a:buNone/>
+            </a:pPr>
+            <a:r>
+              <a:rPr lang="en-US" sz="1100" dirty="0">
+                <a:solidFill>
+                  <a:srgbClr val="1C2833"/>
+                </a:solidFill>
+                <a:latin typeface="Courier New" pitchFamily="34" charset="0"/>
+                <a:ea typeface="Courier New" pitchFamily="34" charset="-122"/>
+                <a:cs typeface="Courier New" pitchFamily="34" charset="-120"/>
+              </a:rPr>
+              <a:t>= 433.                     ✓</a:t>
+            </a:r>
+            <a:endParaRPr lang="en-US" sz="1100" dirty="0"/>
+          </a:p>
+        </p:txBody>
+      </p:sp>
+      <p:sp>
+        <p:nvSpPr>
+          <p:cNvPr id="11" name="Text 9"/>
+          <p:cNvSpPr/>
+          <p:nvPr/>
+        </p:nvSpPr>
+        <p:spPr>
+          <a:xfrm>
+            <a:off x="406301" y="2214116"/>
+            <a:ext cx="8498026" cy="213271"/>
+          </a:xfrm>
+          <a:prstGeom prst="rect">
+            <a:avLst/>
+          </a:prstGeom>
+          <a:noFill/>
+          <a:ln/>
+        </p:spPr>
+        <p:txBody>
+          <a:bodyPr wrap="square" lIns="0" tIns="0" rIns="0" bIns="0" rtlCol="0" anchor="t"/>
+          <a:lstStyle/>
+          <a:p>
             <a:pPr algn="l" indent="0" marL="0">
               <a:lnSpc>
                 <a:spcPts val="1680"/>
@@ -2406,38 +3265,15 @@
               <a:buNone/>
             </a:pPr>
             <a:r>
-              <a:rPr lang="en-US" sz="1200" dirty="0">
-                <a:solidFill>
-                  <a:srgbClr val="1C2833"/>
-                </a:solidFill>
-                <a:latin typeface="Arial" pitchFamily="34" charset="0"/>
-                <a:ea typeface="Arial" pitchFamily="34" charset="-122"/>
-                <a:cs typeface="Arial" pitchFamily="34" charset="-120"/>
-              </a:rPr>
-              <a:t>10 − x = (9 − x) + 1</a:t>
-            </a:r>
-            <a:pPr algn="l" indent="0" marL="0">
-              <a:lnSpc>
-                <a:spcPts val="1680"/>
-              </a:lnSpc>
-              <a:spcBef>
-                <a:spcPts val="300"/>
-              </a:spcBef>
-              <a:spcAft>
-                <a:spcPts val="300"/>
-              </a:spcAft>
-              <a:buNone/>
-            </a:pPr>
-            <a:r>
-              <a:rPr lang="en-US" sz="1200" dirty="0">
-                <a:solidFill>
-                  <a:srgbClr val="1C2833"/>
-                </a:solidFill>
-                <a:latin typeface="Arial" pitchFamily="34" charset="0"/>
-                <a:ea typeface="Arial" pitchFamily="34" charset="-122"/>
-                <a:cs typeface="Arial" pitchFamily="34" charset="-120"/>
-              </a:rPr>
-              <a:t>. Some students will write both; that's fine. – Some students prefer the visual bar-model; some prefer the algebra. Both are valid. Honour the choice and ask them to draw the OTHER one as homework. – Honest provenance is essential here. Don't oversell. Some students (or parents) believe Nikhilam is "ancient Vedic mathematics." Clarify gently; preview the Senior-band treatment of the historicity question.</a:t>
+              <a:rPr lang="en-US" sz="1200" i="1" dirty="0">
+                <a:solidFill>
+                  <a:srgbClr val="1C2833"/>
+                </a:solidFill>
+                <a:latin typeface="Arial" pitchFamily="34" charset="0"/>
+                <a:ea typeface="Arial" pitchFamily="34" charset="-122"/>
+                <a:cs typeface="Arial" pitchFamily="34" charset="-120"/>
+              </a:rPr>
+              <a:t>"Same answer. The sūtra is just the identity, made into a mnemonic."</a:t>
             </a:r>
             <a:endParaRPr lang="en-US" sz="1200" dirty="0"/>
           </a:p>
@@ -2445,7 +3281,7 @@
       </p:sp>
       <p:sp>
         <p:nvSpPr>
-          <p:cNvPr id="5" name="Text 3"/>
+          <p:cNvPr id="12" name="Text 10"/>
           <p:cNvSpPr/>
           <p:nvPr/>
         </p:nvSpPr>
@@ -2595,7 +3431,7 @@
                 <a:ea typeface="Georgia" pitchFamily="34" charset="-122"/>
                 <a:cs typeface="Georgia" pitchFamily="34" charset="-120"/>
               </a:rPr>
-              <a:t>Citation(s) used in this lesson</a:t>
+              <a:t>Core (20 min) — The mathematical reason (cont.)</a:t>
             </a:r>
             <a:endParaRPr lang="en-US" sz="1800" dirty="0"/>
           </a:p>
@@ -2609,101 +3445,7 @@
         </p:nvSpPr>
         <p:spPr>
           <a:xfrm>
-            <a:off x="406301" y="870942"/>
-            <a:ext cx="8498026" cy="213271"/>
-          </a:xfrm>
-          <a:prstGeom prst="rect">
-            <a:avLst/>
-          </a:prstGeom>
-          <a:noFill/>
-          <a:ln/>
-        </p:spPr>
-        <p:txBody>
-          <a:bodyPr wrap="square" lIns="0" tIns="0" rIns="0" bIns="0" rtlCol="0" anchor="t"/>
-          <a:lstStyle/>
-          <a:p>
-            <a:pPr algn="l" indent="0" marL="0">
-              <a:lnSpc>
-                <a:spcPts val="1680"/>
-              </a:lnSpc>
-              <a:spcBef>
-                <a:spcPts val="300"/>
-              </a:spcBef>
-              <a:spcAft>
-                <a:spcPts val="300"/>
-              </a:spcAft>
-              <a:buNone/>
-            </a:pPr>
-            <a:r>
-              <a:rPr lang="en-US" sz="1200" dirty="0">
-                <a:solidFill>
-                  <a:srgbClr val="1C2833"/>
-                </a:solidFill>
-                <a:latin typeface="Arial" pitchFamily="34" charset="0"/>
-                <a:ea typeface="Arial" pitchFamily="34" charset="-122"/>
-                <a:cs typeface="Arial" pitchFamily="34" charset="-120"/>
-              </a:rPr>
-              <a:t>– Tirthaji, </a:t>
-            </a:r>
-            <a:pPr algn="l" indent="0" marL="0">
-              <a:lnSpc>
-                <a:spcPts val="1680"/>
-              </a:lnSpc>
-              <a:spcBef>
-                <a:spcPts val="300"/>
-              </a:spcBef>
-              <a:spcAft>
-                <a:spcPts val="300"/>
-              </a:spcAft>
-              <a:buNone/>
-            </a:pPr>
-            <a:r>
-              <a:rPr lang="en-US" sz="1200" i="1" dirty="0">
-                <a:solidFill>
-                  <a:srgbClr val="1C2833"/>
-                </a:solidFill>
-                <a:latin typeface="Arial" pitchFamily="34" charset="0"/>
-                <a:ea typeface="Arial" pitchFamily="34" charset="-122"/>
-                <a:cs typeface="Arial" pitchFamily="34" charset="-120"/>
-              </a:rPr>
-              <a:t>Vedic Mathematics</a:t>
-            </a:r>
-            <a:pPr algn="l" indent="0" marL="0">
-              <a:lnSpc>
-                <a:spcPts val="1680"/>
-              </a:lnSpc>
-              <a:spcBef>
-                <a:spcPts val="300"/>
-              </a:spcBef>
-              <a:spcAft>
-                <a:spcPts val="300"/>
-              </a:spcAft>
-              <a:buNone/>
-            </a:pPr>
-            <a:r>
-              <a:rPr lang="en-US" sz="1200" dirty="0">
-                <a:solidFill>
-                  <a:srgbClr val="1C2833"/>
-                </a:solidFill>
-                <a:latin typeface="Arial" pitchFamily="34" charset="0"/>
-                <a:ea typeface="Arial" pitchFamily="34" charset="-122"/>
-                <a:cs typeface="Arial" pitchFamily="34" charset="-120"/>
-              </a:rPr>
-              <a:t> (1965), sūtra Nikhilam (#2) — primary source.</a:t>
-            </a:r>
-            <a:endParaRPr lang="en-US" sz="1200" dirty="0"/>
-          </a:p>
-        </p:txBody>
-      </p:sp>
-      <p:sp>
-        <p:nvSpPr>
-          <p:cNvPr id="5" name="Text 3"/>
-          <p:cNvSpPr/>
-          <p:nvPr/>
-        </p:nvSpPr>
-        <p:spPr>
-          <a:xfrm>
-            <a:off x="634901" y="1173063"/>
+            <a:off x="634901" y="883593"/>
             <a:ext cx="8102798" cy="281880"/>
           </a:xfrm>
           <a:prstGeom prst="rect">
@@ -2727,6 +3469,215 @@
               <a:buChar char="•"/>
             </a:pPr>
             <a:r>
+              <a:rPr lang="en-US" sz="1200" b="1" dirty="0">
+                <a:solidFill>
+                  <a:srgbClr val="1C2833"/>
+                </a:solidFill>
+                <a:latin typeface="Arial" pitchFamily="34" charset="0"/>
+                <a:ea typeface="Arial" pitchFamily="34" charset="-122"/>
+                <a:cs typeface="Arial" pitchFamily="34" charset="-120"/>
+              </a:rPr>
+              <a:t>Bar model.</a:t>
+            </a:r>
+            <a:endParaRPr lang="en-US" sz="1200" dirty="0"/>
+          </a:p>
+        </p:txBody>
+      </p:sp>
+      <p:sp>
+        <p:nvSpPr>
+          <p:cNvPr id="5" name="Text 3"/>
+          <p:cNvSpPr/>
+          <p:nvPr/>
+        </p:nvSpPr>
+        <p:spPr>
+          <a:xfrm>
+            <a:off x="406301" y="1254323"/>
+            <a:ext cx="8498026" cy="436066"/>
+          </a:xfrm>
+          <a:prstGeom prst="rect">
+            <a:avLst/>
+          </a:prstGeom>
+          <a:noFill/>
+          <a:ln/>
+        </p:spPr>
+        <p:txBody>
+          <a:bodyPr wrap="square" lIns="0" tIns="0" rIns="0" bIns="0" rtlCol="0" anchor="t"/>
+          <a:lstStyle/>
+          <a:p>
+            <a:pPr algn="l" indent="0" marL="0">
+              <a:lnSpc>
+                <a:spcPts val="1680"/>
+              </a:lnSpc>
+              <a:spcBef>
+                <a:spcPts val="300"/>
+              </a:spcBef>
+              <a:spcAft>
+                <a:spcPts val="300"/>
+              </a:spcAft>
+              <a:buNone/>
+            </a:pPr>
+            <a:r>
+              <a:rPr lang="en-US" sz="1200" dirty="0">
+                <a:solidFill>
+                  <a:srgbClr val="1C2833"/>
+                </a:solidFill>
+                <a:latin typeface="Arial" pitchFamily="34" charset="0"/>
+                <a:ea typeface="Arial" pitchFamily="34" charset="-122"/>
+                <a:cs typeface="Arial" pitchFamily="34" charset="-120"/>
+              </a:rPr>
+              <a:t>Draw a long horizontal bar labelled </a:t>
+            </a:r>
+            <a:pPr algn="l" indent="0" marL="0">
+              <a:lnSpc>
+                <a:spcPts val="1680"/>
+              </a:lnSpc>
+              <a:spcBef>
+                <a:spcPts val="300"/>
+              </a:spcBef>
+              <a:spcAft>
+                <a:spcPts val="300"/>
+              </a:spcAft>
+              <a:buNone/>
+            </a:pPr>
+            <a:r>
+              <a:rPr lang="en-US" sz="1200" dirty="0">
+                <a:solidFill>
+                  <a:srgbClr val="1C2833"/>
+                </a:solidFill>
+                <a:latin typeface="Arial" pitchFamily="34" charset="0"/>
+                <a:ea typeface="Arial" pitchFamily="34" charset="-122"/>
+                <a:cs typeface="Arial" pitchFamily="34" charset="-120"/>
+              </a:rPr>
+              <a:t>1000</a:t>
+            </a:r>
+            <a:pPr algn="l" indent="0" marL="0">
+              <a:lnSpc>
+                <a:spcPts val="1680"/>
+              </a:lnSpc>
+              <a:spcBef>
+                <a:spcPts val="300"/>
+              </a:spcBef>
+              <a:spcAft>
+                <a:spcPts val="300"/>
+              </a:spcAft>
+              <a:buNone/>
+            </a:pPr>
+            <a:r>
+              <a:rPr lang="en-US" sz="1200" dirty="0">
+                <a:solidFill>
+                  <a:srgbClr val="1C2833"/>
+                </a:solidFill>
+                <a:latin typeface="Arial" pitchFamily="34" charset="0"/>
+                <a:ea typeface="Arial" pitchFamily="34" charset="-122"/>
+                <a:cs typeface="Arial" pitchFamily="34" charset="-120"/>
+              </a:rPr>
+              <a:t>. Inside, mark off a left segment labelled </a:t>
+            </a:r>
+            <a:pPr algn="l" indent="0" marL="0">
+              <a:lnSpc>
+                <a:spcPts val="1680"/>
+              </a:lnSpc>
+              <a:spcBef>
+                <a:spcPts val="300"/>
+              </a:spcBef>
+              <a:spcAft>
+                <a:spcPts val="300"/>
+              </a:spcAft>
+              <a:buNone/>
+            </a:pPr>
+            <a:r>
+              <a:rPr lang="en-US" sz="1200" dirty="0">
+                <a:solidFill>
+                  <a:srgbClr val="1C2833"/>
+                </a:solidFill>
+                <a:latin typeface="Arial" pitchFamily="34" charset="0"/>
+                <a:ea typeface="Arial" pitchFamily="34" charset="-122"/>
+                <a:cs typeface="Arial" pitchFamily="34" charset="-120"/>
+              </a:rPr>
+              <a:t>567</a:t>
+            </a:r>
+            <a:pPr algn="l" indent="0" marL="0">
+              <a:lnSpc>
+                <a:spcPts val="1680"/>
+              </a:lnSpc>
+              <a:spcBef>
+                <a:spcPts val="300"/>
+              </a:spcBef>
+              <a:spcAft>
+                <a:spcPts val="300"/>
+              </a:spcAft>
+              <a:buNone/>
+            </a:pPr>
+            <a:r>
+              <a:rPr lang="en-US" sz="1200" dirty="0">
+                <a:solidFill>
+                  <a:srgbClr val="1C2833"/>
+                </a:solidFill>
+                <a:latin typeface="Arial" pitchFamily="34" charset="0"/>
+                <a:ea typeface="Arial" pitchFamily="34" charset="-122"/>
+                <a:cs typeface="Arial" pitchFamily="34" charset="-120"/>
+              </a:rPr>
+              <a:t> and a right segment labelled </a:t>
+            </a:r>
+            <a:pPr algn="l" indent="0" marL="0">
+              <a:lnSpc>
+                <a:spcPts val="1680"/>
+              </a:lnSpc>
+              <a:spcBef>
+                <a:spcPts val="300"/>
+              </a:spcBef>
+              <a:spcAft>
+                <a:spcPts val="300"/>
+              </a:spcAft>
+              <a:buNone/>
+            </a:pPr>
+            <a:r>
+              <a:rPr lang="en-US" sz="1200" dirty="0">
+                <a:solidFill>
+                  <a:srgbClr val="1C2833"/>
+                </a:solidFill>
+                <a:latin typeface="Arial" pitchFamily="34" charset="0"/>
+                <a:ea typeface="Arial" pitchFamily="34" charset="-122"/>
+                <a:cs typeface="Arial" pitchFamily="34" charset="-120"/>
+              </a:rPr>
+              <a:t>?</a:t>
+            </a:r>
+            <a:pPr algn="l" indent="0" marL="0">
+              <a:lnSpc>
+                <a:spcPts val="1680"/>
+              </a:lnSpc>
+              <a:spcBef>
+                <a:spcPts val="300"/>
+              </a:spcBef>
+              <a:spcAft>
+                <a:spcPts val="300"/>
+              </a:spcAft>
+              <a:buNone/>
+            </a:pPr>
+            <a:r>
+              <a:rPr lang="en-US" sz="1200" dirty="0">
+                <a:solidFill>
+                  <a:srgbClr val="1C2833"/>
+                </a:solidFill>
+                <a:latin typeface="Arial" pitchFamily="34" charset="0"/>
+                <a:ea typeface="Arial" pitchFamily="34" charset="-122"/>
+                <a:cs typeface="Arial" pitchFamily="34" charset="-120"/>
+              </a:rPr>
+              <a:t> (the unknown). </a:t>
+            </a:r>
+            <a:pPr algn="l" indent="0" marL="0">
+              <a:lnSpc>
+                <a:spcPts val="1680"/>
+              </a:lnSpc>
+              <a:spcBef>
+                <a:spcPts val="300"/>
+              </a:spcBef>
+              <a:spcAft>
+                <a:spcPts val="300"/>
+              </a:spcAft>
+              <a:buNone/>
+            </a:pPr>
+            <a:r>
               <a:rPr lang="en-US" sz="1200" i="1" dirty="0">
                 <a:solidFill>
                   <a:srgbClr val="1C2833"/>
@@ -2735,16 +3686,732 @@
                 <a:ea typeface="Arial" pitchFamily="34" charset="-122"/>
                 <a:cs typeface="Arial" pitchFamily="34" charset="-120"/>
               </a:rPr>
-              <a:t>Microsoft Word - sutras1.pdf</a:t>
-            </a:r>
-            <a:pPr algn="l" indent="0" marL="0">
+              <a:t>"What we want is the right segment."</a:t>
+            </a:r>
+            <a:endParaRPr lang="en-US" sz="1200" dirty="0"/>
+          </a:p>
+        </p:txBody>
+      </p:sp>
+      <p:sp>
+        <p:nvSpPr>
+          <p:cNvPr id="6" name="Text 4"/>
+          <p:cNvSpPr/>
+          <p:nvPr/>
+        </p:nvSpPr>
+        <p:spPr>
+          <a:xfrm>
+            <a:off x="406301" y="1766590"/>
+            <a:ext cx="8498026" cy="222796"/>
+          </a:xfrm>
+          <a:prstGeom prst="rect">
+            <a:avLst/>
+          </a:prstGeom>
+          <a:noFill/>
+          <a:ln/>
+        </p:spPr>
+        <p:txBody>
+          <a:bodyPr wrap="square" lIns="0" tIns="0" rIns="0" bIns="0" rtlCol="0" anchor="t"/>
+          <a:lstStyle/>
+          <a:p>
+            <a:pPr algn="l" indent="0" marL="0">
+              <a:lnSpc>
+                <a:spcPts val="1680"/>
+              </a:lnSpc>
+              <a:spcBef>
+                <a:spcPts val="300"/>
+              </a:spcBef>
+              <a:spcAft>
+                <a:spcPts val="300"/>
+              </a:spcAft>
+              <a:buNone/>
+            </a:pPr>
+            <a:r>
+              <a:rPr lang="en-US" sz="1200" dirty="0">
+                <a:solidFill>
+                  <a:srgbClr val="1C2833"/>
+                </a:solidFill>
+                <a:latin typeface="Arial" pitchFamily="34" charset="0"/>
+                <a:ea typeface="Arial" pitchFamily="34" charset="-122"/>
+                <a:cs typeface="Arial" pitchFamily="34" charset="-120"/>
+              </a:rPr>
+              <a:t>Now ask: </a:t>
+            </a:r>
+            <a:pPr algn="l" indent="0" marL="0">
+              <a:lnSpc>
+                <a:spcPts val="1680"/>
+              </a:lnSpc>
+              <a:spcBef>
+                <a:spcPts val="300"/>
+              </a:spcBef>
+              <a:spcAft>
+                <a:spcPts val="300"/>
+              </a:spcAft>
+              <a:buNone/>
+            </a:pPr>
+            <a:r>
+              <a:rPr lang="en-US" sz="1200" i="1" dirty="0">
+                <a:solidFill>
+                  <a:srgbClr val="1C2833"/>
+                </a:solidFill>
+                <a:latin typeface="Arial" pitchFamily="34" charset="0"/>
+                <a:ea typeface="Arial" pitchFamily="34" charset="-122"/>
+                <a:cs typeface="Arial" pitchFamily="34" charset="-120"/>
+              </a:rPr>
+              <a:t>"What's the length of the bar minus 1?"</a:t>
+            </a:r>
+            <a:pPr algn="l" indent="0" marL="0">
+              <a:lnSpc>
+                <a:spcPts val="1680"/>
+              </a:lnSpc>
+              <a:spcBef>
+                <a:spcPts val="300"/>
+              </a:spcBef>
+              <a:spcAft>
+                <a:spcPts val="300"/>
+              </a:spcAft>
+              <a:buNone/>
+            </a:pPr>
+            <a:r>
+              <a:rPr lang="en-US" sz="1200" dirty="0">
+                <a:solidFill>
+                  <a:srgbClr val="1C2833"/>
+                </a:solidFill>
+                <a:latin typeface="Arial" pitchFamily="34" charset="0"/>
+                <a:ea typeface="Arial" pitchFamily="34" charset="-122"/>
+                <a:cs typeface="Arial" pitchFamily="34" charset="-120"/>
+              </a:rPr>
+              <a:t> — Answer: </a:t>
+            </a:r>
+            <a:pPr algn="l" indent="0" marL="0">
+              <a:lnSpc>
+                <a:spcPts val="1680"/>
+              </a:lnSpc>
+              <a:spcBef>
+                <a:spcPts val="300"/>
+              </a:spcBef>
+              <a:spcAft>
+                <a:spcPts val="300"/>
+              </a:spcAft>
+              <a:buNone/>
+            </a:pPr>
+            <a:r>
+              <a:rPr lang="en-US" sz="1200" dirty="0">
+                <a:solidFill>
+                  <a:srgbClr val="1C2833"/>
+                </a:solidFill>
+                <a:latin typeface="Arial" pitchFamily="34" charset="0"/>
+                <a:ea typeface="Arial" pitchFamily="34" charset="-122"/>
+                <a:cs typeface="Arial" pitchFamily="34" charset="-120"/>
+              </a:rPr>
+              <a:t>999</a:t>
+            </a:r>
+            <a:pPr algn="l" indent="0" marL="0">
+              <a:lnSpc>
+                <a:spcPts val="1680"/>
+              </a:lnSpc>
+              <a:spcBef>
+                <a:spcPts val="300"/>
+              </a:spcBef>
+              <a:spcAft>
+                <a:spcPts val="300"/>
+              </a:spcAft>
+              <a:buNone/>
+            </a:pPr>
+            <a:r>
+              <a:rPr lang="en-US" sz="1200" dirty="0">
+                <a:solidFill>
+                  <a:srgbClr val="1C2833"/>
+                </a:solidFill>
+                <a:latin typeface="Arial" pitchFamily="34" charset="0"/>
+                <a:ea typeface="Arial" pitchFamily="34" charset="-122"/>
+                <a:cs typeface="Arial" pitchFamily="34" charset="-120"/>
+              </a:rPr>
+              <a:t>.</a:t>
+            </a:r>
+            <a:endParaRPr lang="en-US" sz="1200" dirty="0"/>
+          </a:p>
+        </p:txBody>
+      </p:sp>
+      <p:sp>
+        <p:nvSpPr>
+          <p:cNvPr id="7" name="Text 5"/>
+          <p:cNvSpPr/>
+          <p:nvPr/>
+        </p:nvSpPr>
+        <p:spPr>
+          <a:xfrm>
+            <a:off x="406301" y="4434929"/>
+            <a:ext cx="8498026" cy="213271"/>
+          </a:xfrm>
+          <a:prstGeom prst="rect">
+            <a:avLst/>
+          </a:prstGeom>
+          <a:noFill/>
+          <a:ln/>
+        </p:spPr>
+        <p:txBody>
+          <a:bodyPr wrap="square" lIns="0" tIns="0" rIns="0" bIns="0" rtlCol="0" anchor="t"/>
+          <a:lstStyle/>
+          <a:p>
+            <a:pPr algn="l" indent="0" marL="0">
+              <a:lnSpc>
+                <a:spcPts val="1680"/>
+              </a:lnSpc>
+              <a:spcBef>
+                <a:spcPts val="300"/>
+              </a:spcBef>
+              <a:spcAft>
+                <a:spcPts val="300"/>
+              </a:spcAft>
+              <a:buNone/>
+            </a:pPr>
+            <a:r>
+              <a:rPr lang="en-US" sz="1200" dirty="0">
+                <a:solidFill>
+                  <a:srgbClr val="1C2833"/>
+                </a:solidFill>
+                <a:latin typeface="Arial" pitchFamily="34" charset="0"/>
+                <a:ea typeface="Arial" pitchFamily="34" charset="-122"/>
+                <a:cs typeface="Arial" pitchFamily="34" charset="-120"/>
+              </a:rPr>
+              <a:t>Middle ·  · IKS Curriculum</a:t>
+            </a:r>
+            <a:endParaRPr lang="en-US" sz="1200" dirty="0"/>
+          </a:p>
+        </p:txBody>
+      </p:sp>
+    </p:spTree>
+  </p:cSld>
+  <p:clrMapOvr>
+    <a:masterClrMapping/>
+  </p:clrMapOvr>
+</p:sld>
+</file>
+
+<file path=ppt/slides/slide12.xml><?xml version="1.0" encoding="utf-8"?>
+<p:sld xmlns:a="http://schemas.openxmlformats.org/drawingml/2006/main" xmlns:r="http://schemas.openxmlformats.org/officeDocument/2006/relationships" xmlns:p="http://schemas.openxmlformats.org/presentationml/2006/main">
+  <p:cSld name="Slide 12">
+    <p:bg>
+      <p:bgPr>
+        <a:solidFill>
+          <a:srgbClr val="FFFFFF"/>
+        </a:solidFill>
+      </p:bgPr>
+    </p:bg>
+    <p:spTree>
+      <p:nvGrpSpPr>
+        <p:cNvPr id="1" name=""/>
+        <p:cNvGrpSpPr/>
+        <p:nvPr/>
+      </p:nvGrpSpPr>
+      <p:grpSpPr>
+        <a:xfrm>
+          <a:off x="0" y="0"/>
+          <a:ext cx="0" cy="0"/>
+          <a:chOff x="0" y="0"/>
+          <a:chExt cx="0" cy="0"/>
+        </a:xfrm>
+      </p:grpSpPr>
+      <p:sp>
+        <p:nvSpPr>
+          <p:cNvPr id="2" name="Text 0"/>
+          <p:cNvSpPr/>
+          <p:nvPr/>
+        </p:nvSpPr>
+        <p:spPr>
+          <a:xfrm>
+            <a:off x="0" y="0"/>
+            <a:ext cx="9144000" cy="101501"/>
+          </a:xfrm>
+          <a:prstGeom prst="rect">
+            <a:avLst/>
+          </a:prstGeom>
+          <a:solidFill>
+            <a:srgbClr val="277884"/>
+          </a:solidFill>
+          <a:ln/>
+        </p:spPr>
+        <p:txBody>
+          <a:bodyPr wrap="square" rtlCol="0" anchor="ctr"/>
+          <a:lstStyle/>
+          <a:p>
+            <a:pPr indent="0" marL="0">
+              <a:buNone/>
+            </a:pPr>
+            <a:endParaRPr lang="en-US" dirty="0"/>
+          </a:p>
+        </p:txBody>
+      </p:sp>
+      <p:sp>
+        <p:nvSpPr>
+          <p:cNvPr id="3" name="Text 1"/>
+          <p:cNvSpPr/>
+          <p:nvPr/>
+        </p:nvSpPr>
+        <p:spPr>
+          <a:xfrm>
+            <a:off x="406301" y="457051"/>
+            <a:ext cx="8498026" cy="274290"/>
+          </a:xfrm>
+          <a:prstGeom prst="rect">
+            <a:avLst/>
+          </a:prstGeom>
+          <a:noFill/>
+          <a:ln/>
+        </p:spPr>
+        <p:txBody>
+          <a:bodyPr wrap="square" lIns="0" tIns="0" rIns="0" bIns="0" rtlCol="0" anchor="t"/>
+          <a:lstStyle/>
+          <a:p>
+            <a:pPr algn="l" indent="0" marL="0">
+              <a:lnSpc>
+                <a:spcPts val="2160"/>
+              </a:lnSpc>
+              <a:spcBef>
+                <a:spcPts val="600"/>
+              </a:spcBef>
+              <a:spcAft>
+                <a:spcPts val="800"/>
+              </a:spcAft>
+              <a:buNone/>
+            </a:pPr>
+            <a:r>
+              <a:rPr lang="en-US" sz="1800" b="1" dirty="0">
+                <a:solidFill>
+                  <a:srgbClr val="FE4447"/>
+                </a:solidFill>
+                <a:latin typeface="Georgia" pitchFamily="34" charset="0"/>
+                <a:ea typeface="Georgia" pitchFamily="34" charset="-122"/>
+                <a:cs typeface="Georgia" pitchFamily="34" charset="-120"/>
+              </a:rPr>
+              <a:t>Core (20 min) — The mathematical reason (cont.)</a:t>
+            </a:r>
+            <a:endParaRPr lang="en-US" sz="1800" dirty="0"/>
+          </a:p>
+        </p:txBody>
+      </p:sp>
+      <p:sp>
+        <p:nvSpPr>
+          <p:cNvPr id="4" name="Text 2"/>
+          <p:cNvSpPr/>
+          <p:nvPr/>
+        </p:nvSpPr>
+        <p:spPr>
+          <a:xfrm>
+            <a:off x="406301" y="870942"/>
+            <a:ext cx="8498026" cy="445591"/>
+          </a:xfrm>
+          <a:prstGeom prst="rect">
+            <a:avLst/>
+          </a:prstGeom>
+          <a:noFill/>
+          <a:ln/>
+        </p:spPr>
+        <p:txBody>
+          <a:bodyPr wrap="square" lIns="0" tIns="0" rIns="0" bIns="0" rtlCol="0" anchor="t"/>
+          <a:lstStyle/>
+          <a:p>
+            <a:pPr algn="l" indent="0" marL="0">
+              <a:lnSpc>
+                <a:spcPts val="1680"/>
+              </a:lnSpc>
+              <a:spcBef>
+                <a:spcPts val="300"/>
+              </a:spcBef>
+              <a:spcAft>
+                <a:spcPts val="300"/>
+              </a:spcAft>
+              <a:buNone/>
+            </a:pPr>
+            <a:r>
+              <a:rPr lang="en-US" sz="1200" dirty="0">
+                <a:solidFill>
+                  <a:srgbClr val="1C2833"/>
+                </a:solidFill>
+                <a:latin typeface="Arial" pitchFamily="34" charset="0"/>
+                <a:ea typeface="Arial" pitchFamily="34" charset="-122"/>
+                <a:cs typeface="Arial" pitchFamily="34" charset="-120"/>
+              </a:rPr>
+              <a:t>Mark a tiny </a:t>
+            </a:r>
+            <a:pPr algn="l" indent="0" marL="0">
+              <a:lnSpc>
+                <a:spcPts val="1680"/>
+              </a:lnSpc>
+              <a:spcBef>
+                <a:spcPts val="300"/>
+              </a:spcBef>
+              <a:spcAft>
+                <a:spcPts val="300"/>
+              </a:spcAft>
+              <a:buNone/>
+            </a:pPr>
+            <a:r>
+              <a:rPr lang="en-US" sz="1200" dirty="0">
+                <a:solidFill>
+                  <a:srgbClr val="1C2833"/>
+                </a:solidFill>
+                <a:latin typeface="Arial" pitchFamily="34" charset="0"/>
+                <a:ea typeface="Arial" pitchFamily="34" charset="-122"/>
+                <a:cs typeface="Arial" pitchFamily="34" charset="-120"/>
+              </a:rPr>
+              <a:t>+1</a:t>
+            </a:r>
+            <a:pPr algn="l" indent="0" marL="0">
+              <a:lnSpc>
+                <a:spcPts val="1680"/>
+              </a:lnSpc>
+              <a:spcBef>
+                <a:spcPts val="300"/>
+              </a:spcBef>
+              <a:spcAft>
+                <a:spcPts val="300"/>
+              </a:spcAft>
+              <a:buNone/>
+            </a:pPr>
+            <a:r>
+              <a:rPr lang="en-US" sz="1200" dirty="0">
+                <a:solidFill>
+                  <a:srgbClr val="1C2833"/>
+                </a:solidFill>
+                <a:latin typeface="Arial" pitchFamily="34" charset="0"/>
+                <a:ea typeface="Arial" pitchFamily="34" charset="-122"/>
+                <a:cs typeface="Arial" pitchFamily="34" charset="-120"/>
+              </a:rPr>
+              <a:t> sliver at the right end of the bar. Now </a:t>
+            </a:r>
+            <a:pPr algn="l" indent="0" marL="0">
+              <a:lnSpc>
+                <a:spcPts val="1680"/>
+              </a:lnSpc>
+              <a:spcBef>
+                <a:spcPts val="300"/>
+              </a:spcBef>
+              <a:spcAft>
+                <a:spcPts val="300"/>
+              </a:spcAft>
+              <a:buNone/>
+            </a:pPr>
+            <a:r>
+              <a:rPr lang="en-US" sz="1200" dirty="0">
+                <a:solidFill>
+                  <a:srgbClr val="1C2833"/>
+                </a:solidFill>
+                <a:latin typeface="Arial" pitchFamily="34" charset="0"/>
+                <a:ea typeface="Arial" pitchFamily="34" charset="-122"/>
+                <a:cs typeface="Arial" pitchFamily="34" charset="-120"/>
+              </a:rPr>
+              <a:t>999 = 567 + (right segment − 1)</a:t>
+            </a:r>
+            <a:pPr algn="l" indent="0" marL="0">
+              <a:lnSpc>
+                <a:spcPts val="1680"/>
+              </a:lnSpc>
+              <a:spcBef>
+                <a:spcPts val="300"/>
+              </a:spcBef>
+              <a:spcAft>
+                <a:spcPts val="300"/>
+              </a:spcAft>
+              <a:buNone/>
+            </a:pPr>
+            <a:r>
+              <a:rPr lang="en-US" sz="1200" dirty="0">
+                <a:solidFill>
+                  <a:srgbClr val="1C2833"/>
+                </a:solidFill>
+                <a:latin typeface="Arial" pitchFamily="34" charset="0"/>
+                <a:ea typeface="Arial" pitchFamily="34" charset="-122"/>
+                <a:cs typeface="Arial" pitchFamily="34" charset="-120"/>
+              </a:rPr>
+              <a:t>, so right segment = </a:t>
+            </a:r>
+            <a:pPr algn="l" indent="0" marL="0">
+              <a:lnSpc>
+                <a:spcPts val="1680"/>
+              </a:lnSpc>
+              <a:spcBef>
+                <a:spcPts val="300"/>
+              </a:spcBef>
+              <a:spcAft>
+                <a:spcPts val="300"/>
+              </a:spcAft>
+              <a:buNone/>
+            </a:pPr>
+            <a:r>
+              <a:rPr lang="en-US" sz="1200" dirty="0">
+                <a:solidFill>
+                  <a:srgbClr val="1C2833"/>
+                </a:solidFill>
+                <a:latin typeface="Arial" pitchFamily="34" charset="0"/>
+                <a:ea typeface="Arial" pitchFamily="34" charset="-122"/>
+                <a:cs typeface="Arial" pitchFamily="34" charset="-120"/>
+              </a:rPr>
+              <a:t>(999 − 567) + 1 = 432 + 1 = 433</a:t>
+            </a:r>
+            <a:pPr algn="l" indent="0" marL="0">
+              <a:lnSpc>
+                <a:spcPts val="1680"/>
+              </a:lnSpc>
+              <a:spcBef>
+                <a:spcPts val="300"/>
+              </a:spcBef>
+              <a:spcAft>
+                <a:spcPts val="300"/>
+              </a:spcAft>
+              <a:buNone/>
+            </a:pPr>
+            <a:r>
+              <a:rPr lang="en-US" sz="1200" dirty="0">
+                <a:solidFill>
+                  <a:srgbClr val="1C2833"/>
+                </a:solidFill>
+                <a:latin typeface="Arial" pitchFamily="34" charset="0"/>
+                <a:ea typeface="Arial" pitchFamily="34" charset="-122"/>
+                <a:cs typeface="Arial" pitchFamily="34" charset="-120"/>
+              </a:rPr>
+              <a:t>.</a:t>
+            </a:r>
+            <a:endParaRPr lang="en-US" sz="1200" dirty="0"/>
+          </a:p>
+        </p:txBody>
+      </p:sp>
+      <p:sp>
+        <p:nvSpPr>
+          <p:cNvPr id="5" name="Text 3"/>
+          <p:cNvSpPr/>
+          <p:nvPr/>
+        </p:nvSpPr>
+        <p:spPr>
+          <a:xfrm>
+            <a:off x="406301" y="1392734"/>
+            <a:ext cx="8498026" cy="213271"/>
+          </a:xfrm>
+          <a:prstGeom prst="rect">
+            <a:avLst/>
+          </a:prstGeom>
+          <a:noFill/>
+          <a:ln/>
+        </p:spPr>
+        <p:txBody>
+          <a:bodyPr wrap="square" lIns="0" tIns="0" rIns="0" bIns="0" rtlCol="0" anchor="t"/>
+          <a:lstStyle/>
+          <a:p>
+            <a:pPr algn="l" indent="0" marL="0">
+              <a:lnSpc>
+                <a:spcPts val="1680"/>
+              </a:lnSpc>
+              <a:spcBef>
+                <a:spcPts val="300"/>
+              </a:spcBef>
+              <a:spcAft>
+                <a:spcPts val="300"/>
+              </a:spcAft>
+              <a:buNone/>
+            </a:pPr>
+            <a:r>
+              <a:rPr lang="en-US" sz="1200" i="1" dirty="0">
+                <a:solidFill>
+                  <a:srgbClr val="1C2833"/>
+                </a:solidFill>
+                <a:latin typeface="Arial" pitchFamily="34" charset="0"/>
+                <a:ea typeface="Arial" pitchFamily="34" charset="-122"/>
+                <a:cs typeface="Arial" pitchFamily="34" charset="-120"/>
+              </a:rPr>
+              <a:t>"That's the picture-version of the algebra. Same thing."</a:t>
+            </a:r>
+            <a:endParaRPr lang="en-US" sz="1200" dirty="0"/>
+          </a:p>
+        </p:txBody>
+      </p:sp>
+      <p:sp>
+        <p:nvSpPr>
+          <p:cNvPr id="6" name="Text 4"/>
+          <p:cNvSpPr/>
+          <p:nvPr/>
+        </p:nvSpPr>
+        <p:spPr>
+          <a:xfrm>
+            <a:off x="406301" y="4434929"/>
+            <a:ext cx="8498026" cy="213271"/>
+          </a:xfrm>
+          <a:prstGeom prst="rect">
+            <a:avLst/>
+          </a:prstGeom>
+          <a:noFill/>
+          <a:ln/>
+        </p:spPr>
+        <p:txBody>
+          <a:bodyPr wrap="square" lIns="0" tIns="0" rIns="0" bIns="0" rtlCol="0" anchor="t"/>
+          <a:lstStyle/>
+          <a:p>
+            <a:pPr algn="l" indent="0" marL="0">
+              <a:lnSpc>
+                <a:spcPts val="1680"/>
+              </a:lnSpc>
+              <a:spcBef>
+                <a:spcPts val="300"/>
+              </a:spcBef>
+              <a:spcAft>
+                <a:spcPts val="300"/>
+              </a:spcAft>
+              <a:buNone/>
+            </a:pPr>
+            <a:r>
+              <a:rPr lang="en-US" sz="1200" dirty="0">
+                <a:solidFill>
+                  <a:srgbClr val="1C2833"/>
+                </a:solidFill>
+                <a:latin typeface="Arial" pitchFamily="34" charset="0"/>
+                <a:ea typeface="Arial" pitchFamily="34" charset="-122"/>
+                <a:cs typeface="Arial" pitchFamily="34" charset="-120"/>
+              </a:rPr>
+              <a:t>Middle ·  · IKS Curriculum</a:t>
+            </a:r>
+            <a:endParaRPr lang="en-US" sz="1200" dirty="0"/>
+          </a:p>
+        </p:txBody>
+      </p:sp>
+    </p:spTree>
+  </p:cSld>
+  <p:clrMapOvr>
+    <a:masterClrMapping/>
+  </p:clrMapOvr>
+</p:sld>
+</file>
+
+<file path=ppt/slides/slide13.xml><?xml version="1.0" encoding="utf-8"?>
+<p:sld xmlns:a="http://schemas.openxmlformats.org/drawingml/2006/main" xmlns:r="http://schemas.openxmlformats.org/officeDocument/2006/relationships" xmlns:p="http://schemas.openxmlformats.org/presentationml/2006/main">
+  <p:cSld name="Slide 13">
+    <p:bg>
+      <p:bgPr>
+        <a:solidFill>
+          <a:srgbClr val="FFFFFF"/>
+        </a:solidFill>
+      </p:bgPr>
+    </p:bg>
+    <p:spTree>
+      <p:nvGrpSpPr>
+        <p:cNvPr id="1" name=""/>
+        <p:cNvGrpSpPr/>
+        <p:nvPr/>
+      </p:nvGrpSpPr>
+      <p:grpSpPr>
+        <a:xfrm>
+          <a:off x="0" y="0"/>
+          <a:ext cx="0" cy="0"/>
+          <a:chOff x="0" y="0"/>
+          <a:chExt cx="0" cy="0"/>
+        </a:xfrm>
+      </p:grpSpPr>
+      <p:sp>
+        <p:nvSpPr>
+          <p:cNvPr id="2" name="Text 0"/>
+          <p:cNvSpPr/>
+          <p:nvPr/>
+        </p:nvSpPr>
+        <p:spPr>
+          <a:xfrm>
+            <a:off x="0" y="0"/>
+            <a:ext cx="9144000" cy="101501"/>
+          </a:xfrm>
+          <a:prstGeom prst="rect">
+            <a:avLst/>
+          </a:prstGeom>
+          <a:solidFill>
+            <a:srgbClr val="277884"/>
+          </a:solidFill>
+          <a:ln/>
+        </p:spPr>
+        <p:txBody>
+          <a:bodyPr wrap="square" rtlCol="0" anchor="ctr"/>
+          <a:lstStyle/>
+          <a:p>
+            <a:pPr indent="0" marL="0">
+              <a:buNone/>
+            </a:pPr>
+            <a:endParaRPr lang="en-US" dirty="0"/>
+          </a:p>
+        </p:txBody>
+      </p:sp>
+      <p:sp>
+        <p:nvSpPr>
+          <p:cNvPr id="3" name="Text 1"/>
+          <p:cNvSpPr/>
+          <p:nvPr/>
+        </p:nvSpPr>
+        <p:spPr>
+          <a:xfrm>
+            <a:off x="406301" y="457051"/>
+            <a:ext cx="8498026" cy="274290"/>
+          </a:xfrm>
+          <a:prstGeom prst="rect">
+            <a:avLst/>
+          </a:prstGeom>
+          <a:noFill/>
+          <a:ln/>
+        </p:spPr>
+        <p:txBody>
+          <a:bodyPr wrap="square" lIns="0" tIns="0" rIns="0" bIns="0" rtlCol="0" anchor="t"/>
+          <a:lstStyle/>
+          <a:p>
+            <a:pPr algn="l" indent="0" marL="0">
+              <a:lnSpc>
+                <a:spcPts val="2160"/>
+              </a:lnSpc>
+              <a:spcBef>
+                <a:spcPts val="600"/>
+              </a:spcBef>
+              <a:spcAft>
+                <a:spcPts val="800"/>
+              </a:spcAft>
+              <a:buNone/>
+            </a:pPr>
+            <a:r>
+              <a:rPr lang="en-US" sz="1800" b="1" dirty="0">
+                <a:solidFill>
+                  <a:srgbClr val="FE4447"/>
+                </a:solidFill>
+                <a:latin typeface="Georgia" pitchFamily="34" charset="0"/>
+                <a:ea typeface="Georgia" pitchFamily="34" charset="-122"/>
+                <a:cs typeface="Georgia" pitchFamily="34" charset="-120"/>
+              </a:rPr>
+              <a:t>Activity (15 min) — Explain to a friend</a:t>
+            </a:r>
+            <a:endParaRPr lang="en-US" sz="1800" dirty="0"/>
+          </a:p>
+        </p:txBody>
+      </p:sp>
+      <p:sp>
+        <p:nvSpPr>
+          <p:cNvPr id="4" name="Text 2"/>
+          <p:cNvSpPr/>
+          <p:nvPr/>
+        </p:nvSpPr>
+        <p:spPr>
+          <a:xfrm>
+            <a:off x="634901" y="883593"/>
+            <a:ext cx="8102798" cy="281880"/>
+          </a:xfrm>
+          <a:prstGeom prst="rect">
+            <a:avLst/>
+          </a:prstGeom>
+          <a:noFill/>
+          <a:ln/>
+        </p:spPr>
+        <p:txBody>
+          <a:bodyPr wrap="square" lIns="0" tIns="0" rIns="0" bIns="0" rtlCol="0" anchor="t"/>
+          <a:lstStyle/>
+          <a:p>
+            <a:pPr algn="l" marL="342900" indent="-342900">
               <a:lnSpc>
                 <a:spcPts val="1620"/>
               </a:lnSpc>
               <a:spcAft>
                 <a:spcPts val="300"/>
               </a:spcAft>
-              <a:buNone/>
+              <a:buSzPct val="100000"/>
+              <a:buChar char="•"/>
             </a:pPr>
             <a:r>
               <a:rPr lang="en-US" sz="1200" dirty="0">
@@ -2755,7 +4422,7 @@
                 <a:ea typeface="Arial" pitchFamily="34" charset="-122"/>
                 <a:cs typeface="Arial" pitchFamily="34" charset="-120"/>
               </a:rPr>
-              <a:t> — wall reference for the full 16 sūtra list.</a:t>
+              <a:t>Worksheet prompt:</a:t>
             </a:r>
             <a:endParaRPr lang="en-US" sz="1200" dirty="0"/>
           </a:p>
@@ -2763,7 +4430,2484 @@
       </p:sp>
       <p:sp>
         <p:nvSpPr>
+          <p:cNvPr id="5" name="Text 3"/>
+          <p:cNvSpPr/>
+          <p:nvPr/>
+        </p:nvSpPr>
+        <p:spPr>
+          <a:xfrm>
+            <a:off x="406301" y="1266974"/>
+            <a:ext cx="8331398" cy="842963"/>
+          </a:xfrm>
+          <a:prstGeom prst="rect">
+            <a:avLst/>
+          </a:prstGeom>
+          <a:solidFill>
+            <a:srgbClr val="F4F8F9"/>
+          </a:solidFill>
+          <a:ln/>
+        </p:spPr>
+        <p:txBody>
+          <a:bodyPr wrap="square" rtlCol="0" anchor="ctr"/>
+          <a:lstStyle/>
+          <a:p>
+            <a:pPr indent="0" marL="0">
+              <a:buNone/>
+            </a:pPr>
+            <a:endParaRPr lang="en-US" dirty="0"/>
+          </a:p>
+        </p:txBody>
+      </p:sp>
+      <p:sp>
+        <p:nvSpPr>
+          <p:cNvPr id="6" name="Shape 4"/>
+          <p:cNvSpPr/>
+          <p:nvPr/>
+        </p:nvSpPr>
+        <p:spPr>
+          <a:xfrm>
+            <a:off x="434876" y="1266974"/>
+            <a:ext cx="0" cy="842962"/>
+          </a:xfrm>
+          <a:prstGeom prst="line">
+            <a:avLst/>
+          </a:prstGeom>
+          <a:noFill/>
+          <a:ln w="57150">
+            <a:solidFill>
+              <a:srgbClr val="FE4447"/>
+            </a:solidFill>
+            <a:prstDash val="solid"/>
+          </a:ln>
+        </p:spPr>
+      </p:sp>
+      <p:sp>
+        <p:nvSpPr>
+          <p:cNvPr id="7" name="Text 5"/>
+          <p:cNvSpPr/>
+          <p:nvPr/>
+        </p:nvSpPr>
+        <p:spPr>
+          <a:xfrm>
+            <a:off x="692051" y="1457474"/>
+            <a:ext cx="7973389" cy="461963"/>
+          </a:xfrm>
+          <a:prstGeom prst="rect">
+            <a:avLst/>
+          </a:prstGeom>
+          <a:noFill/>
+          <a:ln/>
+        </p:spPr>
+        <p:txBody>
+          <a:bodyPr wrap="square" lIns="0" tIns="0" rIns="0" bIns="0" rtlCol="0" anchor="t"/>
+          <a:lstStyle/>
+          <a:p>
+            <a:pPr algn="l" indent="0" marL="0">
+              <a:lnSpc>
+                <a:spcPts val="1820"/>
+              </a:lnSpc>
+              <a:spcBef>
+                <a:spcPts val="300"/>
+              </a:spcBef>
+              <a:spcAft>
+                <a:spcPts val="300"/>
+              </a:spcAft>
+              <a:buNone/>
+            </a:pPr>
+            <a:r>
+              <a:rPr lang="en-US" sz="1300" dirty="0">
+                <a:solidFill>
+                  <a:srgbClr val="1C2833"/>
+                </a:solidFill>
+                <a:latin typeface="Georgia" pitchFamily="34" charset="0"/>
+                <a:ea typeface="Georgia" pitchFamily="34" charset="-122"/>
+                <a:cs typeface="Georgia" pitchFamily="34" charset="-120"/>
+              </a:rPr>
+              <a:t>Imagine your Grade 4 cousin asks: </a:t>
+            </a:r>
+            <a:pPr algn="l" indent="0" marL="0">
+              <a:lnSpc>
+                <a:spcPts val="1820"/>
+              </a:lnSpc>
+              <a:spcBef>
+                <a:spcPts val="300"/>
+              </a:spcBef>
+              <a:spcAft>
+                <a:spcPts val="300"/>
+              </a:spcAft>
+              <a:buNone/>
+            </a:pPr>
+            <a:r>
+              <a:rPr lang="en-US" sz="1300" i="1" dirty="0">
+                <a:solidFill>
+                  <a:srgbClr val="1C2833"/>
+                </a:solidFill>
+                <a:latin typeface="Georgia" pitchFamily="34" charset="0"/>
+                <a:ea typeface="Georgia" pitchFamily="34" charset="-122"/>
+                <a:cs typeface="Georgia" pitchFamily="34" charset="-120"/>
+              </a:rPr>
+              <a:t>"Why does Nikhilam work? Isn't it just magic?"</a:t>
+            </a:r>
+            <a:pPr algn="l" indent="0" marL="0">
+              <a:lnSpc>
+                <a:spcPts val="1820"/>
+              </a:lnSpc>
+              <a:spcBef>
+                <a:spcPts val="300"/>
+              </a:spcBef>
+              <a:spcAft>
+                <a:spcPts val="300"/>
+              </a:spcAft>
+              <a:buNone/>
+            </a:pPr>
+            <a:r>
+              <a:rPr lang="en-US" sz="1300" dirty="0">
+                <a:solidFill>
+                  <a:srgbClr val="1C2833"/>
+                </a:solidFill>
+                <a:latin typeface="Georgia" pitchFamily="34" charset="0"/>
+                <a:ea typeface="Georgia" pitchFamily="34" charset="-122"/>
+                <a:cs typeface="Georgia" pitchFamily="34" charset="-120"/>
+              </a:rPr>
+              <a:t> In 4–6 sentences, explain why it's NOT magic. Use the words </a:t>
+            </a:r>
+            <a:pPr algn="l" indent="0" marL="0">
+              <a:lnSpc>
+                <a:spcPts val="1820"/>
+              </a:lnSpc>
+              <a:spcBef>
+                <a:spcPts val="300"/>
+              </a:spcBef>
+              <a:spcAft>
+                <a:spcPts val="300"/>
+              </a:spcAft>
+              <a:buNone/>
+            </a:pPr>
+            <a:r>
+              <a:rPr lang="en-US" sz="1300" b="1" i="1" dirty="0">
+                <a:solidFill>
+                  <a:srgbClr val="1C2833"/>
+                </a:solidFill>
+                <a:latin typeface="Georgia" pitchFamily="34" charset="0"/>
+                <a:ea typeface="Georgia" pitchFamily="34" charset="-122"/>
+                <a:cs typeface="Georgia" pitchFamily="34" charset="-120"/>
+              </a:rPr>
+              <a:t>nine</a:t>
+            </a:r>
+            <a:pPr algn="l" indent="0" marL="0">
+              <a:lnSpc>
+                <a:spcPts val="1820"/>
+              </a:lnSpc>
+              <a:spcBef>
+                <a:spcPts val="300"/>
+              </a:spcBef>
+              <a:spcAft>
+                <a:spcPts val="300"/>
+              </a:spcAft>
+              <a:buNone/>
+            </a:pPr>
+            <a:r>
+              <a:rPr lang="en-US" sz="1300" dirty="0">
+                <a:solidFill>
+                  <a:srgbClr val="1C2833"/>
+                </a:solidFill>
+                <a:latin typeface="Georgia" pitchFamily="34" charset="0"/>
+                <a:ea typeface="Georgia" pitchFamily="34" charset="-122"/>
+                <a:cs typeface="Georgia" pitchFamily="34" charset="-120"/>
+              </a:rPr>
+              <a:t>, </a:t>
+            </a:r>
+            <a:pPr algn="l" indent="0" marL="0">
+              <a:lnSpc>
+                <a:spcPts val="1820"/>
+              </a:lnSpc>
+              <a:spcBef>
+                <a:spcPts val="300"/>
+              </a:spcBef>
+              <a:spcAft>
+                <a:spcPts val="300"/>
+              </a:spcAft>
+              <a:buNone/>
+            </a:pPr>
+            <a:r>
+              <a:rPr lang="en-US" sz="1300" b="1" i="1" dirty="0">
+                <a:solidFill>
+                  <a:srgbClr val="1C2833"/>
+                </a:solidFill>
+                <a:latin typeface="Georgia" pitchFamily="34" charset="0"/>
+                <a:ea typeface="Georgia" pitchFamily="34" charset="-122"/>
+                <a:cs typeface="Georgia" pitchFamily="34" charset="-120"/>
+              </a:rPr>
+              <a:t>ten</a:t>
+            </a:r>
+            <a:pPr algn="l" indent="0" marL="0">
+              <a:lnSpc>
+                <a:spcPts val="1820"/>
+              </a:lnSpc>
+              <a:spcBef>
+                <a:spcPts val="300"/>
+              </a:spcBef>
+              <a:spcAft>
+                <a:spcPts val="300"/>
+              </a:spcAft>
+              <a:buNone/>
+            </a:pPr>
+            <a:r>
+              <a:rPr lang="en-US" sz="1300" dirty="0">
+                <a:solidFill>
+                  <a:srgbClr val="1C2833"/>
+                </a:solidFill>
+                <a:latin typeface="Georgia" pitchFamily="34" charset="0"/>
+                <a:ea typeface="Georgia" pitchFamily="34" charset="-122"/>
+                <a:cs typeface="Georgia" pitchFamily="34" charset="-120"/>
+              </a:rPr>
+              <a:t>, </a:t>
+            </a:r>
+            <a:pPr algn="l" indent="0" marL="0">
+              <a:lnSpc>
+                <a:spcPts val="1820"/>
+              </a:lnSpc>
+              <a:spcBef>
+                <a:spcPts val="300"/>
+              </a:spcBef>
+              <a:spcAft>
+                <a:spcPts val="300"/>
+              </a:spcAft>
+              <a:buNone/>
+            </a:pPr>
+            <a:r>
+              <a:rPr lang="en-US" sz="1300" b="1" i="1" dirty="0">
+                <a:solidFill>
+                  <a:srgbClr val="1C2833"/>
+                </a:solidFill>
+                <a:latin typeface="Georgia" pitchFamily="34" charset="0"/>
+                <a:ea typeface="Georgia" pitchFamily="34" charset="-122"/>
+                <a:cs typeface="Georgia" pitchFamily="34" charset="-120"/>
+              </a:rPr>
+              <a:t>plus one</a:t>
+            </a:r>
+            <a:pPr algn="l" indent="0" marL="0">
+              <a:lnSpc>
+                <a:spcPts val="1820"/>
+              </a:lnSpc>
+              <a:spcBef>
+                <a:spcPts val="300"/>
+              </a:spcBef>
+              <a:spcAft>
+                <a:spcPts val="300"/>
+              </a:spcAft>
+              <a:buNone/>
+            </a:pPr>
+            <a:r>
+              <a:rPr lang="en-US" sz="1300" dirty="0">
+                <a:solidFill>
+                  <a:srgbClr val="1C2833"/>
+                </a:solidFill>
+                <a:latin typeface="Georgia" pitchFamily="34" charset="0"/>
+                <a:ea typeface="Georgia" pitchFamily="34" charset="-122"/>
+                <a:cs typeface="Georgia" pitchFamily="34" charset="-120"/>
+              </a:rPr>
+              <a:t>, and </a:t>
+            </a:r>
+            <a:pPr algn="l" indent="0" marL="0">
+              <a:lnSpc>
+                <a:spcPts val="1820"/>
+              </a:lnSpc>
+              <a:spcBef>
+                <a:spcPts val="300"/>
+              </a:spcBef>
+              <a:spcAft>
+                <a:spcPts val="300"/>
+              </a:spcAft>
+              <a:buNone/>
+            </a:pPr>
+            <a:r>
+              <a:rPr lang="en-US" sz="1300" b="1" i="1" dirty="0">
+                <a:solidFill>
+                  <a:srgbClr val="1C2833"/>
+                </a:solidFill>
+                <a:latin typeface="Georgia" pitchFamily="34" charset="0"/>
+                <a:ea typeface="Georgia" pitchFamily="34" charset="-122"/>
+                <a:cs typeface="Georgia" pitchFamily="34" charset="-120"/>
+              </a:rPr>
+              <a:t>place value</a:t>
+            </a:r>
+            <a:pPr algn="l" indent="0" marL="0">
+              <a:lnSpc>
+                <a:spcPts val="1820"/>
+              </a:lnSpc>
+              <a:spcBef>
+                <a:spcPts val="300"/>
+              </a:spcBef>
+              <a:spcAft>
+                <a:spcPts val="300"/>
+              </a:spcAft>
+              <a:buNone/>
+            </a:pPr>
+            <a:r>
+              <a:rPr lang="en-US" sz="1300" dirty="0">
+                <a:solidFill>
+                  <a:srgbClr val="1C2833"/>
+                </a:solidFill>
+                <a:latin typeface="Georgia" pitchFamily="34" charset="0"/>
+                <a:ea typeface="Georgia" pitchFamily="34" charset="-122"/>
+                <a:cs typeface="Georgia" pitchFamily="34" charset="-120"/>
+              </a:rPr>
+              <a:t>.</a:t>
+            </a:r>
+            <a:endParaRPr lang="en-US" sz="1300" dirty="0"/>
+          </a:p>
+        </p:txBody>
+      </p:sp>
+      <p:sp>
+        <p:nvSpPr>
+          <p:cNvPr id="8" name="Text 6"/>
+          <p:cNvSpPr/>
+          <p:nvPr/>
+        </p:nvSpPr>
+        <p:spPr>
+          <a:xfrm>
+            <a:off x="406301" y="4434929"/>
+            <a:ext cx="8498026" cy="213271"/>
+          </a:xfrm>
+          <a:prstGeom prst="rect">
+            <a:avLst/>
+          </a:prstGeom>
+          <a:noFill/>
+          <a:ln/>
+        </p:spPr>
+        <p:txBody>
+          <a:bodyPr wrap="square" lIns="0" tIns="0" rIns="0" bIns="0" rtlCol="0" anchor="t"/>
+          <a:lstStyle/>
+          <a:p>
+            <a:pPr algn="l" indent="0" marL="0">
+              <a:lnSpc>
+                <a:spcPts val="1680"/>
+              </a:lnSpc>
+              <a:spcBef>
+                <a:spcPts val="300"/>
+              </a:spcBef>
+              <a:spcAft>
+                <a:spcPts val="300"/>
+              </a:spcAft>
+              <a:buNone/>
+            </a:pPr>
+            <a:r>
+              <a:rPr lang="en-US" sz="1200" dirty="0">
+                <a:solidFill>
+                  <a:srgbClr val="1C2833"/>
+                </a:solidFill>
+                <a:latin typeface="Arial" pitchFamily="34" charset="0"/>
+                <a:ea typeface="Arial" pitchFamily="34" charset="-122"/>
+                <a:cs typeface="Arial" pitchFamily="34" charset="-120"/>
+              </a:rPr>
+              <a:t>Middle ·  · IKS Curriculum</a:t>
+            </a:r>
+            <a:endParaRPr lang="en-US" sz="1200" dirty="0"/>
+          </a:p>
+        </p:txBody>
+      </p:sp>
+    </p:spTree>
+  </p:cSld>
+  <p:clrMapOvr>
+    <a:masterClrMapping/>
+  </p:clrMapOvr>
+</p:sld>
+</file>
+
+<file path=ppt/slides/slide14.xml><?xml version="1.0" encoding="utf-8"?>
+<p:sld xmlns:a="http://schemas.openxmlformats.org/drawingml/2006/main" xmlns:r="http://schemas.openxmlformats.org/officeDocument/2006/relationships" xmlns:p="http://schemas.openxmlformats.org/presentationml/2006/main">
+  <p:cSld name="Slide 14">
+    <p:bg>
+      <p:bgPr>
+        <a:solidFill>
+          <a:srgbClr val="FFFFFF"/>
+        </a:solidFill>
+      </p:bgPr>
+    </p:bg>
+    <p:spTree>
+      <p:nvGrpSpPr>
+        <p:cNvPr id="1" name=""/>
+        <p:cNvGrpSpPr/>
+        <p:nvPr/>
+      </p:nvGrpSpPr>
+      <p:grpSpPr>
+        <a:xfrm>
+          <a:off x="0" y="0"/>
+          <a:ext cx="0" cy="0"/>
+          <a:chOff x="0" y="0"/>
+          <a:chExt cx="0" cy="0"/>
+        </a:xfrm>
+      </p:grpSpPr>
+      <p:sp>
+        <p:nvSpPr>
+          <p:cNvPr id="2" name="Text 0"/>
+          <p:cNvSpPr/>
+          <p:nvPr/>
+        </p:nvSpPr>
+        <p:spPr>
+          <a:xfrm>
+            <a:off x="0" y="0"/>
+            <a:ext cx="9144000" cy="101501"/>
+          </a:xfrm>
+          <a:prstGeom prst="rect">
+            <a:avLst/>
+          </a:prstGeom>
+          <a:solidFill>
+            <a:srgbClr val="277884"/>
+          </a:solidFill>
+          <a:ln/>
+        </p:spPr>
+        <p:txBody>
+          <a:bodyPr wrap="square" rtlCol="0" anchor="ctr"/>
+          <a:lstStyle/>
+          <a:p>
+            <a:pPr indent="0" marL="0">
+              <a:buNone/>
+            </a:pPr>
+            <a:endParaRPr lang="en-US" dirty="0"/>
+          </a:p>
+        </p:txBody>
+      </p:sp>
+      <p:sp>
+        <p:nvSpPr>
+          <p:cNvPr id="3" name="Text 1"/>
+          <p:cNvSpPr/>
+          <p:nvPr/>
+        </p:nvSpPr>
+        <p:spPr>
+          <a:xfrm>
+            <a:off x="406301" y="457051"/>
+            <a:ext cx="8498026" cy="274290"/>
+          </a:xfrm>
+          <a:prstGeom prst="rect">
+            <a:avLst/>
+          </a:prstGeom>
+          <a:noFill/>
+          <a:ln/>
+        </p:spPr>
+        <p:txBody>
+          <a:bodyPr wrap="square" lIns="0" tIns="0" rIns="0" bIns="0" rtlCol="0" anchor="t"/>
+          <a:lstStyle/>
+          <a:p>
+            <a:pPr algn="l" indent="0" marL="0">
+              <a:lnSpc>
+                <a:spcPts val="2160"/>
+              </a:lnSpc>
+              <a:spcBef>
+                <a:spcPts val="600"/>
+              </a:spcBef>
+              <a:spcAft>
+                <a:spcPts val="800"/>
+              </a:spcAft>
+              <a:buNone/>
+            </a:pPr>
+            <a:r>
+              <a:rPr lang="en-US" sz="1800" b="1" dirty="0">
+                <a:solidFill>
+                  <a:srgbClr val="FE4447"/>
+                </a:solidFill>
+                <a:latin typeface="Georgia" pitchFamily="34" charset="0"/>
+                <a:ea typeface="Georgia" pitchFamily="34" charset="-122"/>
+                <a:cs typeface="Georgia" pitchFamily="34" charset="-120"/>
+              </a:rPr>
+              <a:t>Activity (15 min) — Explain to a friend (cont.)</a:t>
+            </a:r>
+            <a:endParaRPr lang="en-US" sz="1800" dirty="0"/>
+          </a:p>
+        </p:txBody>
+      </p:sp>
+      <p:sp>
+        <p:nvSpPr>
+          <p:cNvPr id="4" name="Text 2"/>
+          <p:cNvSpPr/>
+          <p:nvPr/>
+        </p:nvSpPr>
+        <p:spPr>
+          <a:xfrm>
+            <a:off x="634901" y="883593"/>
+            <a:ext cx="8102798" cy="525661"/>
+          </a:xfrm>
+          <a:prstGeom prst="rect">
+            <a:avLst/>
+          </a:prstGeom>
+          <a:noFill/>
+          <a:ln/>
+        </p:spPr>
+        <p:txBody>
+          <a:bodyPr wrap="square" lIns="0" tIns="0" rIns="0" bIns="0" rtlCol="0" anchor="t"/>
+          <a:lstStyle/>
+          <a:p>
+            <a:pPr algn="l" marL="342900" indent="-342900">
+              <a:lnSpc>
+                <a:spcPts val="1620"/>
+              </a:lnSpc>
+              <a:spcAft>
+                <a:spcPts val="300"/>
+              </a:spcAft>
+              <a:buSzPct val="100000"/>
+              <a:buChar char="•"/>
+            </a:pPr>
+            <a:r>
+              <a:rPr lang="en-US" sz="1200" dirty="0">
+                <a:solidFill>
+                  <a:srgbClr val="1C2833"/>
+                </a:solidFill>
+                <a:latin typeface="Arial" pitchFamily="34" charset="0"/>
+                <a:ea typeface="Arial" pitchFamily="34" charset="-122"/>
+                <a:cs typeface="Arial" pitchFamily="34" charset="-120"/>
+              </a:rPr>
+              <a:t>10 min individual writing.</a:t>
+            </a:r>
+            <a:endParaRPr lang="en-US" sz="1200" dirty="0"/>
+          </a:p>
+          <a:p>
+            <a:pPr algn="l" marL="342900" indent="-342900">
+              <a:lnSpc>
+                <a:spcPts val="1620"/>
+              </a:lnSpc>
+              <a:spcAft>
+                <a:spcPts val="300"/>
+              </a:spcAft>
+              <a:buSzPct val="100000"/>
+              <a:buChar char="•"/>
+            </a:pPr>
+            <a:r>
+              <a:rPr lang="en-US" sz="1200" dirty="0">
+                <a:solidFill>
+                  <a:srgbClr val="1C2833"/>
+                </a:solidFill>
+                <a:latin typeface="Arial" pitchFamily="34" charset="0"/>
+                <a:ea typeface="Arial" pitchFamily="34" charset="-122"/>
+                <a:cs typeface="Arial" pitchFamily="34" charset="-120"/>
+              </a:rPr>
+              <a:t>5 min pair-share: each partner reads their paragraph; partner says one thing that's clear and one that's unclear.</a:t>
+            </a:r>
+            <a:endParaRPr lang="en-US" sz="1200" dirty="0"/>
+          </a:p>
+        </p:txBody>
+      </p:sp>
+      <p:sp>
+        <p:nvSpPr>
+          <p:cNvPr id="5" name="Text 3"/>
+          <p:cNvSpPr/>
+          <p:nvPr/>
+        </p:nvSpPr>
+        <p:spPr>
+          <a:xfrm>
+            <a:off x="406301" y="4434929"/>
+            <a:ext cx="8498026" cy="213271"/>
+          </a:xfrm>
+          <a:prstGeom prst="rect">
+            <a:avLst/>
+          </a:prstGeom>
+          <a:noFill/>
+          <a:ln/>
+        </p:spPr>
+        <p:txBody>
+          <a:bodyPr wrap="square" lIns="0" tIns="0" rIns="0" bIns="0" rtlCol="0" anchor="t"/>
+          <a:lstStyle/>
+          <a:p>
+            <a:pPr algn="l" indent="0" marL="0">
+              <a:lnSpc>
+                <a:spcPts val="1680"/>
+              </a:lnSpc>
+              <a:spcBef>
+                <a:spcPts val="300"/>
+              </a:spcBef>
+              <a:spcAft>
+                <a:spcPts val="300"/>
+              </a:spcAft>
+              <a:buNone/>
+            </a:pPr>
+            <a:r>
+              <a:rPr lang="en-US" sz="1200" dirty="0">
+                <a:solidFill>
+                  <a:srgbClr val="1C2833"/>
+                </a:solidFill>
+                <a:latin typeface="Arial" pitchFamily="34" charset="0"/>
+                <a:ea typeface="Arial" pitchFamily="34" charset="-122"/>
+                <a:cs typeface="Arial" pitchFamily="34" charset="-120"/>
+              </a:rPr>
+              <a:t>Middle ·  · IKS Curriculum</a:t>
+            </a:r>
+            <a:endParaRPr lang="en-US" sz="1200" dirty="0"/>
+          </a:p>
+        </p:txBody>
+      </p:sp>
+    </p:spTree>
+  </p:cSld>
+  <p:clrMapOvr>
+    <a:masterClrMapping/>
+  </p:clrMapOvr>
+</p:sld>
+</file>
+
+<file path=ppt/slides/slide15.xml><?xml version="1.0" encoding="utf-8"?>
+<p:sld xmlns:a="http://schemas.openxmlformats.org/drawingml/2006/main" xmlns:r="http://schemas.openxmlformats.org/officeDocument/2006/relationships" xmlns:p="http://schemas.openxmlformats.org/presentationml/2006/main">
+  <p:cSld name="Slide 15">
+    <p:bg>
+      <p:bgPr>
+        <a:solidFill>
+          <a:srgbClr val="FFFFFF"/>
+        </a:solidFill>
+      </p:bgPr>
+    </p:bg>
+    <p:spTree>
+      <p:nvGrpSpPr>
+        <p:cNvPr id="1" name=""/>
+        <p:cNvGrpSpPr/>
+        <p:nvPr/>
+      </p:nvGrpSpPr>
+      <p:grpSpPr>
+        <a:xfrm>
+          <a:off x="0" y="0"/>
+          <a:ext cx="0" cy="0"/>
+          <a:chOff x="0" y="0"/>
+          <a:chExt cx="0" cy="0"/>
+        </a:xfrm>
+      </p:grpSpPr>
+      <p:sp>
+        <p:nvSpPr>
+          <p:cNvPr id="2" name="Text 0"/>
+          <p:cNvSpPr/>
+          <p:nvPr/>
+        </p:nvSpPr>
+        <p:spPr>
+          <a:xfrm>
+            <a:off x="0" y="0"/>
+            <a:ext cx="9144000" cy="101501"/>
+          </a:xfrm>
+          <a:prstGeom prst="rect">
+            <a:avLst/>
+          </a:prstGeom>
+          <a:solidFill>
+            <a:srgbClr val="277884"/>
+          </a:solidFill>
+          <a:ln/>
+        </p:spPr>
+        <p:txBody>
+          <a:bodyPr wrap="square" rtlCol="0" anchor="ctr"/>
+          <a:lstStyle/>
+          <a:p>
+            <a:pPr indent="0" marL="0">
+              <a:buNone/>
+            </a:pPr>
+            <a:endParaRPr lang="en-US" dirty="0"/>
+          </a:p>
+        </p:txBody>
+      </p:sp>
+      <p:sp>
+        <p:nvSpPr>
+          <p:cNvPr id="3" name="Text 1"/>
+          <p:cNvSpPr/>
+          <p:nvPr/>
+        </p:nvSpPr>
+        <p:spPr>
+          <a:xfrm>
+            <a:off x="406301" y="457051"/>
+            <a:ext cx="8498026" cy="274290"/>
+          </a:xfrm>
+          <a:prstGeom prst="rect">
+            <a:avLst/>
+          </a:prstGeom>
+          <a:noFill/>
+          <a:ln/>
+        </p:spPr>
+        <p:txBody>
+          <a:bodyPr wrap="square" lIns="0" tIns="0" rIns="0" bIns="0" rtlCol="0" anchor="t"/>
+          <a:lstStyle/>
+          <a:p>
+            <a:pPr algn="l" indent="0" marL="0">
+              <a:lnSpc>
+                <a:spcPts val="2160"/>
+              </a:lnSpc>
+              <a:spcBef>
+                <a:spcPts val="600"/>
+              </a:spcBef>
+              <a:spcAft>
+                <a:spcPts val="800"/>
+              </a:spcAft>
+              <a:buNone/>
+            </a:pPr>
+            <a:r>
+              <a:rPr lang="en-US" sz="1800" b="1" dirty="0">
+                <a:solidFill>
+                  <a:srgbClr val="FE4447"/>
+                </a:solidFill>
+                <a:latin typeface="Georgia" pitchFamily="34" charset="0"/>
+                <a:ea typeface="Georgia" pitchFamily="34" charset="-122"/>
+                <a:cs typeface="Georgia" pitchFamily="34" charset="-120"/>
+              </a:rPr>
+              <a:t>Wrap-up (5 min)</a:t>
+            </a:r>
+            <a:endParaRPr lang="en-US" sz="1800" dirty="0"/>
+          </a:p>
+        </p:txBody>
+      </p:sp>
+      <p:sp>
+        <p:nvSpPr>
+          <p:cNvPr id="4" name="Text 2"/>
+          <p:cNvSpPr/>
+          <p:nvPr/>
+        </p:nvSpPr>
+        <p:spPr>
+          <a:xfrm>
+            <a:off x="634901" y="883593"/>
+            <a:ext cx="8102798" cy="1386483"/>
+          </a:xfrm>
+          <a:prstGeom prst="rect">
+            <a:avLst/>
+          </a:prstGeom>
+          <a:noFill/>
+          <a:ln/>
+        </p:spPr>
+        <p:txBody>
+          <a:bodyPr wrap="square" lIns="0" tIns="0" rIns="0" bIns="0" rtlCol="0" anchor="t"/>
+          <a:lstStyle/>
+          <a:p>
+            <a:pPr algn="l" marL="342900" indent="-342900">
+              <a:lnSpc>
+                <a:spcPts val="1620"/>
+              </a:lnSpc>
+              <a:spcAft>
+                <a:spcPts val="300"/>
+              </a:spcAft>
+              <a:buSzPct val="100000"/>
+              <a:buChar char="•"/>
+            </a:pPr>
+            <a:r>
+              <a:rPr lang="en-US" sz="1200" dirty="0">
+                <a:solidFill>
+                  <a:srgbClr val="1C2833"/>
+                </a:solidFill>
+                <a:latin typeface="Arial" pitchFamily="34" charset="0"/>
+                <a:ea typeface="Arial" pitchFamily="34" charset="-122"/>
+                <a:cs typeface="Arial" pitchFamily="34" charset="-120"/>
+              </a:rPr>
+              <a:t>Read one strong paragraph aloud (with permission).</a:t>
+            </a:r>
+            <a:endParaRPr lang="en-US" sz="1200" dirty="0"/>
+          </a:p>
+          <a:p>
+            <a:pPr algn="l" marL="342900" indent="-342900">
+              <a:lnSpc>
+                <a:spcPts val="1620"/>
+              </a:lnSpc>
+              <a:spcAft>
+                <a:spcPts val="300"/>
+              </a:spcAft>
+              <a:buSzPct val="100000"/>
+              <a:buChar char="•"/>
+            </a:pPr>
+            <a:r>
+              <a:rPr lang="en-US" sz="1200" dirty="0">
+                <a:solidFill>
+                  <a:srgbClr val="1C2833"/>
+                </a:solidFill>
+                <a:latin typeface="Arial" pitchFamily="34" charset="0"/>
+                <a:ea typeface="Arial" pitchFamily="34" charset="-122"/>
+                <a:cs typeface="Arial" pitchFamily="34" charset="-120"/>
+              </a:rPr>
+              <a:t>Honest historical note: </a:t>
+            </a:r>
+            <a:pPr algn="l" indent="0" marL="0">
+              <a:lnSpc>
+                <a:spcPts val="1620"/>
+              </a:lnSpc>
+              <a:spcAft>
+                <a:spcPts val="300"/>
+              </a:spcAft>
+              <a:buNone/>
+            </a:pPr>
+            <a:r>
+              <a:rPr lang="en-US" sz="1200" i="1" dirty="0">
+                <a:solidFill>
+                  <a:srgbClr val="1C2833"/>
+                </a:solidFill>
+                <a:latin typeface="Arial" pitchFamily="34" charset="0"/>
+                <a:ea typeface="Arial" pitchFamily="34" charset="-122"/>
+                <a:cs typeface="Arial" pitchFamily="34" charset="-120"/>
+              </a:rPr>
+              <a:t>"Tirthaji's book (1965) gives this rule. The rule itself is genuinely correct. Tirthaji's claim that it comes from a Vedic appendix has not been verified by other Sanskritists. We use the rule because it works. The history is younger than the name suggests."</a:t>
+            </a:r>
+            <a:endParaRPr lang="en-US" sz="1200" dirty="0"/>
+          </a:p>
+          <a:p>
+            <a:pPr algn="l" marL="342900" indent="-342900">
+              <a:lnSpc>
+                <a:spcPts val="1620"/>
+              </a:lnSpc>
+              <a:spcAft>
+                <a:spcPts val="300"/>
+              </a:spcAft>
+              <a:buSzPct val="100000"/>
+              <a:buChar char="•"/>
+            </a:pPr>
+            <a:r>
+              <a:rPr lang="en-US" sz="1200" dirty="0">
+                <a:solidFill>
+                  <a:srgbClr val="1C2833"/>
+                </a:solidFill>
+                <a:latin typeface="Arial" pitchFamily="34" charset="0"/>
+                <a:ea typeface="Arial" pitchFamily="34" charset="-122"/>
+                <a:cs typeface="Arial" pitchFamily="34" charset="-120"/>
+              </a:rPr>
+              <a:t>Preview Day 7: </a:t>
+            </a:r>
+            <a:pPr algn="l" indent="0" marL="0">
+              <a:lnSpc>
+                <a:spcPts val="1620"/>
+              </a:lnSpc>
+              <a:spcAft>
+                <a:spcPts val="300"/>
+              </a:spcAft>
+              <a:buNone/>
+            </a:pPr>
+            <a:r>
+              <a:rPr lang="en-US" sz="1200" i="1" dirty="0">
+                <a:solidFill>
+                  <a:srgbClr val="1C2833"/>
+                </a:solidFill>
+                <a:latin typeface="Arial" pitchFamily="34" charset="0"/>
+                <a:ea typeface="Arial" pitchFamily="34" charset="-122"/>
+                <a:cs typeface="Arial" pitchFamily="34" charset="-120"/>
+              </a:rPr>
+              <a:t>"Tomorrow — a surprise. The same rule is built into how computers subtract. It's called 'two's complement.'"</a:t>
+            </a:r>
+            <a:endParaRPr lang="en-US" sz="1200" dirty="0"/>
+          </a:p>
+        </p:txBody>
+      </p:sp>
+      <p:sp>
+        <p:nvSpPr>
+          <p:cNvPr id="5" name="Text 3"/>
+          <p:cNvSpPr/>
+          <p:nvPr/>
+        </p:nvSpPr>
+        <p:spPr>
+          <a:xfrm>
+            <a:off x="406301" y="4434929"/>
+            <a:ext cx="8498026" cy="213271"/>
+          </a:xfrm>
+          <a:prstGeom prst="rect">
+            <a:avLst/>
+          </a:prstGeom>
+          <a:noFill/>
+          <a:ln/>
+        </p:spPr>
+        <p:txBody>
+          <a:bodyPr wrap="square" lIns="0" tIns="0" rIns="0" bIns="0" rtlCol="0" anchor="t"/>
+          <a:lstStyle/>
+          <a:p>
+            <a:pPr algn="l" indent="0" marL="0">
+              <a:lnSpc>
+                <a:spcPts val="1680"/>
+              </a:lnSpc>
+              <a:spcBef>
+                <a:spcPts val="300"/>
+              </a:spcBef>
+              <a:spcAft>
+                <a:spcPts val="300"/>
+              </a:spcAft>
+              <a:buNone/>
+            </a:pPr>
+            <a:r>
+              <a:rPr lang="en-US" sz="1200" dirty="0">
+                <a:solidFill>
+                  <a:srgbClr val="1C2833"/>
+                </a:solidFill>
+                <a:latin typeface="Arial" pitchFamily="34" charset="0"/>
+                <a:ea typeface="Arial" pitchFamily="34" charset="-122"/>
+                <a:cs typeface="Arial" pitchFamily="34" charset="-120"/>
+              </a:rPr>
+              <a:t>Middle ·  · IKS Curriculum</a:t>
+            </a:r>
+            <a:endParaRPr lang="en-US" sz="1200" dirty="0"/>
+          </a:p>
+        </p:txBody>
+      </p:sp>
+    </p:spTree>
+  </p:cSld>
+  <p:clrMapOvr>
+    <a:masterClrMapping/>
+  </p:clrMapOvr>
+</p:sld>
+</file>
+
+<file path=ppt/slides/slide16.xml><?xml version="1.0" encoding="utf-8"?>
+<p:sld xmlns:a="http://schemas.openxmlformats.org/drawingml/2006/main" xmlns:r="http://schemas.openxmlformats.org/officeDocument/2006/relationships" xmlns:p="http://schemas.openxmlformats.org/presentationml/2006/main">
+  <p:cSld name="Slide 16">
+    <p:bg>
+      <p:bgPr>
+        <a:solidFill>
+          <a:srgbClr val="FFFFFF"/>
+        </a:solidFill>
+      </p:bgPr>
+    </p:bg>
+    <p:spTree>
+      <p:nvGrpSpPr>
+        <p:cNvPr id="1" name=""/>
+        <p:cNvGrpSpPr/>
+        <p:nvPr/>
+      </p:nvGrpSpPr>
+      <p:grpSpPr>
+        <a:xfrm>
+          <a:off x="0" y="0"/>
+          <a:ext cx="0" cy="0"/>
+          <a:chOff x="0" y="0"/>
+          <a:chExt cx="0" cy="0"/>
+        </a:xfrm>
+      </p:grpSpPr>
+      <p:sp>
+        <p:nvSpPr>
+          <p:cNvPr id="2" name="Text 0"/>
+          <p:cNvSpPr/>
+          <p:nvPr/>
+        </p:nvSpPr>
+        <p:spPr>
+          <a:xfrm>
+            <a:off x="0" y="0"/>
+            <a:ext cx="9144000" cy="101501"/>
+          </a:xfrm>
+          <a:prstGeom prst="rect">
+            <a:avLst/>
+          </a:prstGeom>
+          <a:solidFill>
+            <a:srgbClr val="277884"/>
+          </a:solidFill>
+          <a:ln/>
+        </p:spPr>
+        <p:txBody>
+          <a:bodyPr wrap="square" rtlCol="0" anchor="ctr"/>
+          <a:lstStyle/>
+          <a:p>
+            <a:pPr indent="0" marL="0">
+              <a:buNone/>
+            </a:pPr>
+            <a:endParaRPr lang="en-US" dirty="0"/>
+          </a:p>
+        </p:txBody>
+      </p:sp>
+      <p:sp>
+        <p:nvSpPr>
+          <p:cNvPr id="3" name="Text 1"/>
+          <p:cNvSpPr/>
+          <p:nvPr/>
+        </p:nvSpPr>
+        <p:spPr>
+          <a:xfrm>
+            <a:off x="406301" y="457051"/>
+            <a:ext cx="8498026" cy="274290"/>
+          </a:xfrm>
+          <a:prstGeom prst="rect">
+            <a:avLst/>
+          </a:prstGeom>
+          <a:noFill/>
+          <a:ln/>
+        </p:spPr>
+        <p:txBody>
+          <a:bodyPr wrap="square" lIns="0" tIns="0" rIns="0" bIns="0" rtlCol="0" anchor="t"/>
+          <a:lstStyle/>
+          <a:p>
+            <a:pPr algn="l" indent="0" marL="0">
+              <a:lnSpc>
+                <a:spcPts val="2160"/>
+              </a:lnSpc>
+              <a:spcBef>
+                <a:spcPts val="600"/>
+              </a:spcBef>
+              <a:spcAft>
+                <a:spcPts val="800"/>
+              </a:spcAft>
+              <a:buNone/>
+            </a:pPr>
+            <a:r>
+              <a:rPr lang="en-US" sz="1800" b="1" dirty="0">
+                <a:solidFill>
+                  <a:srgbClr val="FE4447"/>
+                </a:solidFill>
+                <a:latin typeface="Georgia" pitchFamily="34" charset="0"/>
+                <a:ea typeface="Georgia" pitchFamily="34" charset="-122"/>
+                <a:cs typeface="Georgia" pitchFamily="34" charset="-120"/>
+              </a:rPr>
+              <a:t>Student-facing content</a:t>
+            </a:r>
+            <a:endParaRPr lang="en-US" sz="1800" dirty="0"/>
+          </a:p>
+        </p:txBody>
+      </p:sp>
+      <p:sp>
+        <p:nvSpPr>
+          <p:cNvPr id="4" name="Text 2"/>
+          <p:cNvSpPr/>
+          <p:nvPr/>
+        </p:nvSpPr>
+        <p:spPr>
+          <a:xfrm>
+            <a:off x="406301" y="883593"/>
+            <a:ext cx="8331398" cy="3245644"/>
+          </a:xfrm>
+          <a:prstGeom prst="rect">
+            <a:avLst/>
+          </a:prstGeom>
+          <a:solidFill>
+            <a:srgbClr val="F4F8F9"/>
+          </a:solidFill>
+          <a:ln/>
+        </p:spPr>
+        <p:txBody>
+          <a:bodyPr wrap="square" rtlCol="0" anchor="ctr"/>
+          <a:lstStyle/>
+          <a:p>
+            <a:pPr indent="0" marL="0">
+              <a:buNone/>
+            </a:pPr>
+            <a:endParaRPr lang="en-US" dirty="0"/>
+          </a:p>
+        </p:txBody>
+      </p:sp>
+      <p:sp>
+        <p:nvSpPr>
+          <p:cNvPr id="5" name="Shape 3"/>
+          <p:cNvSpPr/>
+          <p:nvPr/>
+        </p:nvSpPr>
+        <p:spPr>
+          <a:xfrm>
+            <a:off x="434876" y="883593"/>
+            <a:ext cx="0" cy="3245644"/>
+          </a:xfrm>
+          <a:prstGeom prst="line">
+            <a:avLst/>
+          </a:prstGeom>
+          <a:noFill/>
+          <a:ln w="57150">
+            <a:solidFill>
+              <a:srgbClr val="FE4447"/>
+            </a:solidFill>
+            <a:prstDash val="solid"/>
+          </a:ln>
+        </p:spPr>
+      </p:sp>
+      <p:sp>
+        <p:nvSpPr>
           <p:cNvPr id="6" name="Text 4"/>
+          <p:cNvSpPr/>
+          <p:nvPr/>
+        </p:nvSpPr>
+        <p:spPr>
+          <a:xfrm>
+            <a:off x="692051" y="1074093"/>
+            <a:ext cx="7973389" cy="230981"/>
+          </a:xfrm>
+          <a:prstGeom prst="rect">
+            <a:avLst/>
+          </a:prstGeom>
+          <a:noFill/>
+          <a:ln/>
+        </p:spPr>
+        <p:txBody>
+          <a:bodyPr wrap="square" lIns="0" tIns="0" rIns="0" bIns="0" rtlCol="0" anchor="t"/>
+          <a:lstStyle/>
+          <a:p>
+            <a:pPr algn="l" indent="0" marL="0">
+              <a:lnSpc>
+                <a:spcPts val="1820"/>
+              </a:lnSpc>
+              <a:spcBef>
+                <a:spcPts val="300"/>
+              </a:spcBef>
+              <a:spcAft>
+                <a:spcPts val="300"/>
+              </a:spcAft>
+              <a:buNone/>
+            </a:pPr>
+            <a:r>
+              <a:rPr lang="en-US" sz="1300" b="1" i="1" dirty="0">
+                <a:solidFill>
+                  <a:srgbClr val="1C2833"/>
+                </a:solidFill>
+                <a:latin typeface="Georgia" pitchFamily="34" charset="0"/>
+                <a:ea typeface="Georgia" pitchFamily="34" charset="-122"/>
+                <a:cs typeface="Georgia" pitchFamily="34" charset="-120"/>
+              </a:rPr>
+              <a:t>Why Nikhilam works</a:t>
+            </a:r>
+            <a:endParaRPr lang="en-US" sz="1300" dirty="0"/>
+          </a:p>
+        </p:txBody>
+      </p:sp>
+      <p:sp>
+        <p:nvSpPr>
+          <p:cNvPr id="7" name="Text 5"/>
+          <p:cNvSpPr/>
+          <p:nvPr/>
+        </p:nvSpPr>
+        <p:spPr>
+          <a:xfrm>
+            <a:off x="692051" y="1343174"/>
+            <a:ext cx="7973389" cy="230981"/>
+          </a:xfrm>
+          <a:prstGeom prst="rect">
+            <a:avLst/>
+          </a:prstGeom>
+          <a:noFill/>
+          <a:ln/>
+        </p:spPr>
+        <p:txBody>
+          <a:bodyPr wrap="square" lIns="0" tIns="0" rIns="0" bIns="0" rtlCol="0" anchor="t"/>
+          <a:lstStyle/>
+          <a:p>
+            <a:pPr algn="l" indent="0" marL="0">
+              <a:lnSpc>
+                <a:spcPts val="1820"/>
+              </a:lnSpc>
+              <a:spcBef>
+                <a:spcPts val="300"/>
+              </a:spcBef>
+              <a:spcAft>
+                <a:spcPts val="300"/>
+              </a:spcAft>
+              <a:buNone/>
+            </a:pPr>
+            <a:r>
+              <a:rPr lang="en-US" sz="1300" i="1" dirty="0">
+                <a:solidFill>
+                  <a:srgbClr val="1C2833"/>
+                </a:solidFill>
+                <a:latin typeface="Georgia" pitchFamily="34" charset="0"/>
+                <a:ea typeface="Georgia" pitchFamily="34" charset="-122"/>
+                <a:cs typeface="Georgia" pitchFamily="34" charset="-120"/>
+              </a:rPr>
+              <a:t>The key identity:</a:t>
+            </a:r>
+            <a:endParaRPr lang="en-US" sz="1300" dirty="0"/>
+          </a:p>
+        </p:txBody>
+      </p:sp>
+      <p:sp>
+        <p:nvSpPr>
+          <p:cNvPr id="8" name="Text 6"/>
+          <p:cNvSpPr/>
+          <p:nvPr/>
+        </p:nvSpPr>
+        <p:spPr>
+          <a:xfrm>
+            <a:off x="692051" y="1612255"/>
+            <a:ext cx="7973389" cy="230981"/>
+          </a:xfrm>
+          <a:prstGeom prst="rect">
+            <a:avLst/>
+          </a:prstGeom>
+          <a:noFill/>
+          <a:ln/>
+        </p:spPr>
+        <p:txBody>
+          <a:bodyPr wrap="square" lIns="0" tIns="0" rIns="0" bIns="0" rtlCol="0" anchor="t"/>
+          <a:lstStyle/>
+          <a:p>
+            <a:pPr algn="l" indent="0" marL="0">
+              <a:lnSpc>
+                <a:spcPts val="1820"/>
+              </a:lnSpc>
+              <a:spcBef>
+                <a:spcPts val="300"/>
+              </a:spcBef>
+              <a:spcAft>
+                <a:spcPts val="300"/>
+              </a:spcAft>
+              <a:buNone/>
+            </a:pPr>
+            <a:r>
+              <a:rPr lang="en-US" sz="1300" b="1" i="1" dirty="0">
+                <a:solidFill>
+                  <a:srgbClr val="1C2833"/>
+                </a:solidFill>
+                <a:latin typeface="Georgia" pitchFamily="34" charset="0"/>
+                <a:ea typeface="Georgia" pitchFamily="34" charset="-122"/>
+                <a:cs typeface="Georgia" pitchFamily="34" charset="-120"/>
+              </a:rPr>
+              <a:t>10ⁿ − A = (10ⁿ − 1) − A + 1</a:t>
+            </a:r>
+            <a:endParaRPr lang="en-US" sz="1300" dirty="0"/>
+          </a:p>
+        </p:txBody>
+      </p:sp>
+      <p:sp>
+        <p:nvSpPr>
+          <p:cNvPr id="9" name="Text 7"/>
+          <p:cNvSpPr/>
+          <p:nvPr/>
+        </p:nvSpPr>
+        <p:spPr>
+          <a:xfrm>
+            <a:off x="692051" y="1881336"/>
+            <a:ext cx="7973389" cy="250031"/>
+          </a:xfrm>
+          <a:prstGeom prst="rect">
+            <a:avLst/>
+          </a:prstGeom>
+          <a:noFill/>
+          <a:ln/>
+        </p:spPr>
+        <p:txBody>
+          <a:bodyPr wrap="square" lIns="0" tIns="0" rIns="0" bIns="0" rtlCol="0" anchor="t"/>
+          <a:lstStyle/>
+          <a:p>
+            <a:pPr algn="l" indent="0" marL="0">
+              <a:lnSpc>
+                <a:spcPts val="1820"/>
+              </a:lnSpc>
+              <a:spcBef>
+                <a:spcPts val="300"/>
+              </a:spcBef>
+              <a:spcAft>
+                <a:spcPts val="300"/>
+              </a:spcAft>
+              <a:buNone/>
+            </a:pPr>
+            <a:r>
+              <a:rPr lang="en-US" sz="1300" i="1" dirty="0">
+                <a:solidFill>
+                  <a:srgbClr val="1C2833"/>
+                </a:solidFill>
+                <a:latin typeface="Georgia" pitchFamily="34" charset="0"/>
+                <a:ea typeface="Georgia" pitchFamily="34" charset="-122"/>
+                <a:cs typeface="Georgia" pitchFamily="34" charset="-120"/>
+              </a:rPr>
+              <a:t>10ⁿ − 1</a:t>
+            </a:r>
+            <a:pPr algn="l" indent="0" marL="0">
+              <a:lnSpc>
+                <a:spcPts val="1820"/>
+              </a:lnSpc>
+              <a:spcBef>
+                <a:spcPts val="300"/>
+              </a:spcBef>
+              <a:spcAft>
+                <a:spcPts val="300"/>
+              </a:spcAft>
+              <a:buNone/>
+            </a:pPr>
+            <a:r>
+              <a:rPr lang="en-US" sz="1300" dirty="0">
+                <a:solidFill>
+                  <a:srgbClr val="1C2833"/>
+                </a:solidFill>
+                <a:latin typeface="Georgia" pitchFamily="34" charset="0"/>
+                <a:ea typeface="Georgia" pitchFamily="34" charset="-122"/>
+                <a:cs typeface="Georgia" pitchFamily="34" charset="-120"/>
+              </a:rPr>
+              <a:t> is "all nines" (e.g. 9999).</a:t>
+            </a:r>
+            <a:endParaRPr lang="en-US" sz="1300" dirty="0"/>
+          </a:p>
+        </p:txBody>
+      </p:sp>
+      <p:sp>
+        <p:nvSpPr>
+          <p:cNvPr id="10" name="Text 8"/>
+          <p:cNvSpPr/>
+          <p:nvPr/>
+        </p:nvSpPr>
+        <p:spPr>
+          <a:xfrm>
+            <a:off x="692051" y="2169468"/>
+            <a:ext cx="7973389" cy="230981"/>
+          </a:xfrm>
+          <a:prstGeom prst="rect">
+            <a:avLst/>
+          </a:prstGeom>
+          <a:noFill/>
+          <a:ln/>
+        </p:spPr>
+        <p:txBody>
+          <a:bodyPr wrap="square" lIns="0" tIns="0" rIns="0" bIns="0" rtlCol="0" anchor="t"/>
+          <a:lstStyle/>
+          <a:p>
+            <a:pPr algn="l" indent="0" marL="0">
+              <a:lnSpc>
+                <a:spcPts val="1820"/>
+              </a:lnSpc>
+              <a:spcBef>
+                <a:spcPts val="300"/>
+              </a:spcBef>
+              <a:spcAft>
+                <a:spcPts val="300"/>
+              </a:spcAft>
+              <a:buNone/>
+            </a:pPr>
+            <a:r>
+              <a:rPr lang="en-US" sz="1300" i="1" dirty="0">
+                <a:solidFill>
+                  <a:srgbClr val="1C2833"/>
+                </a:solidFill>
+                <a:latin typeface="Georgia" pitchFamily="34" charset="0"/>
+                <a:ea typeface="Georgia" pitchFamily="34" charset="-122"/>
+                <a:cs typeface="Georgia" pitchFamily="34" charset="-120"/>
+              </a:rPr>
+              <a:t>Subtracting A from "all nines" is trivial digit-by-digit — there's no borrow because 9 ≥ any digit.</a:t>
+            </a:r>
+            <a:endParaRPr lang="en-US" sz="1300" dirty="0"/>
+          </a:p>
+        </p:txBody>
+      </p:sp>
+      <p:sp>
+        <p:nvSpPr>
+          <p:cNvPr id="11" name="Text 9"/>
+          <p:cNvSpPr/>
+          <p:nvPr/>
+        </p:nvSpPr>
+        <p:spPr>
+          <a:xfrm>
+            <a:off x="692051" y="2438549"/>
+            <a:ext cx="7973389" cy="230981"/>
+          </a:xfrm>
+          <a:prstGeom prst="rect">
+            <a:avLst/>
+          </a:prstGeom>
+          <a:noFill/>
+          <a:ln/>
+        </p:spPr>
+        <p:txBody>
+          <a:bodyPr wrap="square" lIns="0" tIns="0" rIns="0" bIns="0" rtlCol="0" anchor="t"/>
+          <a:lstStyle/>
+          <a:p>
+            <a:pPr algn="l" indent="0" marL="0">
+              <a:lnSpc>
+                <a:spcPts val="1820"/>
+              </a:lnSpc>
+              <a:spcBef>
+                <a:spcPts val="300"/>
+              </a:spcBef>
+              <a:spcAft>
+                <a:spcPts val="300"/>
+              </a:spcAft>
+              <a:buNone/>
+            </a:pPr>
+            <a:r>
+              <a:rPr lang="en-US" sz="1300" i="1" dirty="0">
+                <a:solidFill>
+                  <a:srgbClr val="1C2833"/>
+                </a:solidFill>
+                <a:latin typeface="Georgia" pitchFamily="34" charset="0"/>
+                <a:ea typeface="Georgia" pitchFamily="34" charset="-122"/>
+                <a:cs typeface="Georgia" pitchFamily="34" charset="-120"/>
+              </a:rPr>
+              <a:t>The "+ 1" at the end gets absorbed into the last digit, turning "9 − last_digit" into "10 − last_digit."</a:t>
+            </a:r>
+            <a:endParaRPr lang="en-US" sz="1300" dirty="0"/>
+          </a:p>
+        </p:txBody>
+      </p:sp>
+      <p:sp>
+        <p:nvSpPr>
+          <p:cNvPr id="12" name="Text 10"/>
+          <p:cNvSpPr/>
+          <p:nvPr/>
+        </p:nvSpPr>
+        <p:spPr>
+          <a:xfrm>
+            <a:off x="692051" y="2707630"/>
+            <a:ext cx="7973389" cy="230981"/>
+          </a:xfrm>
+          <a:prstGeom prst="rect">
+            <a:avLst/>
+          </a:prstGeom>
+          <a:noFill/>
+          <a:ln/>
+        </p:spPr>
+        <p:txBody>
+          <a:bodyPr wrap="square" lIns="0" tIns="0" rIns="0" bIns="0" rtlCol="0" anchor="t"/>
+          <a:lstStyle/>
+          <a:p>
+            <a:pPr algn="l" indent="0" marL="0">
+              <a:lnSpc>
+                <a:spcPts val="1820"/>
+              </a:lnSpc>
+              <a:spcBef>
+                <a:spcPts val="300"/>
+              </a:spcBef>
+              <a:spcAft>
+                <a:spcPts val="300"/>
+              </a:spcAft>
+              <a:buNone/>
+            </a:pPr>
+            <a:r>
+              <a:rPr lang="en-US" sz="1300" i="1" dirty="0">
+                <a:solidFill>
+                  <a:srgbClr val="1C2833"/>
+                </a:solidFill>
+                <a:latin typeface="Georgia" pitchFamily="34" charset="0"/>
+                <a:ea typeface="Georgia" pitchFamily="34" charset="-122"/>
+                <a:cs typeface="Georgia" pitchFamily="34" charset="-120"/>
+              </a:rPr>
+              <a:t>That's the whole proof.</a:t>
+            </a:r>
+            <a:endParaRPr lang="en-US" sz="1300" dirty="0"/>
+          </a:p>
+        </p:txBody>
+      </p:sp>
+      <p:sp>
+        <p:nvSpPr>
+          <p:cNvPr id="13" name="Text 11"/>
+          <p:cNvSpPr/>
+          <p:nvPr/>
+        </p:nvSpPr>
+        <p:spPr>
+          <a:xfrm>
+            <a:off x="692051" y="2976711"/>
+            <a:ext cx="7973389" cy="692944"/>
+          </a:xfrm>
+          <a:prstGeom prst="rect">
+            <a:avLst/>
+          </a:prstGeom>
+          <a:noFill/>
+          <a:ln/>
+        </p:spPr>
+        <p:txBody>
+          <a:bodyPr wrap="square" lIns="0" tIns="0" rIns="0" bIns="0" rtlCol="0" anchor="t"/>
+          <a:lstStyle/>
+          <a:p>
+            <a:pPr algn="l" indent="0" marL="0">
+              <a:lnSpc>
+                <a:spcPts val="1820"/>
+              </a:lnSpc>
+              <a:spcBef>
+                <a:spcPts val="300"/>
+              </a:spcBef>
+              <a:spcAft>
+                <a:spcPts val="300"/>
+              </a:spcAft>
+              <a:buNone/>
+            </a:pPr>
+            <a:r>
+              <a:rPr lang="en-US" sz="1300" dirty="0">
+                <a:solidFill>
+                  <a:srgbClr val="1C2833"/>
+                </a:solidFill>
+                <a:latin typeface="Georgia" pitchFamily="34" charset="0"/>
+                <a:ea typeface="Georgia" pitchFamily="34" charset="-122"/>
+                <a:cs typeface="Georgia" pitchFamily="34" charset="-120"/>
+              </a:rPr>
+              <a:t>Tirthaji's </a:t>
+            </a:r>
+            <a:pPr algn="l" indent="0" marL="0">
+              <a:lnSpc>
+                <a:spcPts val="1820"/>
+              </a:lnSpc>
+              <a:spcBef>
+                <a:spcPts val="300"/>
+              </a:spcBef>
+              <a:spcAft>
+                <a:spcPts val="300"/>
+              </a:spcAft>
+              <a:buNone/>
+            </a:pPr>
+            <a:r>
+              <a:rPr lang="en-US" sz="1300" i="1" dirty="0">
+                <a:solidFill>
+                  <a:srgbClr val="1C2833"/>
+                </a:solidFill>
+                <a:latin typeface="Georgia" pitchFamily="34" charset="0"/>
+                <a:ea typeface="Georgia" pitchFamily="34" charset="-122"/>
+                <a:cs typeface="Georgia" pitchFamily="34" charset="-120"/>
+              </a:rPr>
+              <a:t>Vedic Mathematics</a:t>
+            </a:r>
+            <a:pPr algn="l" indent="0" marL="0">
+              <a:lnSpc>
+                <a:spcPts val="1820"/>
+              </a:lnSpc>
+              <a:spcBef>
+                <a:spcPts val="300"/>
+              </a:spcBef>
+              <a:spcAft>
+                <a:spcPts val="300"/>
+              </a:spcAft>
+              <a:buNone/>
+            </a:pPr>
+            <a:r>
+              <a:rPr lang="en-US" sz="1300" dirty="0">
+                <a:solidFill>
+                  <a:srgbClr val="1C2833"/>
+                </a:solidFill>
+                <a:latin typeface="Georgia" pitchFamily="34" charset="0"/>
+                <a:ea typeface="Georgia" pitchFamily="34" charset="-122"/>
+                <a:cs typeface="Georgia" pitchFamily="34" charset="-120"/>
+              </a:rPr>
+              <a:t> (1965) packages this proof into six Sanskrit words: </a:t>
+            </a:r>
+            <a:pPr algn="l" indent="0" marL="0">
+              <a:lnSpc>
+                <a:spcPts val="1820"/>
+              </a:lnSpc>
+              <a:spcBef>
+                <a:spcPts val="300"/>
+              </a:spcBef>
+              <a:spcAft>
+                <a:spcPts val="300"/>
+              </a:spcAft>
+              <a:buNone/>
+            </a:pPr>
+            <a:r>
+              <a:rPr lang="en-US" sz="1300" i="1" dirty="0">
+                <a:solidFill>
+                  <a:srgbClr val="1C2833"/>
+                </a:solidFill>
+                <a:latin typeface="Georgia" pitchFamily="34" charset="0"/>
+                <a:ea typeface="Georgia" pitchFamily="34" charset="-122"/>
+                <a:cs typeface="Georgia" pitchFamily="34" charset="-120"/>
+              </a:rPr>
+              <a:t>Nikhilaṁ Navataścaramaṁ Daśataḥ</a:t>
+            </a:r>
+            <a:pPr algn="l" indent="0" marL="0">
+              <a:lnSpc>
+                <a:spcPts val="1820"/>
+              </a:lnSpc>
+              <a:spcBef>
+                <a:spcPts val="300"/>
+              </a:spcBef>
+              <a:spcAft>
+                <a:spcPts val="300"/>
+              </a:spcAft>
+              <a:buNone/>
+            </a:pPr>
+            <a:r>
+              <a:rPr lang="en-US" sz="1300" dirty="0">
+                <a:solidFill>
+                  <a:srgbClr val="1C2833"/>
+                </a:solidFill>
+                <a:latin typeface="Georgia" pitchFamily="34" charset="0"/>
+                <a:ea typeface="Georgia" pitchFamily="34" charset="-122"/>
+                <a:cs typeface="Georgia" pitchFamily="34" charset="-120"/>
+              </a:rPr>
+              <a:t> — "all from nine and the last from ten." The math is real. The Sanskrit is from a 20th-century synthesis, not a Vedic text.</a:t>
+            </a:r>
+            <a:endParaRPr lang="en-US" sz="1300" dirty="0"/>
+          </a:p>
+        </p:txBody>
+      </p:sp>
+      <p:sp>
+        <p:nvSpPr>
+          <p:cNvPr id="14" name="Text 12"/>
+          <p:cNvSpPr/>
+          <p:nvPr/>
+        </p:nvSpPr>
+        <p:spPr>
+          <a:xfrm>
+            <a:off x="692051" y="3707755"/>
+            <a:ext cx="7973389" cy="230981"/>
+          </a:xfrm>
+          <a:prstGeom prst="rect">
+            <a:avLst/>
+          </a:prstGeom>
+          <a:noFill/>
+          <a:ln/>
+        </p:spPr>
+        <p:txBody>
+          <a:bodyPr wrap="square" lIns="0" tIns="0" rIns="0" bIns="0" rtlCol="0" anchor="t"/>
+          <a:lstStyle/>
+          <a:p>
+            <a:pPr algn="l" indent="0" marL="0">
+              <a:lnSpc>
+                <a:spcPts val="1820"/>
+              </a:lnSpc>
+              <a:spcBef>
+                <a:spcPts val="300"/>
+              </a:spcBef>
+              <a:spcAft>
+                <a:spcPts val="300"/>
+              </a:spcAft>
+              <a:buNone/>
+            </a:pPr>
+            <a:r>
+              <a:rPr lang="en-US" sz="1300" b="1" i="1" dirty="0">
+                <a:solidFill>
+                  <a:srgbClr val="1C2833"/>
+                </a:solidFill>
+                <a:latin typeface="Georgia" pitchFamily="34" charset="0"/>
+                <a:ea typeface="Georgia" pitchFamily="34" charset="-122"/>
+                <a:cs typeface="Georgia" pitchFamily="34" charset="-120"/>
+              </a:rPr>
+              <a:t>It is not magic. It is good notation.</a:t>
+            </a:r>
+            <a:endParaRPr lang="en-US" sz="1300" dirty="0"/>
+          </a:p>
+        </p:txBody>
+      </p:sp>
+      <p:sp>
+        <p:nvSpPr>
+          <p:cNvPr id="15" name="Text 13"/>
+          <p:cNvSpPr/>
+          <p:nvPr/>
+        </p:nvSpPr>
+        <p:spPr>
+          <a:xfrm>
+            <a:off x="406301" y="4434929"/>
+            <a:ext cx="8498026" cy="213271"/>
+          </a:xfrm>
+          <a:prstGeom prst="rect">
+            <a:avLst/>
+          </a:prstGeom>
+          <a:noFill/>
+          <a:ln/>
+        </p:spPr>
+        <p:txBody>
+          <a:bodyPr wrap="square" lIns="0" tIns="0" rIns="0" bIns="0" rtlCol="0" anchor="t"/>
+          <a:lstStyle/>
+          <a:p>
+            <a:pPr algn="l" indent="0" marL="0">
+              <a:lnSpc>
+                <a:spcPts val="1680"/>
+              </a:lnSpc>
+              <a:spcBef>
+                <a:spcPts val="300"/>
+              </a:spcBef>
+              <a:spcAft>
+                <a:spcPts val="300"/>
+              </a:spcAft>
+              <a:buNone/>
+            </a:pPr>
+            <a:r>
+              <a:rPr lang="en-US" sz="1200" dirty="0">
+                <a:solidFill>
+                  <a:srgbClr val="1C2833"/>
+                </a:solidFill>
+                <a:latin typeface="Arial" pitchFamily="34" charset="0"/>
+                <a:ea typeface="Arial" pitchFamily="34" charset="-122"/>
+                <a:cs typeface="Arial" pitchFamily="34" charset="-120"/>
+              </a:rPr>
+              <a:t>Middle ·  · IKS Curriculum</a:t>
+            </a:r>
+            <a:endParaRPr lang="en-US" sz="1200" dirty="0"/>
+          </a:p>
+        </p:txBody>
+      </p:sp>
+    </p:spTree>
+  </p:cSld>
+  <p:clrMapOvr>
+    <a:masterClrMapping/>
+  </p:clrMapOvr>
+</p:sld>
+</file>
+
+<file path=ppt/slides/slide17.xml><?xml version="1.0" encoding="utf-8"?>
+<p:sld xmlns:a="http://schemas.openxmlformats.org/drawingml/2006/main" xmlns:r="http://schemas.openxmlformats.org/officeDocument/2006/relationships" xmlns:p="http://schemas.openxmlformats.org/presentationml/2006/main">
+  <p:cSld name="Slide 17">
+    <p:bg>
+      <p:bgPr>
+        <a:solidFill>
+          <a:srgbClr val="FFFFFF"/>
+        </a:solidFill>
+      </p:bgPr>
+    </p:bg>
+    <p:spTree>
+      <p:nvGrpSpPr>
+        <p:cNvPr id="1" name=""/>
+        <p:cNvGrpSpPr/>
+        <p:nvPr/>
+      </p:nvGrpSpPr>
+      <p:grpSpPr>
+        <a:xfrm>
+          <a:off x="0" y="0"/>
+          <a:ext cx="0" cy="0"/>
+          <a:chOff x="0" y="0"/>
+          <a:chExt cx="0" cy="0"/>
+        </a:xfrm>
+      </p:grpSpPr>
+      <p:sp>
+        <p:nvSpPr>
+          <p:cNvPr id="2" name="Text 0"/>
+          <p:cNvSpPr/>
+          <p:nvPr/>
+        </p:nvSpPr>
+        <p:spPr>
+          <a:xfrm>
+            <a:off x="0" y="0"/>
+            <a:ext cx="9144000" cy="101501"/>
+          </a:xfrm>
+          <a:prstGeom prst="rect">
+            <a:avLst/>
+          </a:prstGeom>
+          <a:solidFill>
+            <a:srgbClr val="277884"/>
+          </a:solidFill>
+          <a:ln/>
+        </p:spPr>
+        <p:txBody>
+          <a:bodyPr wrap="square" rtlCol="0" anchor="ctr"/>
+          <a:lstStyle/>
+          <a:p>
+            <a:pPr indent="0" marL="0">
+              <a:buNone/>
+            </a:pPr>
+            <a:endParaRPr lang="en-US" dirty="0"/>
+          </a:p>
+        </p:txBody>
+      </p:sp>
+      <p:sp>
+        <p:nvSpPr>
+          <p:cNvPr id="3" name="Text 1"/>
+          <p:cNvSpPr/>
+          <p:nvPr/>
+        </p:nvSpPr>
+        <p:spPr>
+          <a:xfrm>
+            <a:off x="406301" y="457051"/>
+            <a:ext cx="8498026" cy="274290"/>
+          </a:xfrm>
+          <a:prstGeom prst="rect">
+            <a:avLst/>
+          </a:prstGeom>
+          <a:noFill/>
+          <a:ln/>
+        </p:spPr>
+        <p:txBody>
+          <a:bodyPr wrap="square" lIns="0" tIns="0" rIns="0" bIns="0" rtlCol="0" anchor="t"/>
+          <a:lstStyle/>
+          <a:p>
+            <a:pPr algn="l" indent="0" marL="0">
+              <a:lnSpc>
+                <a:spcPts val="2160"/>
+              </a:lnSpc>
+              <a:spcBef>
+                <a:spcPts val="600"/>
+              </a:spcBef>
+              <a:spcAft>
+                <a:spcPts val="800"/>
+              </a:spcAft>
+              <a:buNone/>
+            </a:pPr>
+            <a:r>
+              <a:rPr lang="en-US" sz="1800" b="1" dirty="0">
+                <a:solidFill>
+                  <a:srgbClr val="FE4447"/>
+                </a:solidFill>
+                <a:latin typeface="Georgia" pitchFamily="34" charset="0"/>
+                <a:ea typeface="Georgia" pitchFamily="34" charset="-122"/>
+                <a:cs typeface="Georgia" pitchFamily="34" charset="-120"/>
+              </a:rPr>
+              <a:t>Homework</a:t>
+            </a:r>
+            <a:endParaRPr lang="en-US" sz="1800" dirty="0"/>
+          </a:p>
+        </p:txBody>
+      </p:sp>
+      <p:sp>
+        <p:nvSpPr>
+          <p:cNvPr id="4" name="Text 2"/>
+          <p:cNvSpPr/>
+          <p:nvPr/>
+        </p:nvSpPr>
+        <p:spPr>
+          <a:xfrm>
+            <a:off x="634901" y="883593"/>
+            <a:ext cx="8102798" cy="956072"/>
+          </a:xfrm>
+          <a:prstGeom prst="rect">
+            <a:avLst/>
+          </a:prstGeom>
+          <a:noFill/>
+          <a:ln/>
+        </p:spPr>
+        <p:txBody>
+          <a:bodyPr wrap="square" lIns="0" tIns="0" rIns="0" bIns="0" rtlCol="0" anchor="t"/>
+          <a:lstStyle/>
+          <a:p>
+            <a:pPr algn="l" marL="342900" indent="-342900">
+              <a:lnSpc>
+                <a:spcPts val="1620"/>
+              </a:lnSpc>
+              <a:spcAft>
+                <a:spcPts val="300"/>
+              </a:spcAft>
+              <a:buSzPct val="100000"/>
+              <a:buChar char="•"/>
+            </a:pPr>
+            <a:r>
+              <a:rPr lang="en-US" sz="1200" dirty="0">
+                <a:solidFill>
+                  <a:srgbClr val="1C2833"/>
+                </a:solidFill>
+                <a:latin typeface="Arial" pitchFamily="34" charset="0"/>
+                <a:ea typeface="Arial" pitchFamily="34" charset="-122"/>
+                <a:cs typeface="Arial" pitchFamily="34" charset="-120"/>
+              </a:rPr>
+              <a:t>Find ONE moment in your daily life where you naturally "round to the nearest 100 / 1000" without thinking. Write 2 sentences describing it. (E.g. tipping at a restaurant. Counting change. Comparing prices.)</a:t>
+            </a:r>
+            <a:endParaRPr lang="en-US" sz="1200" dirty="0"/>
+          </a:p>
+          <a:p>
+            <a:pPr algn="l" marL="342900" indent="-342900">
+              <a:lnSpc>
+                <a:spcPts val="1620"/>
+              </a:lnSpc>
+              <a:spcAft>
+                <a:spcPts val="300"/>
+              </a:spcAft>
+              <a:buSzPct val="100000"/>
+              <a:buChar char="•"/>
+            </a:pPr>
+            <a:r>
+              <a:rPr lang="en-US" sz="1200" dirty="0">
+                <a:solidFill>
+                  <a:srgbClr val="1C2833"/>
+                </a:solidFill>
+                <a:latin typeface="Arial" pitchFamily="34" charset="0"/>
+                <a:ea typeface="Arial" pitchFamily="34" charset="-122"/>
+                <a:cs typeface="Arial" pitchFamily="34" charset="-120"/>
+              </a:rPr>
+              <a:t>Practise: complement of </a:t>
+            </a:r>
+            <a:pPr algn="l" indent="0" marL="0">
+              <a:lnSpc>
+                <a:spcPts val="1620"/>
+              </a:lnSpc>
+              <a:spcAft>
+                <a:spcPts val="300"/>
+              </a:spcAft>
+              <a:buNone/>
+            </a:pPr>
+            <a:r>
+              <a:rPr lang="en-US" sz="1200" dirty="0">
+                <a:solidFill>
+                  <a:srgbClr val="1C2833"/>
+                </a:solidFill>
+                <a:latin typeface="Arial" pitchFamily="34" charset="0"/>
+                <a:ea typeface="Arial" pitchFamily="34" charset="-122"/>
+                <a:cs typeface="Arial" pitchFamily="34" charset="-120"/>
+              </a:rPr>
+              <a:t>4321</a:t>
+            </a:r>
+            <a:pPr algn="l" indent="0" marL="0">
+              <a:lnSpc>
+                <a:spcPts val="1620"/>
+              </a:lnSpc>
+              <a:spcAft>
+                <a:spcPts val="300"/>
+              </a:spcAft>
+              <a:buNone/>
+            </a:pPr>
+            <a:r>
+              <a:rPr lang="en-US" sz="1200" dirty="0">
+                <a:solidFill>
+                  <a:srgbClr val="1C2833"/>
+                </a:solidFill>
+                <a:latin typeface="Arial" pitchFamily="34" charset="0"/>
+                <a:ea typeface="Arial" pitchFamily="34" charset="-122"/>
+                <a:cs typeface="Arial" pitchFamily="34" charset="-120"/>
+              </a:rPr>
+              <a:t> to 10 000. Show the algebraic identity for this one (the same way the lesson did 1000 − 567).</a:t>
+            </a:r>
+            <a:endParaRPr lang="en-US" sz="1200" dirty="0"/>
+          </a:p>
+        </p:txBody>
+      </p:sp>
+      <p:sp>
+        <p:nvSpPr>
+          <p:cNvPr id="5" name="Text 3"/>
+          <p:cNvSpPr/>
+          <p:nvPr/>
+        </p:nvSpPr>
+        <p:spPr>
+          <a:xfrm>
+            <a:off x="406301" y="4434929"/>
+            <a:ext cx="8498026" cy="213271"/>
+          </a:xfrm>
+          <a:prstGeom prst="rect">
+            <a:avLst/>
+          </a:prstGeom>
+          <a:noFill/>
+          <a:ln/>
+        </p:spPr>
+        <p:txBody>
+          <a:bodyPr wrap="square" lIns="0" tIns="0" rIns="0" bIns="0" rtlCol="0" anchor="t"/>
+          <a:lstStyle/>
+          <a:p>
+            <a:pPr algn="l" indent="0" marL="0">
+              <a:lnSpc>
+                <a:spcPts val="1680"/>
+              </a:lnSpc>
+              <a:spcBef>
+                <a:spcPts val="300"/>
+              </a:spcBef>
+              <a:spcAft>
+                <a:spcPts val="300"/>
+              </a:spcAft>
+              <a:buNone/>
+            </a:pPr>
+            <a:r>
+              <a:rPr lang="en-US" sz="1200" dirty="0">
+                <a:solidFill>
+                  <a:srgbClr val="1C2833"/>
+                </a:solidFill>
+                <a:latin typeface="Arial" pitchFamily="34" charset="0"/>
+                <a:ea typeface="Arial" pitchFamily="34" charset="-122"/>
+                <a:cs typeface="Arial" pitchFamily="34" charset="-120"/>
+              </a:rPr>
+              <a:t>Middle ·  · IKS Curriculum</a:t>
+            </a:r>
+            <a:endParaRPr lang="en-US" sz="1200" dirty="0"/>
+          </a:p>
+        </p:txBody>
+      </p:sp>
+    </p:spTree>
+  </p:cSld>
+  <p:clrMapOvr>
+    <a:masterClrMapping/>
+  </p:clrMapOvr>
+</p:sld>
+</file>
+
+<file path=ppt/slides/slide18.xml><?xml version="1.0" encoding="utf-8"?>
+<p:sld xmlns:a="http://schemas.openxmlformats.org/drawingml/2006/main" xmlns:r="http://schemas.openxmlformats.org/officeDocument/2006/relationships" xmlns:p="http://schemas.openxmlformats.org/presentationml/2006/main">
+  <p:cSld name="Slide 18">
+    <p:bg>
+      <p:bgPr>
+        <a:solidFill>
+          <a:srgbClr val="FFFFFF"/>
+        </a:solidFill>
+      </p:bgPr>
+    </p:bg>
+    <p:spTree>
+      <p:nvGrpSpPr>
+        <p:cNvPr id="1" name=""/>
+        <p:cNvGrpSpPr/>
+        <p:nvPr/>
+      </p:nvGrpSpPr>
+      <p:grpSpPr>
+        <a:xfrm>
+          <a:off x="0" y="0"/>
+          <a:ext cx="0" cy="0"/>
+          <a:chOff x="0" y="0"/>
+          <a:chExt cx="0" cy="0"/>
+        </a:xfrm>
+      </p:grpSpPr>
+      <p:sp>
+        <p:nvSpPr>
+          <p:cNvPr id="2" name="Text 0"/>
+          <p:cNvSpPr/>
+          <p:nvPr/>
+        </p:nvSpPr>
+        <p:spPr>
+          <a:xfrm>
+            <a:off x="0" y="0"/>
+            <a:ext cx="9144000" cy="101501"/>
+          </a:xfrm>
+          <a:prstGeom prst="rect">
+            <a:avLst/>
+          </a:prstGeom>
+          <a:solidFill>
+            <a:srgbClr val="277884"/>
+          </a:solidFill>
+          <a:ln/>
+        </p:spPr>
+        <p:txBody>
+          <a:bodyPr wrap="square" rtlCol="0" anchor="ctr"/>
+          <a:lstStyle/>
+          <a:p>
+            <a:pPr indent="0" marL="0">
+              <a:buNone/>
+            </a:pPr>
+            <a:endParaRPr lang="en-US" dirty="0"/>
+          </a:p>
+        </p:txBody>
+      </p:sp>
+      <p:sp>
+        <p:nvSpPr>
+          <p:cNvPr id="3" name="Text 1"/>
+          <p:cNvSpPr/>
+          <p:nvPr/>
+        </p:nvSpPr>
+        <p:spPr>
+          <a:xfrm>
+            <a:off x="406301" y="457051"/>
+            <a:ext cx="8498026" cy="274290"/>
+          </a:xfrm>
+          <a:prstGeom prst="rect">
+            <a:avLst/>
+          </a:prstGeom>
+          <a:noFill/>
+          <a:ln/>
+        </p:spPr>
+        <p:txBody>
+          <a:bodyPr wrap="square" lIns="0" tIns="0" rIns="0" bIns="0" rtlCol="0" anchor="t"/>
+          <a:lstStyle/>
+          <a:p>
+            <a:pPr algn="l" indent="0" marL="0">
+              <a:lnSpc>
+                <a:spcPts val="2160"/>
+              </a:lnSpc>
+              <a:spcBef>
+                <a:spcPts val="600"/>
+              </a:spcBef>
+              <a:spcAft>
+                <a:spcPts val="800"/>
+              </a:spcAft>
+              <a:buNone/>
+            </a:pPr>
+            <a:r>
+              <a:rPr lang="en-US" sz="1800" b="1" dirty="0">
+                <a:solidFill>
+                  <a:srgbClr val="FE4447"/>
+                </a:solidFill>
+                <a:latin typeface="Georgia" pitchFamily="34" charset="0"/>
+                <a:ea typeface="Georgia" pitchFamily="34" charset="-122"/>
+                <a:cs typeface="Georgia" pitchFamily="34" charset="-120"/>
+              </a:rPr>
+              <a:t>Differentiation</a:t>
+            </a:r>
+            <a:endParaRPr lang="en-US" sz="1800" dirty="0"/>
+          </a:p>
+        </p:txBody>
+      </p:sp>
+      <p:sp>
+        <p:nvSpPr>
+          <p:cNvPr id="4" name="Text 2"/>
+          <p:cNvSpPr/>
+          <p:nvPr/>
+        </p:nvSpPr>
+        <p:spPr>
+          <a:xfrm>
+            <a:off x="634901" y="883593"/>
+            <a:ext cx="8102798" cy="769441"/>
+          </a:xfrm>
+          <a:prstGeom prst="rect">
+            <a:avLst/>
+          </a:prstGeom>
+          <a:noFill/>
+          <a:ln/>
+        </p:spPr>
+        <p:txBody>
+          <a:bodyPr wrap="square" lIns="0" tIns="0" rIns="0" bIns="0" rtlCol="0" anchor="t"/>
+          <a:lstStyle/>
+          <a:p>
+            <a:pPr algn="l" marL="342900" indent="-342900">
+              <a:lnSpc>
+                <a:spcPts val="1620"/>
+              </a:lnSpc>
+              <a:spcAft>
+                <a:spcPts val="300"/>
+              </a:spcAft>
+              <a:buSzPct val="100000"/>
+              <a:buChar char="•"/>
+            </a:pPr>
+            <a:r>
+              <a:rPr lang="en-US" sz="1200" b="1" dirty="0">
+                <a:solidFill>
+                  <a:srgbClr val="1C2833"/>
+                </a:solidFill>
+                <a:latin typeface="Arial" pitchFamily="34" charset="0"/>
+                <a:ea typeface="Arial" pitchFamily="34" charset="-122"/>
+                <a:cs typeface="Arial" pitchFamily="34" charset="-120"/>
+              </a:rPr>
+              <a:t>Tier up:</a:t>
+            </a:r>
+            <a:pPr algn="l" indent="0" marL="0">
+              <a:lnSpc>
+                <a:spcPts val="1620"/>
+              </a:lnSpc>
+              <a:spcAft>
+                <a:spcPts val="300"/>
+              </a:spcAft>
+              <a:buNone/>
+            </a:pPr>
+            <a:r>
+              <a:rPr lang="en-US" sz="1200" dirty="0">
+                <a:solidFill>
+                  <a:srgbClr val="1C2833"/>
+                </a:solidFill>
+                <a:latin typeface="Arial" pitchFamily="34" charset="0"/>
+                <a:ea typeface="Arial" pitchFamily="34" charset="-122"/>
+                <a:cs typeface="Arial" pitchFamily="34" charset="-120"/>
+              </a:rPr>
+              <a:t> Write the explanation for a Grade 11 student. Use formal notation. Show the identity holds for any base b: </a:t>
+            </a:r>
+            <a:pPr algn="l" indent="0" marL="0">
+              <a:lnSpc>
+                <a:spcPts val="1620"/>
+              </a:lnSpc>
+              <a:spcAft>
+                <a:spcPts val="300"/>
+              </a:spcAft>
+              <a:buNone/>
+            </a:pPr>
+            <a:r>
+              <a:rPr lang="en-US" sz="1200" dirty="0">
+                <a:solidFill>
+                  <a:srgbClr val="1C2833"/>
+                </a:solidFill>
+                <a:latin typeface="Arial" pitchFamily="34" charset="0"/>
+                <a:ea typeface="Arial" pitchFamily="34" charset="-122"/>
+                <a:cs typeface="Arial" pitchFamily="34" charset="-120"/>
+              </a:rPr>
+              <a:t>bⁿ − A = (bⁿ − 1) − A + 1</a:t>
+            </a:r>
+            <a:pPr algn="l" indent="0" marL="0">
+              <a:lnSpc>
+                <a:spcPts val="1620"/>
+              </a:lnSpc>
+              <a:spcAft>
+                <a:spcPts val="300"/>
+              </a:spcAft>
+              <a:buNone/>
+            </a:pPr>
+            <a:r>
+              <a:rPr lang="en-US" sz="1200" dirty="0">
+                <a:solidFill>
+                  <a:srgbClr val="1C2833"/>
+                </a:solidFill>
+                <a:latin typeface="Arial" pitchFamily="34" charset="0"/>
+                <a:ea typeface="Arial" pitchFamily="34" charset="-122"/>
+                <a:cs typeface="Arial" pitchFamily="34" charset="-120"/>
+              </a:rPr>
+              <a:t>. Preview Day 7's binary case.</a:t>
+            </a:r>
+            <a:endParaRPr lang="en-US" sz="1200" dirty="0"/>
+          </a:p>
+          <a:p>
+            <a:pPr algn="l" marL="342900" indent="-342900">
+              <a:lnSpc>
+                <a:spcPts val="1620"/>
+              </a:lnSpc>
+              <a:spcAft>
+                <a:spcPts val="300"/>
+              </a:spcAft>
+              <a:buSzPct val="100000"/>
+              <a:buChar char="•"/>
+            </a:pPr>
+            <a:r>
+              <a:rPr lang="en-US" sz="1200" b="1" dirty="0">
+                <a:solidFill>
+                  <a:srgbClr val="1C2833"/>
+                </a:solidFill>
+                <a:latin typeface="Arial" pitchFamily="34" charset="0"/>
+                <a:ea typeface="Arial" pitchFamily="34" charset="-122"/>
+                <a:cs typeface="Arial" pitchFamily="34" charset="-120"/>
+              </a:rPr>
+              <a:t>Tier down:</a:t>
+            </a:r>
+            <a:pPr algn="l" indent="0" marL="0">
+              <a:lnSpc>
+                <a:spcPts val="1620"/>
+              </a:lnSpc>
+              <a:spcAft>
+                <a:spcPts val="300"/>
+              </a:spcAft>
+              <a:buNone/>
+            </a:pPr>
+            <a:r>
+              <a:rPr lang="en-US" sz="1200" dirty="0">
+                <a:solidFill>
+                  <a:srgbClr val="1C2833"/>
+                </a:solidFill>
+                <a:latin typeface="Arial" pitchFamily="34" charset="0"/>
+                <a:ea typeface="Arial" pitchFamily="34" charset="-122"/>
+                <a:cs typeface="Arial" pitchFamily="34" charset="-120"/>
+              </a:rPr>
+              <a:t> Skip the written explanation. Verbalise to your partner. Use the bar-model picture as scaffold.</a:t>
+            </a:r>
+            <a:endParaRPr lang="en-US" sz="1200" dirty="0"/>
+          </a:p>
+        </p:txBody>
+      </p:sp>
+      <p:sp>
+        <p:nvSpPr>
+          <p:cNvPr id="5" name="Text 3"/>
+          <p:cNvSpPr/>
+          <p:nvPr/>
+        </p:nvSpPr>
+        <p:spPr>
+          <a:xfrm>
+            <a:off x="406301" y="4434929"/>
+            <a:ext cx="8498026" cy="213271"/>
+          </a:xfrm>
+          <a:prstGeom prst="rect">
+            <a:avLst/>
+          </a:prstGeom>
+          <a:noFill/>
+          <a:ln/>
+        </p:spPr>
+        <p:txBody>
+          <a:bodyPr wrap="square" lIns="0" tIns="0" rIns="0" bIns="0" rtlCol="0" anchor="t"/>
+          <a:lstStyle/>
+          <a:p>
+            <a:pPr algn="l" indent="0" marL="0">
+              <a:lnSpc>
+                <a:spcPts val="1680"/>
+              </a:lnSpc>
+              <a:spcBef>
+                <a:spcPts val="300"/>
+              </a:spcBef>
+              <a:spcAft>
+                <a:spcPts val="300"/>
+              </a:spcAft>
+              <a:buNone/>
+            </a:pPr>
+            <a:r>
+              <a:rPr lang="en-US" sz="1200" dirty="0">
+                <a:solidFill>
+                  <a:srgbClr val="1C2833"/>
+                </a:solidFill>
+                <a:latin typeface="Arial" pitchFamily="34" charset="0"/>
+                <a:ea typeface="Arial" pitchFamily="34" charset="-122"/>
+                <a:cs typeface="Arial" pitchFamily="34" charset="-120"/>
+              </a:rPr>
+              <a:t>Middle ·  · IKS Curriculum</a:t>
+            </a:r>
+            <a:endParaRPr lang="en-US" sz="1200" dirty="0"/>
+          </a:p>
+        </p:txBody>
+      </p:sp>
+    </p:spTree>
+  </p:cSld>
+  <p:clrMapOvr>
+    <a:masterClrMapping/>
+  </p:clrMapOvr>
+</p:sld>
+</file>
+
+<file path=ppt/slides/slide19.xml><?xml version="1.0" encoding="utf-8"?>
+<p:sld xmlns:a="http://schemas.openxmlformats.org/drawingml/2006/main" xmlns:r="http://schemas.openxmlformats.org/officeDocument/2006/relationships" xmlns:p="http://schemas.openxmlformats.org/presentationml/2006/main">
+  <p:cSld name="Slide 19">
+    <p:bg>
+      <p:bgPr>
+        <a:solidFill>
+          <a:srgbClr val="FFFFFF"/>
+        </a:solidFill>
+      </p:bgPr>
+    </p:bg>
+    <p:spTree>
+      <p:nvGrpSpPr>
+        <p:cNvPr id="1" name=""/>
+        <p:cNvGrpSpPr/>
+        <p:nvPr/>
+      </p:nvGrpSpPr>
+      <p:grpSpPr>
+        <a:xfrm>
+          <a:off x="0" y="0"/>
+          <a:ext cx="0" cy="0"/>
+          <a:chOff x="0" y="0"/>
+          <a:chExt cx="0" cy="0"/>
+        </a:xfrm>
+      </p:grpSpPr>
+      <p:sp>
+        <p:nvSpPr>
+          <p:cNvPr id="2" name="Text 0"/>
+          <p:cNvSpPr/>
+          <p:nvPr/>
+        </p:nvSpPr>
+        <p:spPr>
+          <a:xfrm>
+            <a:off x="0" y="0"/>
+            <a:ext cx="9144000" cy="101501"/>
+          </a:xfrm>
+          <a:prstGeom prst="rect">
+            <a:avLst/>
+          </a:prstGeom>
+          <a:solidFill>
+            <a:srgbClr val="277884"/>
+          </a:solidFill>
+          <a:ln/>
+        </p:spPr>
+        <p:txBody>
+          <a:bodyPr wrap="square" rtlCol="0" anchor="ctr"/>
+          <a:lstStyle/>
+          <a:p>
+            <a:pPr indent="0" marL="0">
+              <a:buNone/>
+            </a:pPr>
+            <a:endParaRPr lang="en-US" dirty="0"/>
+          </a:p>
+        </p:txBody>
+      </p:sp>
+      <p:sp>
+        <p:nvSpPr>
+          <p:cNvPr id="3" name="Text 1"/>
+          <p:cNvSpPr/>
+          <p:nvPr/>
+        </p:nvSpPr>
+        <p:spPr>
+          <a:xfrm>
+            <a:off x="406301" y="457051"/>
+            <a:ext cx="8498026" cy="274290"/>
+          </a:xfrm>
+          <a:prstGeom prst="rect">
+            <a:avLst/>
+          </a:prstGeom>
+          <a:noFill/>
+          <a:ln/>
+        </p:spPr>
+        <p:txBody>
+          <a:bodyPr wrap="square" lIns="0" tIns="0" rIns="0" bIns="0" rtlCol="0" anchor="t"/>
+          <a:lstStyle/>
+          <a:p>
+            <a:pPr algn="l" indent="0" marL="0">
+              <a:lnSpc>
+                <a:spcPts val="2160"/>
+              </a:lnSpc>
+              <a:spcBef>
+                <a:spcPts val="600"/>
+              </a:spcBef>
+              <a:spcAft>
+                <a:spcPts val="800"/>
+              </a:spcAft>
+              <a:buNone/>
+            </a:pPr>
+            <a:r>
+              <a:rPr lang="en-US" sz="1800" b="1" dirty="0">
+                <a:solidFill>
+                  <a:srgbClr val="FE4447"/>
+                </a:solidFill>
+                <a:latin typeface="Georgia" pitchFamily="34" charset="0"/>
+                <a:ea typeface="Georgia" pitchFamily="34" charset="-122"/>
+                <a:cs typeface="Georgia" pitchFamily="34" charset="-120"/>
+              </a:rPr>
+              <a:t>Teacher notes</a:t>
+            </a:r>
+            <a:endParaRPr lang="en-US" sz="1800" dirty="0"/>
+          </a:p>
+        </p:txBody>
+      </p:sp>
+      <p:sp>
+        <p:nvSpPr>
+          <p:cNvPr id="4" name="Text 2"/>
+          <p:cNvSpPr/>
+          <p:nvPr/>
+        </p:nvSpPr>
+        <p:spPr>
+          <a:xfrm>
+            <a:off x="634901" y="883593"/>
+            <a:ext cx="8102798" cy="1611213"/>
+          </a:xfrm>
+          <a:prstGeom prst="rect">
+            <a:avLst/>
+          </a:prstGeom>
+          <a:noFill/>
+          <a:ln/>
+        </p:spPr>
+        <p:txBody>
+          <a:bodyPr wrap="square" lIns="0" tIns="0" rIns="0" bIns="0" rtlCol="0" anchor="t"/>
+          <a:lstStyle/>
+          <a:p>
+            <a:pPr algn="l" marL="342900" indent="-342900">
+              <a:lnSpc>
+                <a:spcPts val="1620"/>
+              </a:lnSpc>
+              <a:spcAft>
+                <a:spcPts val="300"/>
+              </a:spcAft>
+              <a:buSzPct val="100000"/>
+              <a:buChar char="•"/>
+            </a:pPr>
+            <a:r>
+              <a:rPr lang="en-US" sz="1200" dirty="0">
+                <a:solidFill>
+                  <a:srgbClr val="1C2833"/>
+                </a:solidFill>
+                <a:latin typeface="Arial" pitchFamily="34" charset="0"/>
+                <a:ea typeface="Arial" pitchFamily="34" charset="-122"/>
+                <a:cs typeface="Arial" pitchFamily="34" charset="-120"/>
+              </a:rPr>
+              <a:t>The most common student error in the paragraph: confusing "the last digit takes from 10" with "you add 1 at the end." These are the SAME operation, just expressed differently — </a:t>
+            </a:r>
+            <a:pPr algn="l" indent="0" marL="0">
+              <a:lnSpc>
+                <a:spcPts val="1620"/>
+              </a:lnSpc>
+              <a:spcAft>
+                <a:spcPts val="300"/>
+              </a:spcAft>
+              <a:buNone/>
+            </a:pPr>
+            <a:r>
+              <a:rPr lang="en-US" sz="1200" dirty="0">
+                <a:solidFill>
+                  <a:srgbClr val="1C2833"/>
+                </a:solidFill>
+                <a:latin typeface="Arial" pitchFamily="34" charset="0"/>
+                <a:ea typeface="Arial" pitchFamily="34" charset="-122"/>
+                <a:cs typeface="Arial" pitchFamily="34" charset="-120"/>
+              </a:rPr>
+              <a:t>10 − x = (9 − x) + 1</a:t>
+            </a:r>
+            <a:pPr algn="l" indent="0" marL="0">
+              <a:lnSpc>
+                <a:spcPts val="1620"/>
+              </a:lnSpc>
+              <a:spcAft>
+                <a:spcPts val="300"/>
+              </a:spcAft>
+              <a:buNone/>
+            </a:pPr>
+            <a:r>
+              <a:rPr lang="en-US" sz="1200" dirty="0">
+                <a:solidFill>
+                  <a:srgbClr val="1C2833"/>
+                </a:solidFill>
+                <a:latin typeface="Arial" pitchFamily="34" charset="0"/>
+                <a:ea typeface="Arial" pitchFamily="34" charset="-122"/>
+                <a:cs typeface="Arial" pitchFamily="34" charset="-120"/>
+              </a:rPr>
+              <a:t>. Some students will write both; that's fine.</a:t>
+            </a:r>
+            <a:endParaRPr lang="en-US" sz="1200" dirty="0"/>
+          </a:p>
+          <a:p>
+            <a:pPr algn="l" marL="342900" indent="-342900">
+              <a:lnSpc>
+                <a:spcPts val="1620"/>
+              </a:lnSpc>
+              <a:spcAft>
+                <a:spcPts val="300"/>
+              </a:spcAft>
+              <a:buSzPct val="100000"/>
+              <a:buChar char="•"/>
+            </a:pPr>
+            <a:r>
+              <a:rPr lang="en-US" sz="1200" dirty="0">
+                <a:solidFill>
+                  <a:srgbClr val="1C2833"/>
+                </a:solidFill>
+                <a:latin typeface="Arial" pitchFamily="34" charset="0"/>
+                <a:ea typeface="Arial" pitchFamily="34" charset="-122"/>
+                <a:cs typeface="Arial" pitchFamily="34" charset="-120"/>
+              </a:rPr>
+              <a:t>Some students prefer the visual bar-model; some prefer the algebra. Both are valid. Honour the choice and ask them to draw the OTHER one as homework.</a:t>
+            </a:r>
+            <a:endParaRPr lang="en-US" sz="1200" dirty="0"/>
+          </a:p>
+          <a:p>
+            <a:pPr algn="l" marL="342900" indent="-342900">
+              <a:lnSpc>
+                <a:spcPts val="1620"/>
+              </a:lnSpc>
+              <a:spcAft>
+                <a:spcPts val="300"/>
+              </a:spcAft>
+              <a:buSzPct val="100000"/>
+              <a:buChar char="•"/>
+            </a:pPr>
+            <a:r>
+              <a:rPr lang="en-US" sz="1200" dirty="0">
+                <a:solidFill>
+                  <a:srgbClr val="1C2833"/>
+                </a:solidFill>
+                <a:latin typeface="Arial" pitchFamily="34" charset="0"/>
+                <a:ea typeface="Arial" pitchFamily="34" charset="-122"/>
+                <a:cs typeface="Arial" pitchFamily="34" charset="-120"/>
+              </a:rPr>
+              <a:t>Honest provenance is essential here. Don't oversell. Some students (or parents) believe Nikhilam is "ancient Vedic mathematics." Clarify gently; preview the Senior-band treatment of the historicity question.</a:t>
+            </a:r>
+            <a:endParaRPr lang="en-US" sz="1200" dirty="0"/>
+          </a:p>
+        </p:txBody>
+      </p:sp>
+      <p:sp>
+        <p:nvSpPr>
+          <p:cNvPr id="5" name="Text 3"/>
           <p:cNvSpPr/>
           <p:nvPr/>
         </p:nvSpPr>
@@ -2913,7 +7057,7 @@
                 <a:ea typeface="Georgia" pitchFamily="34" charset="-122"/>
                 <a:cs typeface="Georgia" pitchFamily="34" charset="-120"/>
               </a:rPr>
-              <a:t>Materials</a:t>
+              <a:t>Learning objective</a:t>
             </a:r>
             <a:endParaRPr lang="en-US" sz="1800" dirty="0"/>
           </a:p>
@@ -2928,7 +7072,7 @@
         <p:spPr>
           <a:xfrm>
             <a:off x="406301" y="870942"/>
-            <a:ext cx="8498026" cy="436066"/>
+            <a:ext cx="8498026" cy="445591"/>
           </a:xfrm>
           <a:prstGeom prst="rect">
             <a:avLst/>
@@ -2961,7 +7105,7 @@
                 <a:ea typeface="Arial" pitchFamily="34" charset="-122"/>
                 <a:cs typeface="Arial" pitchFamily="34" charset="-120"/>
               </a:rPr>
-              <a:t>– Whiteboard – Worksheet: "explain to a friend" prompt + space – Coloured pencils for the bar model – The 16-sūtra list (</a:t>
+              <a:t>By the end of this lesson, students will explain </a:t>
             </a:r>
             <a:pPr algn="l" indent="0" marL="0">
               <a:lnSpc>
@@ -2976,6 +7120,29 @@
               <a:buNone/>
             </a:pPr>
             <a:r>
+              <a:rPr lang="en-US" sz="1200" i="1" dirty="0">
+                <a:solidFill>
+                  <a:srgbClr val="1C2833"/>
+                </a:solidFill>
+                <a:latin typeface="Arial" pitchFamily="34" charset="0"/>
+                <a:ea typeface="Arial" pitchFamily="34" charset="-122"/>
+                <a:cs typeface="Arial" pitchFamily="34" charset="-120"/>
+              </a:rPr>
+              <a:t>why</a:t>
+            </a:r>
+            <a:pPr algn="l" indent="0" marL="0">
+              <a:lnSpc>
+                <a:spcPts val="1680"/>
+              </a:lnSpc>
+              <a:spcBef>
+                <a:spcPts val="300"/>
+              </a:spcBef>
+              <a:spcAft>
+                <a:spcPts val="300"/>
+              </a:spcAft>
+              <a:buNone/>
+            </a:pPr>
+            <a:r>
               <a:rPr lang="en-US" sz="1200" dirty="0">
                 <a:solidFill>
                   <a:srgbClr val="1C2833"/>
@@ -2984,15 +7151,326 @@
                 <a:ea typeface="Arial" pitchFamily="34" charset="-122"/>
                 <a:cs typeface="Arial" pitchFamily="34" charset="-120"/>
               </a:rPr>
+              <a:t> the Nikhilam rule produces the correct answer, using the identity </a:t>
+            </a:r>
+            <a:pPr algn="l" indent="0" marL="0">
+              <a:lnSpc>
+                <a:spcPts val="1680"/>
+              </a:lnSpc>
+              <a:spcBef>
+                <a:spcPts val="300"/>
+              </a:spcBef>
+              <a:spcAft>
+                <a:spcPts val="300"/>
+              </a:spcAft>
+              <a:buNone/>
+            </a:pPr>
+            <a:r>
+              <a:rPr lang="en-US" sz="1200" dirty="0">
+                <a:solidFill>
+                  <a:srgbClr val="1C2833"/>
+                </a:solidFill>
+                <a:latin typeface="Arial" pitchFamily="34" charset="0"/>
+                <a:ea typeface="Arial" pitchFamily="34" charset="-122"/>
+                <a:cs typeface="Arial" pitchFamily="34" charset="-120"/>
+              </a:rPr>
+              <a:t>10ⁿ − A = (10ⁿ − 1) − A + 1</a:t>
+            </a:r>
+            <a:pPr algn="l" indent="0" marL="0">
+              <a:lnSpc>
+                <a:spcPts val="1680"/>
+              </a:lnSpc>
+              <a:spcBef>
+                <a:spcPts val="300"/>
+              </a:spcBef>
+              <a:spcAft>
+                <a:spcPts val="300"/>
+              </a:spcAft>
+              <a:buNone/>
+            </a:pPr>
+            <a:r>
+              <a:rPr lang="en-US" sz="1200" dirty="0">
+                <a:solidFill>
+                  <a:srgbClr val="1C2833"/>
+                </a:solidFill>
+                <a:latin typeface="Arial" pitchFamily="34" charset="0"/>
+                <a:ea typeface="Arial" pitchFamily="34" charset="-122"/>
+                <a:cs typeface="Arial" pitchFamily="34" charset="-120"/>
+              </a:rPr>
+              <a:t>, and will draw a bar-model that shows the same idea visually.</a:t>
+            </a:r>
+            <a:endParaRPr lang="en-US" sz="1200" dirty="0"/>
+          </a:p>
+        </p:txBody>
+      </p:sp>
+      <p:sp>
+        <p:nvSpPr>
+          <p:cNvPr id="5" name="Text 3"/>
+          <p:cNvSpPr/>
+          <p:nvPr/>
+        </p:nvSpPr>
+        <p:spPr>
+          <a:xfrm>
+            <a:off x="406301" y="4434929"/>
+            <a:ext cx="8498026" cy="213271"/>
+          </a:xfrm>
+          <a:prstGeom prst="rect">
+            <a:avLst/>
+          </a:prstGeom>
+          <a:noFill/>
+          <a:ln/>
+        </p:spPr>
+        <p:txBody>
+          <a:bodyPr wrap="square" lIns="0" tIns="0" rIns="0" bIns="0" rtlCol="0" anchor="t"/>
+          <a:lstStyle/>
+          <a:p>
+            <a:pPr algn="l" indent="0" marL="0">
+              <a:lnSpc>
+                <a:spcPts val="1680"/>
+              </a:lnSpc>
+              <a:spcBef>
+                <a:spcPts val="300"/>
+              </a:spcBef>
+              <a:spcAft>
+                <a:spcPts val="300"/>
+              </a:spcAft>
+              <a:buNone/>
+            </a:pPr>
+            <a:r>
+              <a:rPr lang="en-US" sz="1200" dirty="0">
+                <a:solidFill>
+                  <a:srgbClr val="1C2833"/>
+                </a:solidFill>
+                <a:latin typeface="Arial" pitchFamily="34" charset="0"/>
+                <a:ea typeface="Arial" pitchFamily="34" charset="-122"/>
+                <a:cs typeface="Arial" pitchFamily="34" charset="-120"/>
+              </a:rPr>
+              <a:t>Middle ·  · IKS Curriculum</a:t>
+            </a:r>
+            <a:endParaRPr lang="en-US" sz="1200" dirty="0"/>
+          </a:p>
+        </p:txBody>
+      </p:sp>
+    </p:spTree>
+  </p:cSld>
+  <p:clrMapOvr>
+    <a:masterClrMapping/>
+  </p:clrMapOvr>
+</p:sld>
+</file>
+
+<file path=ppt/slides/slide20.xml><?xml version="1.0" encoding="utf-8"?>
+<p:sld xmlns:a="http://schemas.openxmlformats.org/drawingml/2006/main" xmlns:r="http://schemas.openxmlformats.org/officeDocument/2006/relationships" xmlns:p="http://schemas.openxmlformats.org/presentationml/2006/main">
+  <p:cSld name="Slide 20">
+    <p:bg>
+      <p:bgPr>
+        <a:solidFill>
+          <a:srgbClr val="FFFFFF"/>
+        </a:solidFill>
+      </p:bgPr>
+    </p:bg>
+    <p:spTree>
+      <p:nvGrpSpPr>
+        <p:cNvPr id="1" name=""/>
+        <p:cNvGrpSpPr/>
+        <p:nvPr/>
+      </p:nvGrpSpPr>
+      <p:grpSpPr>
+        <a:xfrm>
+          <a:off x="0" y="0"/>
+          <a:ext cx="0" cy="0"/>
+          <a:chOff x="0" y="0"/>
+          <a:chExt cx="0" cy="0"/>
+        </a:xfrm>
+      </p:grpSpPr>
+      <p:sp>
+        <p:nvSpPr>
+          <p:cNvPr id="2" name="Text 0"/>
+          <p:cNvSpPr/>
+          <p:nvPr/>
+        </p:nvSpPr>
+        <p:spPr>
+          <a:xfrm>
+            <a:off x="0" y="0"/>
+            <a:ext cx="9144000" cy="101501"/>
+          </a:xfrm>
+          <a:prstGeom prst="rect">
+            <a:avLst/>
+          </a:prstGeom>
+          <a:solidFill>
+            <a:srgbClr val="277884"/>
+          </a:solidFill>
+          <a:ln/>
+        </p:spPr>
+        <p:txBody>
+          <a:bodyPr wrap="square" rtlCol="0" anchor="ctr"/>
+          <a:lstStyle/>
+          <a:p>
+            <a:pPr indent="0" marL="0">
+              <a:buNone/>
+            </a:pPr>
+            <a:endParaRPr lang="en-US" dirty="0"/>
+          </a:p>
+        </p:txBody>
+      </p:sp>
+      <p:sp>
+        <p:nvSpPr>
+          <p:cNvPr id="3" name="Text 1"/>
+          <p:cNvSpPr/>
+          <p:nvPr/>
+        </p:nvSpPr>
+        <p:spPr>
+          <a:xfrm>
+            <a:off x="406301" y="457051"/>
+            <a:ext cx="8498026" cy="274290"/>
+          </a:xfrm>
+          <a:prstGeom prst="rect">
+            <a:avLst/>
+          </a:prstGeom>
+          <a:noFill/>
+          <a:ln/>
+        </p:spPr>
+        <p:txBody>
+          <a:bodyPr wrap="square" lIns="0" tIns="0" rIns="0" bIns="0" rtlCol="0" anchor="t"/>
+          <a:lstStyle/>
+          <a:p>
+            <a:pPr algn="l" indent="0" marL="0">
+              <a:lnSpc>
+                <a:spcPts val="2160"/>
+              </a:lnSpc>
+              <a:spcBef>
+                <a:spcPts val="600"/>
+              </a:spcBef>
+              <a:spcAft>
+                <a:spcPts val="800"/>
+              </a:spcAft>
+              <a:buNone/>
+            </a:pPr>
+            <a:r>
+              <a:rPr lang="en-US" sz="1800" b="1" dirty="0">
+                <a:solidFill>
+                  <a:srgbClr val="FE4447"/>
+                </a:solidFill>
+                <a:latin typeface="Georgia" pitchFamily="34" charset="0"/>
+                <a:ea typeface="Georgia" pitchFamily="34" charset="-122"/>
+                <a:cs typeface="Georgia" pitchFamily="34" charset="-120"/>
+              </a:rPr>
+              <a:t>Citation(s) used in this lesson</a:t>
+            </a:r>
+            <a:endParaRPr lang="en-US" sz="1800" dirty="0"/>
+          </a:p>
+        </p:txBody>
+      </p:sp>
+      <p:sp>
+        <p:nvSpPr>
+          <p:cNvPr id="4" name="Text 2"/>
+          <p:cNvSpPr/>
+          <p:nvPr/>
+        </p:nvSpPr>
+        <p:spPr>
+          <a:xfrm>
+            <a:off x="634901" y="883593"/>
+            <a:ext cx="8102798" cy="525661"/>
+          </a:xfrm>
+          <a:prstGeom prst="rect">
+            <a:avLst/>
+          </a:prstGeom>
+          <a:noFill/>
+          <a:ln/>
+        </p:spPr>
+        <p:txBody>
+          <a:bodyPr wrap="square" lIns="0" tIns="0" rIns="0" bIns="0" rtlCol="0" anchor="t"/>
+          <a:lstStyle/>
+          <a:p>
+            <a:pPr algn="l" marL="342900" indent="-342900">
+              <a:lnSpc>
+                <a:spcPts val="1620"/>
+              </a:lnSpc>
+              <a:spcAft>
+                <a:spcPts val="300"/>
+              </a:spcAft>
+              <a:buSzPct val="100000"/>
+              <a:buChar char="•"/>
+            </a:pPr>
+            <a:r>
+              <a:rPr lang="en-US" sz="1200" dirty="0">
+                <a:solidFill>
+                  <a:srgbClr val="1C2833"/>
+                </a:solidFill>
+                <a:latin typeface="Arial" pitchFamily="34" charset="0"/>
+                <a:ea typeface="Arial" pitchFamily="34" charset="-122"/>
+                <a:cs typeface="Arial" pitchFamily="34" charset="-120"/>
+              </a:rPr>
+              <a:t>Tirthaji, </a:t>
+            </a:r>
+            <a:pPr algn="l" indent="0" marL="0">
+              <a:lnSpc>
+                <a:spcPts val="1620"/>
+              </a:lnSpc>
+              <a:spcAft>
+                <a:spcPts val="300"/>
+              </a:spcAft>
+              <a:buNone/>
+            </a:pPr>
+            <a:r>
+              <a:rPr lang="en-US" sz="1200" i="1" dirty="0">
+                <a:solidFill>
+                  <a:srgbClr val="1C2833"/>
+                </a:solidFill>
+                <a:latin typeface="Arial" pitchFamily="34" charset="0"/>
+                <a:ea typeface="Arial" pitchFamily="34" charset="-122"/>
+                <a:cs typeface="Arial" pitchFamily="34" charset="-120"/>
+              </a:rPr>
+              <a:t>Vedic Mathematics</a:t>
+            </a:r>
+            <a:pPr algn="l" indent="0" marL="0">
+              <a:lnSpc>
+                <a:spcPts val="1620"/>
+              </a:lnSpc>
+              <a:spcAft>
+                <a:spcPts val="300"/>
+              </a:spcAft>
+              <a:buNone/>
+            </a:pPr>
+            <a:r>
+              <a:rPr lang="en-US" sz="1200" dirty="0">
+                <a:solidFill>
+                  <a:srgbClr val="1C2833"/>
+                </a:solidFill>
+                <a:latin typeface="Arial" pitchFamily="34" charset="0"/>
+                <a:ea typeface="Arial" pitchFamily="34" charset="-122"/>
+                <a:cs typeface="Arial" pitchFamily="34" charset="-120"/>
+              </a:rPr>
+              <a:t> (1965), sūtra Nikhilam (#2) — primary source.</a:t>
+            </a:r>
+            <a:endParaRPr lang="en-US" sz="1200" dirty="0"/>
+          </a:p>
+          <a:p>
+            <a:pPr algn="l" marL="342900" indent="-342900">
+              <a:lnSpc>
+                <a:spcPts val="1620"/>
+              </a:lnSpc>
+              <a:spcAft>
+                <a:spcPts val="300"/>
+              </a:spcAft>
+              <a:buSzPct val="100000"/>
+              <a:buChar char="•"/>
+            </a:pPr>
+            <a:r>
+              <a:rPr lang="en-US" sz="1200" i="1" dirty="0">
+                <a:solidFill>
+                  <a:srgbClr val="1C2833"/>
+                </a:solidFill>
+                <a:latin typeface="Arial" pitchFamily="34" charset="0"/>
+                <a:ea typeface="Arial" pitchFamily="34" charset="-122"/>
+                <a:cs typeface="Arial" pitchFamily="34" charset="-120"/>
+              </a:rPr>
               <a:t>Microsoft Word - sutras1.pdf</a:t>
             </a:r>
             <a:pPr algn="l" indent="0" marL="0">
               <a:lnSpc>
-                <a:spcPts val="1680"/>
-              </a:lnSpc>
-              <a:spcBef>
-                <a:spcPts val="300"/>
-              </a:spcBef>
+                <a:spcPts val="1620"/>
+              </a:lnSpc>
               <a:spcAft>
                 <a:spcPts val="300"/>
               </a:spcAft>
@@ -3007,7 +7485,7 @@
                 <a:ea typeface="Arial" pitchFamily="34" charset="-122"/>
                 <a:cs typeface="Arial" pitchFamily="34" charset="-120"/>
               </a:rPr>
-              <a:t>) visible</a:t>
+              <a:t> — wall reference for the full 16 sūtra list.</a:t>
             </a:r>
             <a:endParaRPr lang="en-US" sz="1200" dirty="0"/>
           </a:p>
@@ -3165,7 +7643,7 @@
                 <a:ea typeface="Georgia" pitchFamily="34" charset="-122"/>
                 <a:cs typeface="Georgia" pitchFamily="34" charset="-120"/>
               </a:rPr>
-              <a:t>Lesson flow</a:t>
+              <a:t>Materials</a:t>
             </a:r>
             <a:endParaRPr lang="en-US" sz="1800" dirty="0"/>
           </a:p>
@@ -3174,6 +7652,164 @@
       <p:sp>
         <p:nvSpPr>
           <p:cNvPr id="4" name="Text 2"/>
+          <p:cNvSpPr/>
+          <p:nvPr/>
+        </p:nvSpPr>
+        <p:spPr>
+          <a:xfrm>
+            <a:off x="634901" y="883593"/>
+            <a:ext cx="8102798" cy="1032272"/>
+          </a:xfrm>
+          <a:prstGeom prst="rect">
+            <a:avLst/>
+          </a:prstGeom>
+          <a:noFill/>
+          <a:ln/>
+        </p:spPr>
+        <p:txBody>
+          <a:bodyPr wrap="square" lIns="0" tIns="0" rIns="0" bIns="0" rtlCol="0" anchor="t"/>
+          <a:lstStyle/>
+          <a:p>
+            <a:pPr algn="l" marL="342900" indent="-342900">
+              <a:lnSpc>
+                <a:spcPts val="1620"/>
+              </a:lnSpc>
+              <a:spcAft>
+                <a:spcPts val="300"/>
+              </a:spcAft>
+              <a:buSzPct val="100000"/>
+              <a:buChar char="•"/>
+            </a:pPr>
+            <a:r>
+              <a:rPr lang="en-US" sz="1200" dirty="0">
+                <a:solidFill>
+                  <a:srgbClr val="1C2833"/>
+                </a:solidFill>
+                <a:latin typeface="Arial" pitchFamily="34" charset="0"/>
+                <a:ea typeface="Arial" pitchFamily="34" charset="-122"/>
+                <a:cs typeface="Arial" pitchFamily="34" charset="-120"/>
+              </a:rPr>
+              <a:t>Whiteboard</a:t>
+            </a:r>
+            <a:endParaRPr lang="en-US" sz="1200" dirty="0"/>
+          </a:p>
+          <a:p>
+            <a:pPr algn="l" marL="342900" indent="-342900">
+              <a:lnSpc>
+                <a:spcPts val="1620"/>
+              </a:lnSpc>
+              <a:spcAft>
+                <a:spcPts val="300"/>
+              </a:spcAft>
+              <a:buSzPct val="100000"/>
+              <a:buChar char="•"/>
+            </a:pPr>
+            <a:r>
+              <a:rPr lang="en-US" sz="1200" dirty="0">
+                <a:solidFill>
+                  <a:srgbClr val="1C2833"/>
+                </a:solidFill>
+                <a:latin typeface="Arial" pitchFamily="34" charset="0"/>
+                <a:ea typeface="Arial" pitchFamily="34" charset="-122"/>
+                <a:cs typeface="Arial" pitchFamily="34" charset="-120"/>
+              </a:rPr>
+              <a:t>Worksheet: "explain to a friend" prompt + space</a:t>
+            </a:r>
+            <a:endParaRPr lang="en-US" sz="1200" dirty="0"/>
+          </a:p>
+          <a:p>
+            <a:pPr algn="l" marL="342900" indent="-342900">
+              <a:lnSpc>
+                <a:spcPts val="1620"/>
+              </a:lnSpc>
+              <a:spcAft>
+                <a:spcPts val="300"/>
+              </a:spcAft>
+              <a:buSzPct val="100000"/>
+              <a:buChar char="•"/>
+            </a:pPr>
+            <a:r>
+              <a:rPr lang="en-US" sz="1200" dirty="0">
+                <a:solidFill>
+                  <a:srgbClr val="1C2833"/>
+                </a:solidFill>
+                <a:latin typeface="Arial" pitchFamily="34" charset="0"/>
+                <a:ea typeface="Arial" pitchFamily="34" charset="-122"/>
+                <a:cs typeface="Arial" pitchFamily="34" charset="-120"/>
+              </a:rPr>
+              <a:t>Coloured pencils for the bar model</a:t>
+            </a:r>
+            <a:endParaRPr lang="en-US" sz="1200" dirty="0"/>
+          </a:p>
+          <a:p>
+            <a:pPr algn="l" marL="342900" indent="-342900">
+              <a:lnSpc>
+                <a:spcPts val="1620"/>
+              </a:lnSpc>
+              <a:spcAft>
+                <a:spcPts val="300"/>
+              </a:spcAft>
+              <a:buSzPct val="100000"/>
+              <a:buChar char="•"/>
+            </a:pPr>
+            <a:r>
+              <a:rPr lang="en-US" sz="1200" dirty="0">
+                <a:solidFill>
+                  <a:srgbClr val="1C2833"/>
+                </a:solidFill>
+                <a:latin typeface="Arial" pitchFamily="34" charset="0"/>
+                <a:ea typeface="Arial" pitchFamily="34" charset="-122"/>
+                <a:cs typeface="Arial" pitchFamily="34" charset="-120"/>
+              </a:rPr>
+              <a:t>The 16-sūtra list (</a:t>
+            </a:r>
+            <a:pPr algn="l" indent="0" marL="0">
+              <a:lnSpc>
+                <a:spcPts val="1620"/>
+              </a:lnSpc>
+              <a:spcAft>
+                <a:spcPts val="300"/>
+              </a:spcAft>
+              <a:buNone/>
+            </a:pPr>
+            <a:r>
+              <a:rPr lang="en-US" sz="1200" dirty="0">
+                <a:solidFill>
+                  <a:srgbClr val="1C2833"/>
+                </a:solidFill>
+                <a:latin typeface="Arial" pitchFamily="34" charset="0"/>
+                <a:ea typeface="Arial" pitchFamily="34" charset="-122"/>
+                <a:cs typeface="Arial" pitchFamily="34" charset="-120"/>
+              </a:rPr>
+              <a:t>Microsoft Word - sutras1.pdf</a:t>
+            </a:r>
+            <a:pPr algn="l" indent="0" marL="0">
+              <a:lnSpc>
+                <a:spcPts val="1620"/>
+              </a:lnSpc>
+              <a:spcAft>
+                <a:spcPts val="300"/>
+              </a:spcAft>
+              <a:buNone/>
+            </a:pPr>
+            <a:r>
+              <a:rPr lang="en-US" sz="1200" dirty="0">
+                <a:solidFill>
+                  <a:srgbClr val="1C2833"/>
+                </a:solidFill>
+                <a:latin typeface="Arial" pitchFamily="34" charset="0"/>
+                <a:ea typeface="Arial" pitchFamily="34" charset="-122"/>
+                <a:cs typeface="Arial" pitchFamily="34" charset="-120"/>
+              </a:rPr>
+              <a:t>) visible</a:t>
+            </a:r>
+            <a:endParaRPr lang="en-US" sz="1200" dirty="0"/>
+          </a:p>
+        </p:txBody>
+      </p:sp>
+      <p:sp>
+        <p:nvSpPr>
+          <p:cNvPr id="5" name="Text 3"/>
           <p:cNvSpPr/>
           <p:nvPr/>
         </p:nvSpPr>
@@ -3323,7 +7959,7 @@
                 <a:ea typeface="Georgia" pitchFamily="34" charset="-122"/>
                 <a:cs typeface="Georgia" pitchFamily="34" charset="-120"/>
               </a:rPr>
-              <a:t>Warm-up (5 min)</a:t>
+              <a:t>Lesson flow</a:t>
             </a:r>
             <a:endParaRPr lang="en-US" sz="1800" dirty="0"/>
           </a:p>
@@ -3332,54 +7968,6 @@
       <p:sp>
         <p:nvSpPr>
           <p:cNvPr id="4" name="Text 2"/>
-          <p:cNvSpPr/>
-          <p:nvPr/>
-        </p:nvSpPr>
-        <p:spPr>
-          <a:xfrm>
-            <a:off x="406301" y="870942"/>
-            <a:ext cx="8498026" cy="426541"/>
-          </a:xfrm>
-          <a:prstGeom prst="rect">
-            <a:avLst/>
-          </a:prstGeom>
-          <a:noFill/>
-          <a:ln/>
-        </p:spPr>
-        <p:txBody>
-          <a:bodyPr wrap="square" lIns="0" tIns="0" rIns="0" bIns="0" rtlCol="0" anchor="t"/>
-          <a:lstStyle/>
-          <a:p>
-            <a:pPr algn="l" indent="0" marL="0">
-              <a:lnSpc>
-                <a:spcPts val="1680"/>
-              </a:lnSpc>
-              <a:spcBef>
-                <a:spcPts val="300"/>
-              </a:spcBef>
-              <a:spcAft>
-                <a:spcPts val="300"/>
-              </a:spcAft>
-              <a:buNone/>
-            </a:pPr>
-            <a:r>
-              <a:rPr lang="en-US" sz="1200" dirty="0">
-                <a:solidFill>
-                  <a:srgbClr val="1C2833"/>
-                </a:solidFill>
-                <a:latin typeface="Arial" pitchFamily="34" charset="0"/>
-                <a:ea typeface="Arial" pitchFamily="34" charset="-122"/>
-                <a:cs typeface="Arial" pitchFamily="34" charset="-120"/>
-              </a:rPr>
-              <a:t>– Sūtra chant. – Quick fire: 4 complements (mix of 2-digit and 3-digit). – Return graded formatives. Acknowledge the common errors.</a:t>
-            </a:r>
-            <a:endParaRPr lang="en-US" sz="1200" dirty="0"/>
-          </a:p>
-        </p:txBody>
-      </p:sp>
-      <p:sp>
-        <p:nvSpPr>
-          <p:cNvPr id="5" name="Text 3"/>
           <p:cNvSpPr/>
           <p:nvPr/>
         </p:nvSpPr>
@@ -3529,7 +8117,7 @@
                 <a:ea typeface="Georgia" pitchFamily="34" charset="-122"/>
                 <a:cs typeface="Georgia" pitchFamily="34" charset="-120"/>
               </a:rPr>
-              <a:t>Core (20 min) — The mathematical reason</a:t>
+              <a:t>Warm-up (5 min)</a:t>
             </a:r>
             <a:endParaRPr lang="en-US" sz="1800" dirty="0"/>
           </a:p>
@@ -3544,7 +8132,7 @@
         <p:spPr>
           <a:xfrm>
             <a:off x="634901" y="883593"/>
-            <a:ext cx="8102798" cy="281880"/>
+            <a:ext cx="8102798" cy="769441"/>
           </a:xfrm>
           <a:prstGeom prst="rect">
             <a:avLst/>
@@ -3567,111 +8155,18 @@
               <a:buChar char="•"/>
             </a:pPr>
             <a:r>
-              <a:rPr lang="en-US" sz="1200" b="1" dirty="0">
-                <a:solidFill>
-                  <a:srgbClr val="1C2833"/>
-                </a:solidFill>
-                <a:latin typeface="Arial" pitchFamily="34" charset="0"/>
-                <a:ea typeface="Arial" pitchFamily="34" charset="-122"/>
-                <a:cs typeface="Arial" pitchFamily="34" charset="-120"/>
-              </a:rPr>
-              <a:t>The core identity (write boxed on the board):</a:t>
+              <a:rPr lang="en-US" sz="1200" dirty="0">
+                <a:solidFill>
+                  <a:srgbClr val="1C2833"/>
+                </a:solidFill>
+                <a:latin typeface="Arial" pitchFamily="34" charset="0"/>
+                <a:ea typeface="Arial" pitchFamily="34" charset="-122"/>
+                <a:cs typeface="Arial" pitchFamily="34" charset="-120"/>
+              </a:rPr>
+              <a:t>Sūtra chant.</a:t>
             </a:r>
             <a:endParaRPr lang="en-US" sz="1200" dirty="0"/>
           </a:p>
-        </p:txBody>
-      </p:sp>
-      <p:sp>
-        <p:nvSpPr>
-          <p:cNvPr id="5" name="Text 3"/>
-          <p:cNvSpPr/>
-          <p:nvPr/>
-        </p:nvSpPr>
-        <p:spPr>
-          <a:xfrm>
-            <a:off x="406301" y="1254323"/>
-            <a:ext cx="8498026" cy="213271"/>
-          </a:xfrm>
-          <a:prstGeom prst="rect">
-            <a:avLst/>
-          </a:prstGeom>
-          <a:noFill/>
-          <a:ln/>
-        </p:spPr>
-        <p:txBody>
-          <a:bodyPr wrap="square" lIns="0" tIns="0" rIns="0" bIns="0" rtlCol="0" anchor="t"/>
-          <a:lstStyle/>
-          <a:p>
-            <a:pPr algn="l" indent="0" marL="0">
-              <a:lnSpc>
-                <a:spcPts val="1680"/>
-              </a:lnSpc>
-              <a:spcBef>
-                <a:spcPts val="300"/>
-              </a:spcBef>
-              <a:spcAft>
-                <a:spcPts val="300"/>
-              </a:spcAft>
-              <a:buNone/>
-            </a:pPr>
-            <a:r>
-              <a:rPr lang="en-US" sz="1200" dirty="0">
-                <a:solidFill>
-                  <a:srgbClr val="1C2833"/>
-                </a:solidFill>
-                <a:latin typeface="Arial" pitchFamily="34" charset="0"/>
-                <a:ea typeface="Arial" pitchFamily="34" charset="-122"/>
-                <a:cs typeface="Arial" pitchFamily="34" charset="-120"/>
-              </a:rPr>
-              <a:t>&gt; </a:t>
-            </a:r>
-            <a:pPr algn="l" indent="0" marL="0">
-              <a:lnSpc>
-                <a:spcPts val="1680"/>
-              </a:lnSpc>
-              <a:spcBef>
-                <a:spcPts val="300"/>
-              </a:spcBef>
-              <a:spcAft>
-                <a:spcPts val="300"/>
-              </a:spcAft>
-              <a:buNone/>
-            </a:pPr>
-            <a:r>
-              <a:rPr lang="en-US" sz="1200" b="1" dirty="0">
-                <a:solidFill>
-                  <a:srgbClr val="1C2833"/>
-                </a:solidFill>
-                <a:latin typeface="Arial" pitchFamily="34" charset="0"/>
-                <a:ea typeface="Arial" pitchFamily="34" charset="-122"/>
-                <a:cs typeface="Arial" pitchFamily="34" charset="-120"/>
-              </a:rPr>
-              <a:t>10ⁿ − A = (10ⁿ − 1) − A + 1</a:t>
-            </a:r>
-            <a:endParaRPr lang="en-US" sz="1200" dirty="0"/>
-          </a:p>
-        </p:txBody>
-      </p:sp>
-      <p:sp>
-        <p:nvSpPr>
-          <p:cNvPr id="6" name="Text 4"/>
-          <p:cNvSpPr/>
-          <p:nvPr/>
-        </p:nvSpPr>
-        <p:spPr>
-          <a:xfrm>
-            <a:off x="634901" y="1556445"/>
-            <a:ext cx="8102798" cy="712291"/>
-          </a:xfrm>
-          <a:prstGeom prst="rect">
-            <a:avLst/>
-          </a:prstGeom>
-          <a:noFill/>
-          <a:ln/>
-        </p:spPr>
-        <p:txBody>
-          <a:bodyPr wrap="square" lIns="0" tIns="0" rIns="0" bIns="0" rtlCol="0" anchor="t"/>
-          <a:lstStyle/>
           <a:p>
             <a:pPr algn="l" marL="342900" indent="-342900">
               <a:lnSpc>
@@ -3684,26 +8179,6 @@
               <a:buChar char="•"/>
             </a:pPr>
             <a:r>
-              <a:rPr lang="en-US" sz="1200" b="1" dirty="0">
-                <a:solidFill>
-                  <a:srgbClr val="1C2833"/>
-                </a:solidFill>
-                <a:latin typeface="Arial" pitchFamily="34" charset="0"/>
-                <a:ea typeface="Arial" pitchFamily="34" charset="-122"/>
-                <a:cs typeface="Arial" pitchFamily="34" charset="-120"/>
-              </a:rPr>
-              <a:t>Why this identity?</a:t>
-            </a:r>
-            <a:pPr algn="l" indent="0" marL="0">
-              <a:lnSpc>
-                <a:spcPts val="1620"/>
-              </a:lnSpc>
-              <a:spcAft>
-                <a:spcPts val="300"/>
-              </a:spcAft>
-              <a:buNone/>
-            </a:pPr>
-            <a:r>
               <a:rPr lang="en-US" sz="1200" dirty="0">
                 <a:solidFill>
                   <a:srgbClr val="1C2833"/>
@@ -3712,212 +8187,10 @@
                 <a:ea typeface="Arial" pitchFamily="34" charset="-122"/>
                 <a:cs typeface="Arial" pitchFamily="34" charset="-120"/>
               </a:rPr>
-              <a:t> </a:t>
-            </a:r>
-            <a:pPr algn="l" indent="0" marL="0">
-              <a:lnSpc>
-                <a:spcPts val="1620"/>
-              </a:lnSpc>
-              <a:spcAft>
-                <a:spcPts val="300"/>
-              </a:spcAft>
-              <a:buNone/>
-            </a:pPr>
-            <a:r>
-              <a:rPr lang="en-US" sz="1200" i="1" dirty="0">
-                <a:solidFill>
-                  <a:srgbClr val="1C2833"/>
-                </a:solidFill>
-                <a:latin typeface="Arial" pitchFamily="34" charset="0"/>
-                <a:ea typeface="Arial" pitchFamily="34" charset="-122"/>
-                <a:cs typeface="Arial" pitchFamily="34" charset="-120"/>
-              </a:rPr>
-              <a:t>"</a:t>
-            </a:r>
-            <a:pPr algn="l" indent="0" marL="0">
-              <a:lnSpc>
-                <a:spcPts val="1620"/>
-              </a:lnSpc>
-              <a:spcAft>
-                <a:spcPts val="300"/>
-              </a:spcAft>
-              <a:buNone/>
-            </a:pPr>
-            <a:r>
-              <a:rPr lang="en-US" sz="1200" i="1" dirty="0">
-                <a:solidFill>
-                  <a:srgbClr val="1C2833"/>
-                </a:solidFill>
-                <a:latin typeface="Arial" pitchFamily="34" charset="0"/>
-                <a:ea typeface="Arial" pitchFamily="34" charset="-122"/>
-                <a:cs typeface="Arial" pitchFamily="34" charset="-120"/>
-              </a:rPr>
-              <a:t>10ⁿ</a:t>
-            </a:r>
-            <a:pPr algn="l" indent="0" marL="0">
-              <a:lnSpc>
-                <a:spcPts val="1620"/>
-              </a:lnSpc>
-              <a:spcAft>
-                <a:spcPts val="300"/>
-              </a:spcAft>
-              <a:buNone/>
-            </a:pPr>
-            <a:r>
-              <a:rPr lang="en-US" sz="1200" i="1" dirty="0">
-                <a:solidFill>
-                  <a:srgbClr val="1C2833"/>
-                </a:solidFill>
-                <a:latin typeface="Arial" pitchFamily="34" charset="0"/>
-                <a:ea typeface="Arial" pitchFamily="34" charset="-122"/>
-                <a:cs typeface="Arial" pitchFamily="34" charset="-120"/>
-              </a:rPr>
-              <a:t> is </a:t>
-            </a:r>
-            <a:pPr algn="l" indent="0" marL="0">
-              <a:lnSpc>
-                <a:spcPts val="1620"/>
-              </a:lnSpc>
-              <a:spcAft>
-                <a:spcPts val="300"/>
-              </a:spcAft>
-              <a:buNone/>
-            </a:pPr>
-            <a:r>
-              <a:rPr lang="en-US" sz="1200" i="1" dirty="0">
-                <a:solidFill>
-                  <a:srgbClr val="1C2833"/>
-                </a:solidFill>
-                <a:latin typeface="Arial" pitchFamily="34" charset="0"/>
-                <a:ea typeface="Arial" pitchFamily="34" charset="-122"/>
-                <a:cs typeface="Arial" pitchFamily="34" charset="-120"/>
-              </a:rPr>
-              <a:t>1</a:t>
-            </a:r>
-            <a:pPr algn="l" indent="0" marL="0">
-              <a:lnSpc>
-                <a:spcPts val="1620"/>
-              </a:lnSpc>
-              <a:spcAft>
-                <a:spcPts val="300"/>
-              </a:spcAft>
-              <a:buNone/>
-            </a:pPr>
-            <a:r>
-              <a:rPr lang="en-US" sz="1200" i="1" dirty="0">
-                <a:solidFill>
-                  <a:srgbClr val="1C2833"/>
-                </a:solidFill>
-                <a:latin typeface="Arial" pitchFamily="34" charset="0"/>
-                <a:ea typeface="Arial" pitchFamily="34" charset="-122"/>
-                <a:cs typeface="Arial" pitchFamily="34" charset="-120"/>
-              </a:rPr>
-              <a:t> followed by </a:t>
-            </a:r>
-            <a:pPr algn="l" indent="0" marL="0">
-              <a:lnSpc>
-                <a:spcPts val="1620"/>
-              </a:lnSpc>
-              <a:spcAft>
-                <a:spcPts val="300"/>
-              </a:spcAft>
-              <a:buNone/>
-            </a:pPr>
-            <a:r>
-              <a:rPr lang="en-US" sz="1200" i="1" dirty="0">
-                <a:solidFill>
-                  <a:srgbClr val="1C2833"/>
-                </a:solidFill>
-                <a:latin typeface="Arial" pitchFamily="34" charset="0"/>
-                <a:ea typeface="Arial" pitchFamily="34" charset="-122"/>
-                <a:cs typeface="Arial" pitchFamily="34" charset="-120"/>
-              </a:rPr>
-              <a:t>n</a:t>
-            </a:r>
-            <a:pPr algn="l" indent="0" marL="0">
-              <a:lnSpc>
-                <a:spcPts val="1620"/>
-              </a:lnSpc>
-              <a:spcAft>
-                <a:spcPts val="300"/>
-              </a:spcAft>
-              <a:buNone/>
-            </a:pPr>
-            <a:r>
-              <a:rPr lang="en-US" sz="1200" i="1" dirty="0">
-                <a:solidFill>
-                  <a:srgbClr val="1C2833"/>
-                </a:solidFill>
-                <a:latin typeface="Arial" pitchFamily="34" charset="0"/>
-                <a:ea typeface="Arial" pitchFamily="34" charset="-122"/>
-                <a:cs typeface="Arial" pitchFamily="34" charset="-120"/>
-              </a:rPr>
-              <a:t> zeros — e.g. 1000 = 10³. </a:t>
-            </a:r>
-            <a:pPr algn="l" indent="0" marL="0">
-              <a:lnSpc>
-                <a:spcPts val="1620"/>
-              </a:lnSpc>
-              <a:spcAft>
-                <a:spcPts val="300"/>
-              </a:spcAft>
-              <a:buNone/>
-            </a:pPr>
-            <a:r>
-              <a:rPr lang="en-US" sz="1200" i="1" dirty="0">
-                <a:solidFill>
-                  <a:srgbClr val="1C2833"/>
-                </a:solidFill>
-                <a:latin typeface="Arial" pitchFamily="34" charset="0"/>
-                <a:ea typeface="Arial" pitchFamily="34" charset="-122"/>
-                <a:cs typeface="Arial" pitchFamily="34" charset="-120"/>
-              </a:rPr>
-              <a:t>10ⁿ − 1</a:t>
-            </a:r>
-            <a:pPr algn="l" indent="0" marL="0">
-              <a:lnSpc>
-                <a:spcPts val="1620"/>
-              </a:lnSpc>
-              <a:spcAft>
-                <a:spcPts val="300"/>
-              </a:spcAft>
-              <a:buNone/>
-            </a:pPr>
-            <a:r>
-              <a:rPr lang="en-US" sz="1200" i="1" dirty="0">
-                <a:solidFill>
-                  <a:srgbClr val="1C2833"/>
-                </a:solidFill>
-                <a:latin typeface="Arial" pitchFamily="34" charset="0"/>
-                <a:ea typeface="Arial" pitchFamily="34" charset="-122"/>
-                <a:cs typeface="Arial" pitchFamily="34" charset="-120"/>
-              </a:rPr>
-              <a:t> is the same number minus one — e.g. 999. That's just 'all nines.' So the identity says: subtracting A from a round base equals (subtracting A from all-nines) plus 1."</a:t>
+              <a:t>Quick fire: 4 complements (mix of 2-digit and 3-digit).</a:t>
             </a:r>
             <a:endParaRPr lang="en-US" sz="1200" dirty="0"/>
           </a:p>
-        </p:txBody>
-      </p:sp>
-      <p:sp>
-        <p:nvSpPr>
-          <p:cNvPr id="7" name="Text 5"/>
-          <p:cNvSpPr/>
-          <p:nvPr/>
-        </p:nvSpPr>
-        <p:spPr>
-          <a:xfrm>
-            <a:off x="634901" y="2370237"/>
-            <a:ext cx="8102798" cy="525661"/>
-          </a:xfrm>
-          <a:prstGeom prst="rect">
-            <a:avLst/>
-          </a:prstGeom>
-          <a:noFill/>
-          <a:ln/>
-        </p:spPr>
-        <p:txBody>
-          <a:bodyPr wrap="square" lIns="0" tIns="0" rIns="0" bIns="0" rtlCol="0" anchor="t"/>
-          <a:lstStyle/>
           <a:p>
             <a:pPr algn="l" marL="342900" indent="-342900">
               <a:lnSpc>
@@ -3930,26 +8203,6 @@
               <a:buChar char="•"/>
             </a:pPr>
             <a:r>
-              <a:rPr lang="en-US" sz="1200" b="1" dirty="0">
-                <a:solidFill>
-                  <a:srgbClr val="1C2833"/>
-                </a:solidFill>
-                <a:latin typeface="Arial" pitchFamily="34" charset="0"/>
-                <a:ea typeface="Arial" pitchFamily="34" charset="-122"/>
-                <a:cs typeface="Arial" pitchFamily="34" charset="-120"/>
-              </a:rPr>
-              <a:t>Why does that help?</a:t>
-            </a:r>
-            <a:pPr algn="l" indent="0" marL="0">
-              <a:lnSpc>
-                <a:spcPts val="1620"/>
-              </a:lnSpc>
-              <a:spcAft>
-                <a:spcPts val="300"/>
-              </a:spcAft>
-              <a:buNone/>
-            </a:pPr>
-            <a:r>
               <a:rPr lang="en-US" sz="1200" dirty="0">
                 <a:solidFill>
                   <a:srgbClr val="1C2833"/>
@@ -3958,107 +8211,7 @@
                 <a:ea typeface="Arial" pitchFamily="34" charset="-122"/>
                 <a:cs typeface="Arial" pitchFamily="34" charset="-120"/>
               </a:rPr>
-              <a:t> </a:t>
-            </a:r>
-            <a:pPr algn="l" indent="0" marL="0">
-              <a:lnSpc>
-                <a:spcPts val="1620"/>
-              </a:lnSpc>
-              <a:spcAft>
-                <a:spcPts val="300"/>
-              </a:spcAft>
-              <a:buNone/>
-            </a:pPr>
-            <a:r>
-              <a:rPr lang="en-US" sz="1200" i="1" dirty="0">
-                <a:solidFill>
-                  <a:srgbClr val="1C2833"/>
-                </a:solidFill>
-                <a:latin typeface="Arial" pitchFamily="34" charset="0"/>
-                <a:ea typeface="Arial" pitchFamily="34" charset="-122"/>
-                <a:cs typeface="Arial" pitchFamily="34" charset="-120"/>
-              </a:rPr>
-              <a:t>"Subtracting any digit from 9 is trivial — there's no borrow. We always have </a:t>
-            </a:r>
-            <a:pPr algn="l" indent="0" marL="0">
-              <a:lnSpc>
-                <a:spcPts val="1620"/>
-              </a:lnSpc>
-              <a:spcAft>
-                <a:spcPts val="300"/>
-              </a:spcAft>
-              <a:buNone/>
-            </a:pPr>
-            <a:r>
-              <a:rPr lang="en-US" sz="1200" i="1" dirty="0">
-                <a:solidFill>
-                  <a:srgbClr val="1C2833"/>
-                </a:solidFill>
-                <a:latin typeface="Arial" pitchFamily="34" charset="0"/>
-                <a:ea typeface="Arial" pitchFamily="34" charset="-122"/>
-                <a:cs typeface="Arial" pitchFamily="34" charset="-120"/>
-              </a:rPr>
-              <a:t>9 ≥ digit</a:t>
-            </a:r>
-            <a:pPr algn="l" indent="0" marL="0">
-              <a:lnSpc>
-                <a:spcPts val="1620"/>
-              </a:lnSpc>
-              <a:spcAft>
-                <a:spcPts val="300"/>
-              </a:spcAft>
-              <a:buNone/>
-            </a:pPr>
-            <a:r>
-              <a:rPr lang="en-US" sz="1200" i="1" dirty="0">
-                <a:solidFill>
-                  <a:srgbClr val="1C2833"/>
-                </a:solidFill>
-                <a:latin typeface="Arial" pitchFamily="34" charset="0"/>
-                <a:ea typeface="Arial" pitchFamily="34" charset="-122"/>
-                <a:cs typeface="Arial" pitchFamily="34" charset="-120"/>
-              </a:rPr>
-              <a:t>. So </a:t>
-            </a:r>
-            <a:pPr algn="l" indent="0" marL="0">
-              <a:lnSpc>
-                <a:spcPts val="1620"/>
-              </a:lnSpc>
-              <a:spcAft>
-                <a:spcPts val="300"/>
-              </a:spcAft>
-              <a:buNone/>
-            </a:pPr>
-            <a:r>
-              <a:rPr lang="en-US" sz="1200" i="1" dirty="0">
-                <a:solidFill>
-                  <a:srgbClr val="1C2833"/>
-                </a:solidFill>
-                <a:latin typeface="Arial" pitchFamily="34" charset="0"/>
-                <a:ea typeface="Arial" pitchFamily="34" charset="-122"/>
-                <a:cs typeface="Arial" pitchFamily="34" charset="-120"/>
-              </a:rPr>
-              <a:t>(10ⁿ − 1) − A</a:t>
-            </a:r>
-            <a:pPr algn="l" indent="0" marL="0">
-              <a:lnSpc>
-                <a:spcPts val="1620"/>
-              </a:lnSpc>
-              <a:spcAft>
-                <a:spcPts val="300"/>
-              </a:spcAft>
-              <a:buNone/>
-            </a:pPr>
-            <a:r>
-              <a:rPr lang="en-US" sz="1200" i="1" dirty="0">
-                <a:solidFill>
-                  <a:srgbClr val="1C2833"/>
-                </a:solidFill>
-                <a:latin typeface="Arial" pitchFamily="34" charset="0"/>
-                <a:ea typeface="Arial" pitchFamily="34" charset="-122"/>
-                <a:cs typeface="Arial" pitchFamily="34" charset="-120"/>
-              </a:rPr>
-              <a:t> is a clean digit-by-digit subtraction with no borrow. Then we add 1 at the end."</a:t>
+              <a:t>Return graded formatives. Acknowledge the common errors.</a:t>
             </a:r>
             <a:endParaRPr lang="en-US" sz="1200" dirty="0"/>
           </a:p>
@@ -4066,1478 +8219,13 @@
       </p:sp>
       <p:sp>
         <p:nvSpPr>
-          <p:cNvPr id="8" name="Text 6"/>
-          <p:cNvSpPr/>
-          <p:nvPr/>
-        </p:nvSpPr>
-        <p:spPr>
-          <a:xfrm>
-            <a:off x="634901" y="2997398"/>
-            <a:ext cx="8102798" cy="487561"/>
-          </a:xfrm>
-          <a:prstGeom prst="rect">
-            <a:avLst/>
-          </a:prstGeom>
-          <a:noFill/>
-          <a:ln/>
-        </p:spPr>
-        <p:txBody>
-          <a:bodyPr wrap="square" lIns="0" tIns="0" rIns="0" bIns="0" rtlCol="0" anchor="t"/>
-          <a:lstStyle/>
-          <a:p>
-            <a:pPr algn="l" marL="342900" indent="-342900">
-              <a:lnSpc>
-                <a:spcPts val="1620"/>
-              </a:lnSpc>
-              <a:spcAft>
-                <a:spcPts val="300"/>
-              </a:spcAft>
-              <a:buSzPct val="100000"/>
-              <a:buChar char="•"/>
-            </a:pPr>
-            <a:r>
-              <a:rPr lang="en-US" sz="1200" b="1" dirty="0">
-                <a:solidFill>
-                  <a:srgbClr val="1C2833"/>
-                </a:solidFill>
-                <a:latin typeface="Arial" pitchFamily="34" charset="0"/>
-                <a:ea typeface="Arial" pitchFamily="34" charset="-122"/>
-                <a:cs typeface="Arial" pitchFamily="34" charset="-120"/>
-              </a:rPr>
-              <a:t>Where does the "+1" go?</a:t>
-            </a:r>
-            <a:pPr algn="l" indent="0" marL="0">
-              <a:lnSpc>
-                <a:spcPts val="1620"/>
-              </a:lnSpc>
-              <a:spcAft>
-                <a:spcPts val="300"/>
-              </a:spcAft>
-              <a:buNone/>
-            </a:pPr>
-            <a:r>
-              <a:rPr lang="en-US" sz="1200" dirty="0">
-                <a:solidFill>
-                  <a:srgbClr val="1C2833"/>
-                </a:solidFill>
-                <a:latin typeface="Arial" pitchFamily="34" charset="0"/>
-                <a:ea typeface="Arial" pitchFamily="34" charset="-122"/>
-                <a:cs typeface="Arial" pitchFamily="34" charset="-120"/>
-              </a:rPr>
-              <a:t> </a:t>
-            </a:r>
-            <a:pPr algn="l" indent="0" marL="0">
-              <a:lnSpc>
-                <a:spcPts val="1620"/>
-              </a:lnSpc>
-              <a:spcAft>
-                <a:spcPts val="300"/>
-              </a:spcAft>
-              <a:buNone/>
-            </a:pPr>
-            <a:r>
-              <a:rPr lang="en-US" sz="1200" i="1" dirty="0">
-                <a:solidFill>
-                  <a:srgbClr val="1C2833"/>
-                </a:solidFill>
-                <a:latin typeface="Arial" pitchFamily="34" charset="0"/>
-                <a:ea typeface="Arial" pitchFamily="34" charset="-122"/>
-                <a:cs typeface="Arial" pitchFamily="34" charset="-120"/>
-              </a:rPr>
-              <a:t>"Into the last digit. So instead of doing 'from 9' on the last digit and then '+1,' we just do 'from 10' on the last digit. Same thing. That's why the sūtra says 'all from nine and </a:t>
-            </a:r>
-            <a:pPr algn="l" indent="0" marL="0">
-              <a:lnSpc>
-                <a:spcPts val="1620"/>
-              </a:lnSpc>
-              <a:spcAft>
-                <a:spcPts val="300"/>
-              </a:spcAft>
-              <a:buNone/>
-            </a:pPr>
-            <a:r>
-              <a:rPr lang="en-US" sz="1200" b="1" i="1" dirty="0">
-                <a:solidFill>
-                  <a:srgbClr val="1C2833"/>
-                </a:solidFill>
-                <a:latin typeface="Arial" pitchFamily="34" charset="0"/>
-                <a:ea typeface="Arial" pitchFamily="34" charset="-122"/>
-                <a:cs typeface="Arial" pitchFamily="34" charset="-120"/>
-              </a:rPr>
-              <a:t>the last from ten</a:t>
-            </a:r>
-            <a:pPr algn="l" indent="0" marL="0">
-              <a:lnSpc>
-                <a:spcPts val="1620"/>
-              </a:lnSpc>
-              <a:spcAft>
-                <a:spcPts val="300"/>
-              </a:spcAft>
-              <a:buNone/>
-            </a:pPr>
-            <a:r>
-              <a:rPr lang="en-US" sz="1200" i="1" dirty="0">
-                <a:solidFill>
-                  <a:srgbClr val="1C2833"/>
-                </a:solidFill>
-                <a:latin typeface="Arial" pitchFamily="34" charset="0"/>
-                <a:ea typeface="Arial" pitchFamily="34" charset="-122"/>
-                <a:cs typeface="Arial" pitchFamily="34" charset="-120"/>
-              </a:rPr>
-              <a:t>.'"</a:t>
-            </a:r>
-            <a:endParaRPr lang="en-US" sz="1200" dirty="0"/>
-          </a:p>
-        </p:txBody>
-      </p:sp>
-      <p:sp>
-        <p:nvSpPr>
-          <p:cNvPr id="9" name="Text 7"/>
-          <p:cNvSpPr/>
-          <p:nvPr/>
-        </p:nvSpPr>
-        <p:spPr>
-          <a:xfrm>
-            <a:off x="634901" y="3586460"/>
-            <a:ext cx="8102798" cy="281880"/>
-          </a:xfrm>
-          <a:prstGeom prst="rect">
-            <a:avLst/>
-          </a:prstGeom>
-          <a:noFill/>
-          <a:ln/>
-        </p:spPr>
-        <p:txBody>
-          <a:bodyPr wrap="square" lIns="0" tIns="0" rIns="0" bIns="0" rtlCol="0" anchor="t"/>
-          <a:lstStyle/>
-          <a:p>
-            <a:pPr algn="l" marL="342900" indent="-342900">
-              <a:lnSpc>
-                <a:spcPts val="1620"/>
-              </a:lnSpc>
-              <a:spcAft>
-                <a:spcPts val="300"/>
-              </a:spcAft>
-              <a:buSzPct val="100000"/>
-              <a:buChar char="•"/>
-            </a:pPr>
-            <a:r>
-              <a:rPr lang="en-US" sz="1200" b="1" dirty="0">
-                <a:solidFill>
-                  <a:srgbClr val="1C2833"/>
-                </a:solidFill>
-                <a:latin typeface="Arial" pitchFamily="34" charset="0"/>
-                <a:ea typeface="Arial" pitchFamily="34" charset="-122"/>
-                <a:cs typeface="Arial" pitchFamily="34" charset="-120"/>
-              </a:rPr>
-              <a:t>Walk through a concrete example with full algebra:</a:t>
-            </a:r>
-            <a:endParaRPr lang="en-US" sz="1200" dirty="0"/>
-          </a:p>
-        </p:txBody>
-      </p:sp>
-      <p:sp>
-        <p:nvSpPr>
-          <p:cNvPr id="10" name="Text 8"/>
-          <p:cNvSpPr/>
-          <p:nvPr/>
-        </p:nvSpPr>
-        <p:spPr>
-          <a:xfrm>
-            <a:off x="406301" y="3969841"/>
-            <a:ext cx="8331398" cy="1475929"/>
-          </a:xfrm>
-          <a:prstGeom prst="rect">
-            <a:avLst/>
-          </a:prstGeom>
-          <a:solidFill>
-            <a:srgbClr val="F4F8F9"/>
-          </a:solidFill>
-          <a:ln/>
-        </p:spPr>
-        <p:txBody>
-          <a:bodyPr wrap="square" rtlCol="0" anchor="ctr"/>
-          <a:lstStyle/>
-          <a:p>
-            <a:pPr indent="0" marL="0">
-              <a:buNone/>
-            </a:pPr>
-            <a:endParaRPr lang="en-US" dirty="0"/>
-          </a:p>
-        </p:txBody>
-      </p:sp>
-      <p:sp>
-        <p:nvSpPr>
-          <p:cNvPr id="11" name="Shape 9"/>
-          <p:cNvSpPr/>
-          <p:nvPr/>
-        </p:nvSpPr>
-        <p:spPr>
-          <a:xfrm>
-            <a:off x="430113" y="3969841"/>
-            <a:ext cx="0" cy="1475929"/>
-          </a:xfrm>
-          <a:prstGeom prst="line">
-            <a:avLst/>
-          </a:prstGeom>
-          <a:noFill/>
-          <a:ln w="47625">
-            <a:solidFill>
-              <a:srgbClr val="277884"/>
-            </a:solidFill>
-            <a:prstDash val="solid"/>
-          </a:ln>
-        </p:spPr>
-      </p:sp>
-      <p:sp>
-        <p:nvSpPr>
-          <p:cNvPr id="12" name="Text 10"/>
-          <p:cNvSpPr/>
-          <p:nvPr/>
-        </p:nvSpPr>
-        <p:spPr>
-          <a:xfrm>
-            <a:off x="631627" y="4096792"/>
-            <a:ext cx="8086939" cy="174575"/>
-          </a:xfrm>
-          <a:prstGeom prst="rect">
-            <a:avLst/>
-          </a:prstGeom>
-          <a:noFill/>
-          <a:ln/>
-        </p:spPr>
-        <p:txBody>
-          <a:bodyPr wrap="square" lIns="0" tIns="0" rIns="0" bIns="0" rtlCol="0" anchor="t"/>
-          <a:lstStyle/>
-          <a:p>
-            <a:pPr algn="l" indent="0" marL="0">
-              <a:lnSpc>
-                <a:spcPts val="1375"/>
-              </a:lnSpc>
-              <a:buNone/>
-            </a:pPr>
-            <a:r>
-              <a:rPr lang="en-US" sz="1100" dirty="0">
-                <a:solidFill>
-                  <a:srgbClr val="1C2833"/>
-                </a:solidFill>
-                <a:latin typeface="Courier New" pitchFamily="34" charset="0"/>
-                <a:ea typeface="Courier New" pitchFamily="34" charset="-122"/>
-                <a:cs typeface="Courier New" pitchFamily="34" charset="-120"/>
-              </a:rPr>
-              <a:t>1000 − 567</a:t>
-            </a:r>
-            <a:endParaRPr lang="en-US" sz="1100" dirty="0"/>
-          </a:p>
-        </p:txBody>
-      </p:sp>
-      <p:sp>
-        <p:nvSpPr>
-          <p:cNvPr id="13" name="Text 11"/>
-          <p:cNvSpPr/>
-          <p:nvPr/>
-        </p:nvSpPr>
-        <p:spPr>
-          <a:xfrm>
-            <a:off x="631627" y="4271367"/>
-            <a:ext cx="8086939" cy="174575"/>
-          </a:xfrm>
-          <a:prstGeom prst="rect">
-            <a:avLst/>
-          </a:prstGeom>
-          <a:noFill/>
-          <a:ln/>
-        </p:spPr>
-        <p:txBody>
-          <a:bodyPr wrap="square" lIns="0" tIns="0" rIns="0" bIns="0" rtlCol="0" anchor="t"/>
-          <a:lstStyle/>
-          <a:p>
-            <a:pPr algn="l" indent="0" marL="0">
-              <a:lnSpc>
-                <a:spcPts val="1375"/>
-              </a:lnSpc>
-              <a:buNone/>
-            </a:pPr>
-            <a:r>
-              <a:rPr lang="en-US" sz="1100" dirty="0">
-                <a:solidFill>
-                  <a:srgbClr val="1C2833"/>
-                </a:solidFill>
-                <a:latin typeface="Courier New" pitchFamily="34" charset="0"/>
-                <a:ea typeface="Courier New" pitchFamily="34" charset="-122"/>
-                <a:cs typeface="Courier New" pitchFamily="34" charset="-120"/>
-              </a:rPr>
-              <a:t>= (1000 − 1) − 567 + 1     ← identity</a:t>
-            </a:r>
-            <a:endParaRPr lang="en-US" sz="1100" dirty="0"/>
-          </a:p>
-        </p:txBody>
-      </p:sp>
-      <p:sp>
-        <p:nvSpPr>
-          <p:cNvPr id="14" name="Text 12"/>
-          <p:cNvSpPr/>
-          <p:nvPr/>
-        </p:nvSpPr>
-        <p:spPr>
-          <a:xfrm>
-            <a:off x="631627" y="4445943"/>
-            <a:ext cx="8086939" cy="174575"/>
-          </a:xfrm>
-          <a:prstGeom prst="rect">
-            <a:avLst/>
-          </a:prstGeom>
-          <a:noFill/>
-          <a:ln/>
-        </p:spPr>
-        <p:txBody>
-          <a:bodyPr wrap="square" lIns="0" tIns="0" rIns="0" bIns="0" rtlCol="0" anchor="t"/>
-          <a:lstStyle/>
-          <a:p>
-            <a:pPr algn="l" indent="0" marL="0">
-              <a:lnSpc>
-                <a:spcPts val="1375"/>
-              </a:lnSpc>
-              <a:buNone/>
-            </a:pPr>
-            <a:r>
-              <a:rPr lang="en-US" sz="1100" dirty="0">
-                <a:solidFill>
-                  <a:srgbClr val="1C2833"/>
-                </a:solidFill>
-                <a:latin typeface="Courier New" pitchFamily="34" charset="0"/>
-                <a:ea typeface="Courier New" pitchFamily="34" charset="-122"/>
-                <a:cs typeface="Courier New" pitchFamily="34" charset="-120"/>
-              </a:rPr>
-              <a:t>= 999 − 567 + 1</a:t>
-            </a:r>
-            <a:endParaRPr lang="en-US" sz="1100" dirty="0"/>
-          </a:p>
-        </p:txBody>
-      </p:sp>
-      <p:sp>
-        <p:nvSpPr>
-          <p:cNvPr id="15" name="Text 13"/>
-          <p:cNvSpPr/>
-          <p:nvPr/>
-        </p:nvSpPr>
-        <p:spPr>
-          <a:xfrm>
-            <a:off x="631627" y="4620518"/>
-            <a:ext cx="8086939" cy="174575"/>
-          </a:xfrm>
-          <a:prstGeom prst="rect">
-            <a:avLst/>
-          </a:prstGeom>
-          <a:noFill/>
-          <a:ln/>
-        </p:spPr>
-        <p:txBody>
-          <a:bodyPr wrap="square" lIns="0" tIns="0" rIns="0" bIns="0" rtlCol="0" anchor="t"/>
-          <a:lstStyle/>
-          <a:p>
-            <a:pPr algn="l" indent="0" marL="0">
-              <a:lnSpc>
-                <a:spcPts val="1375"/>
-              </a:lnSpc>
-              <a:buNone/>
-            </a:pPr>
-            <a:r>
-              <a:rPr lang="en-US" sz="1100" dirty="0">
-                <a:solidFill>
-                  <a:srgbClr val="1C2833"/>
-                </a:solidFill>
-                <a:latin typeface="Courier New" pitchFamily="34" charset="0"/>
-                <a:ea typeface="Courier New" pitchFamily="34" charset="-122"/>
-                <a:cs typeface="Courier New" pitchFamily="34" charset="-120"/>
-              </a:rPr>
-              <a:t>= (9-5)(9-6)(9-7) + 1      ← digit-wise from 9 — no borrow!</a:t>
-            </a:r>
-            <a:endParaRPr lang="en-US" sz="1100" dirty="0"/>
-          </a:p>
-        </p:txBody>
-      </p:sp>
-      <p:sp>
-        <p:nvSpPr>
-          <p:cNvPr id="16" name="Text 14"/>
-          <p:cNvSpPr/>
-          <p:nvPr/>
-        </p:nvSpPr>
-        <p:spPr>
-          <a:xfrm>
-            <a:off x="631627" y="4795093"/>
-            <a:ext cx="8086939" cy="174575"/>
-          </a:xfrm>
-          <a:prstGeom prst="rect">
-            <a:avLst/>
-          </a:prstGeom>
-          <a:noFill/>
-          <a:ln/>
-        </p:spPr>
-        <p:txBody>
-          <a:bodyPr wrap="square" lIns="0" tIns="0" rIns="0" bIns="0" rtlCol="0" anchor="t"/>
-          <a:lstStyle/>
-          <a:p>
-            <a:pPr algn="l" indent="0" marL="0">
-              <a:lnSpc>
-                <a:spcPts val="1375"/>
-              </a:lnSpc>
-              <a:buNone/>
-            </a:pPr>
-            <a:r>
-              <a:rPr lang="en-US" sz="1100" dirty="0">
-                <a:solidFill>
-                  <a:srgbClr val="1C2833"/>
-                </a:solidFill>
-                <a:latin typeface="Courier New" pitchFamily="34" charset="0"/>
-                <a:ea typeface="Courier New" pitchFamily="34" charset="-122"/>
-                <a:cs typeface="Courier New" pitchFamily="34" charset="-120"/>
-              </a:rPr>
-              <a:t>= 4 3 2 + 1</a:t>
-            </a:r>
-            <a:endParaRPr lang="en-US" sz="1100" dirty="0"/>
-          </a:p>
-        </p:txBody>
-      </p:sp>
-      <p:sp>
-        <p:nvSpPr>
-          <p:cNvPr id="17" name="Text 15"/>
-          <p:cNvSpPr/>
-          <p:nvPr/>
-        </p:nvSpPr>
-        <p:spPr>
-          <a:xfrm>
-            <a:off x="631627" y="4969669"/>
-            <a:ext cx="8086939" cy="174575"/>
-          </a:xfrm>
-          <a:prstGeom prst="rect">
-            <a:avLst/>
-          </a:prstGeom>
-          <a:noFill/>
-          <a:ln/>
-        </p:spPr>
-        <p:txBody>
-          <a:bodyPr wrap="square" lIns="0" tIns="0" rIns="0" bIns="0" rtlCol="0" anchor="t"/>
-          <a:lstStyle/>
-          <a:p>
-            <a:pPr algn="l" indent="0" marL="0">
-              <a:lnSpc>
-                <a:spcPts val="1375"/>
-              </a:lnSpc>
-              <a:buNone/>
-            </a:pPr>
-            <a:r>
-              <a:rPr lang="en-US" sz="1100" dirty="0">
-                <a:solidFill>
-                  <a:srgbClr val="1C2833"/>
-                </a:solidFill>
-                <a:latin typeface="Courier New" pitchFamily="34" charset="0"/>
-                <a:ea typeface="Courier New" pitchFamily="34" charset="-122"/>
-                <a:cs typeface="Courier New" pitchFamily="34" charset="-120"/>
-              </a:rPr>
-              <a:t>= 432 + 1</a:t>
-            </a:r>
-            <a:endParaRPr lang="en-US" sz="1100" dirty="0"/>
-          </a:p>
-        </p:txBody>
-      </p:sp>
-      <p:sp>
-        <p:nvSpPr>
-          <p:cNvPr id="18" name="Text 16"/>
-          <p:cNvSpPr/>
-          <p:nvPr/>
-        </p:nvSpPr>
-        <p:spPr>
-          <a:xfrm>
-            <a:off x="631627" y="5144244"/>
-            <a:ext cx="8086939" cy="174575"/>
-          </a:xfrm>
-          <a:prstGeom prst="rect">
-            <a:avLst/>
-          </a:prstGeom>
-          <a:noFill/>
-          <a:ln/>
-        </p:spPr>
-        <p:txBody>
-          <a:bodyPr wrap="square" lIns="0" tIns="0" rIns="0" bIns="0" rtlCol="0" anchor="t"/>
-          <a:lstStyle/>
-          <a:p>
-            <a:pPr algn="l" indent="0" marL="0">
-              <a:lnSpc>
-                <a:spcPts val="1375"/>
-              </a:lnSpc>
-              <a:buNone/>
-            </a:pPr>
-            <a:r>
-              <a:rPr lang="en-US" sz="1100" dirty="0">
-                <a:solidFill>
-                  <a:srgbClr val="1C2833"/>
-                </a:solidFill>
-                <a:latin typeface="Courier New" pitchFamily="34" charset="0"/>
-                <a:ea typeface="Courier New" pitchFamily="34" charset="-122"/>
-                <a:cs typeface="Courier New" pitchFamily="34" charset="-120"/>
-              </a:rPr>
-              <a:t>= 433.                     ✓</a:t>
-            </a:r>
-            <a:endParaRPr lang="en-US" sz="1100" dirty="0"/>
-          </a:p>
-        </p:txBody>
-      </p:sp>
-      <p:sp>
-        <p:nvSpPr>
-          <p:cNvPr id="19" name="Text 17"/>
-          <p:cNvSpPr/>
-          <p:nvPr/>
-        </p:nvSpPr>
-        <p:spPr>
-          <a:xfrm>
-            <a:off x="406301" y="5534620"/>
-            <a:ext cx="8498026" cy="213271"/>
-          </a:xfrm>
-          <a:prstGeom prst="rect">
-            <a:avLst/>
-          </a:prstGeom>
-          <a:noFill/>
-          <a:ln/>
-        </p:spPr>
-        <p:txBody>
-          <a:bodyPr wrap="square" lIns="0" tIns="0" rIns="0" bIns="0" rtlCol="0" anchor="t"/>
-          <a:lstStyle/>
-          <a:p>
-            <a:pPr algn="l" indent="0" marL="0">
-              <a:lnSpc>
-                <a:spcPts val="1680"/>
-              </a:lnSpc>
-              <a:spcBef>
-                <a:spcPts val="300"/>
-              </a:spcBef>
-              <a:spcAft>
-                <a:spcPts val="300"/>
-              </a:spcAft>
-              <a:buNone/>
-            </a:pPr>
-            <a:r>
-              <a:rPr lang="en-US" sz="1200" dirty="0">
-                <a:solidFill>
-                  <a:srgbClr val="1C2833"/>
-                </a:solidFill>
-                <a:latin typeface="Arial" pitchFamily="34" charset="0"/>
-                <a:ea typeface="Arial" pitchFamily="34" charset="-122"/>
-                <a:cs typeface="Arial" pitchFamily="34" charset="-120"/>
-              </a:rPr>
-              <a:t>Now compare with the sūtra direct version:</a:t>
-            </a:r>
-            <a:endParaRPr lang="en-US" sz="1200" dirty="0"/>
-          </a:p>
-        </p:txBody>
-      </p:sp>
-      <p:sp>
-        <p:nvSpPr>
-          <p:cNvPr id="20" name="Text 18"/>
-          <p:cNvSpPr/>
-          <p:nvPr/>
-        </p:nvSpPr>
-        <p:spPr>
-          <a:xfrm>
-            <a:off x="406301" y="5836741"/>
-            <a:ext cx="8331398" cy="952202"/>
-          </a:xfrm>
-          <a:prstGeom prst="rect">
-            <a:avLst/>
-          </a:prstGeom>
-          <a:solidFill>
-            <a:srgbClr val="F4F8F9"/>
-          </a:solidFill>
-          <a:ln/>
-        </p:spPr>
-        <p:txBody>
-          <a:bodyPr wrap="square" rtlCol="0" anchor="ctr"/>
-          <a:lstStyle/>
-          <a:p>
-            <a:pPr indent="0" marL="0">
-              <a:buNone/>
-            </a:pPr>
-            <a:endParaRPr lang="en-US" dirty="0"/>
-          </a:p>
-        </p:txBody>
-      </p:sp>
-      <p:sp>
-        <p:nvSpPr>
-          <p:cNvPr id="21" name="Shape 19"/>
-          <p:cNvSpPr/>
-          <p:nvPr/>
-        </p:nvSpPr>
-        <p:spPr>
-          <a:xfrm>
-            <a:off x="430113" y="5836741"/>
-            <a:ext cx="0" cy="952202"/>
-          </a:xfrm>
-          <a:prstGeom prst="line">
-            <a:avLst/>
-          </a:prstGeom>
-          <a:noFill/>
-          <a:ln w="47625">
-            <a:solidFill>
-              <a:srgbClr val="277884"/>
-            </a:solidFill>
-            <a:prstDash val="solid"/>
-          </a:ln>
-        </p:spPr>
-      </p:sp>
-      <p:sp>
-        <p:nvSpPr>
-          <p:cNvPr id="22" name="Text 20"/>
-          <p:cNvSpPr/>
-          <p:nvPr/>
-        </p:nvSpPr>
-        <p:spPr>
-          <a:xfrm>
-            <a:off x="631627" y="5963692"/>
-            <a:ext cx="8086939" cy="174575"/>
-          </a:xfrm>
-          <a:prstGeom prst="rect">
-            <a:avLst/>
-          </a:prstGeom>
-          <a:noFill/>
-          <a:ln/>
-        </p:spPr>
-        <p:txBody>
-          <a:bodyPr wrap="square" lIns="0" tIns="0" rIns="0" bIns="0" rtlCol="0" anchor="t"/>
-          <a:lstStyle/>
-          <a:p>
-            <a:pPr algn="l" indent="0" marL="0">
-              <a:lnSpc>
-                <a:spcPts val="1375"/>
-              </a:lnSpc>
-              <a:buNone/>
-            </a:pPr>
-            <a:r>
-              <a:rPr lang="en-US" sz="1100" dirty="0">
-                <a:solidFill>
-                  <a:srgbClr val="1C2833"/>
-                </a:solidFill>
-                <a:latin typeface="Courier New" pitchFamily="34" charset="0"/>
-                <a:ea typeface="Courier New" pitchFamily="34" charset="-122"/>
-                <a:cs typeface="Courier New" pitchFamily="34" charset="-120"/>
-              </a:rPr>
-              <a:t>1000 − 567</a:t>
-            </a:r>
-            <a:endParaRPr lang="en-US" sz="1100" dirty="0"/>
-          </a:p>
-        </p:txBody>
-      </p:sp>
-      <p:sp>
-        <p:nvSpPr>
-          <p:cNvPr id="23" name="Text 21"/>
-          <p:cNvSpPr/>
-          <p:nvPr/>
-        </p:nvSpPr>
-        <p:spPr>
-          <a:xfrm>
-            <a:off x="631627" y="6138267"/>
-            <a:ext cx="8086939" cy="174575"/>
-          </a:xfrm>
-          <a:prstGeom prst="rect">
-            <a:avLst/>
-          </a:prstGeom>
-          <a:noFill/>
-          <a:ln/>
-        </p:spPr>
-        <p:txBody>
-          <a:bodyPr wrap="square" lIns="0" tIns="0" rIns="0" bIns="0" rtlCol="0" anchor="t"/>
-          <a:lstStyle/>
-          <a:p>
-            <a:pPr algn="l" indent="0" marL="0">
-              <a:lnSpc>
-                <a:spcPts val="1375"/>
-              </a:lnSpc>
-              <a:buNone/>
-            </a:pPr>
-            <a:r>
-              <a:rPr lang="en-US" sz="1100" dirty="0">
-                <a:solidFill>
-                  <a:srgbClr val="1C2833"/>
-                </a:solidFill>
-                <a:latin typeface="Courier New" pitchFamily="34" charset="0"/>
-                <a:ea typeface="Courier New" pitchFamily="34" charset="-122"/>
-                <a:cs typeface="Courier New" pitchFamily="34" charset="-120"/>
-              </a:rPr>
-              <a:t>= (9-5)(9-6)(10-7)         ← Nikhilam, last from 10</a:t>
-            </a:r>
-            <a:endParaRPr lang="en-US" sz="1100" dirty="0"/>
-          </a:p>
-        </p:txBody>
-      </p:sp>
-      <p:sp>
-        <p:nvSpPr>
-          <p:cNvPr id="24" name="Text 22"/>
-          <p:cNvSpPr/>
-          <p:nvPr/>
-        </p:nvSpPr>
-        <p:spPr>
-          <a:xfrm>
-            <a:off x="631627" y="6312843"/>
-            <a:ext cx="8086939" cy="174575"/>
-          </a:xfrm>
-          <a:prstGeom prst="rect">
-            <a:avLst/>
-          </a:prstGeom>
-          <a:noFill/>
-          <a:ln/>
-        </p:spPr>
-        <p:txBody>
-          <a:bodyPr wrap="square" lIns="0" tIns="0" rIns="0" bIns="0" rtlCol="0" anchor="t"/>
-          <a:lstStyle/>
-          <a:p>
-            <a:pPr algn="l" indent="0" marL="0">
-              <a:lnSpc>
-                <a:spcPts val="1375"/>
-              </a:lnSpc>
-              <a:buNone/>
-            </a:pPr>
-            <a:r>
-              <a:rPr lang="en-US" sz="1100" dirty="0">
-                <a:solidFill>
-                  <a:srgbClr val="1C2833"/>
-                </a:solidFill>
-                <a:latin typeface="Courier New" pitchFamily="34" charset="0"/>
-                <a:ea typeface="Courier New" pitchFamily="34" charset="-122"/>
-                <a:cs typeface="Courier New" pitchFamily="34" charset="-120"/>
-              </a:rPr>
-              <a:t>= 4 3 3</a:t>
-            </a:r>
-            <a:endParaRPr lang="en-US" sz="1100" dirty="0"/>
-          </a:p>
-        </p:txBody>
-      </p:sp>
-      <p:sp>
-        <p:nvSpPr>
-          <p:cNvPr id="25" name="Text 23"/>
-          <p:cNvSpPr/>
-          <p:nvPr/>
-        </p:nvSpPr>
-        <p:spPr>
-          <a:xfrm>
-            <a:off x="631627" y="6487418"/>
-            <a:ext cx="8086939" cy="174575"/>
-          </a:xfrm>
-          <a:prstGeom prst="rect">
-            <a:avLst/>
-          </a:prstGeom>
-          <a:noFill/>
-          <a:ln/>
-        </p:spPr>
-        <p:txBody>
-          <a:bodyPr wrap="square" lIns="0" tIns="0" rIns="0" bIns="0" rtlCol="0" anchor="t"/>
-          <a:lstStyle/>
-          <a:p>
-            <a:pPr algn="l" indent="0" marL="0">
-              <a:lnSpc>
-                <a:spcPts val="1375"/>
-              </a:lnSpc>
-              <a:buNone/>
-            </a:pPr>
-            <a:r>
-              <a:rPr lang="en-US" sz="1100" dirty="0">
-                <a:solidFill>
-                  <a:srgbClr val="1C2833"/>
-                </a:solidFill>
-                <a:latin typeface="Courier New" pitchFamily="34" charset="0"/>
-                <a:ea typeface="Courier New" pitchFamily="34" charset="-122"/>
-                <a:cs typeface="Courier New" pitchFamily="34" charset="-120"/>
-              </a:rPr>
-              <a:t>= 433.                     ✓</a:t>
-            </a:r>
-            <a:endParaRPr lang="en-US" sz="1100" dirty="0"/>
-          </a:p>
-        </p:txBody>
-      </p:sp>
-      <p:sp>
-        <p:nvSpPr>
-          <p:cNvPr id="26" name="Text 24"/>
-          <p:cNvSpPr/>
-          <p:nvPr/>
-        </p:nvSpPr>
-        <p:spPr>
-          <a:xfrm>
-            <a:off x="406301" y="6877794"/>
-            <a:ext cx="8498026" cy="213271"/>
-          </a:xfrm>
-          <a:prstGeom prst="rect">
-            <a:avLst/>
-          </a:prstGeom>
-          <a:noFill/>
-          <a:ln/>
-        </p:spPr>
-        <p:txBody>
-          <a:bodyPr wrap="square" lIns="0" tIns="0" rIns="0" bIns="0" rtlCol="0" anchor="t"/>
-          <a:lstStyle/>
-          <a:p>
-            <a:pPr algn="l" indent="0" marL="0">
-              <a:lnSpc>
-                <a:spcPts val="1680"/>
-              </a:lnSpc>
-              <a:spcBef>
-                <a:spcPts val="300"/>
-              </a:spcBef>
-              <a:spcAft>
-                <a:spcPts val="300"/>
-              </a:spcAft>
-              <a:buNone/>
-            </a:pPr>
-            <a:r>
-              <a:rPr lang="en-US" sz="1200" i="1" dirty="0">
-                <a:solidFill>
-                  <a:srgbClr val="1C2833"/>
-                </a:solidFill>
-                <a:latin typeface="Arial" pitchFamily="34" charset="0"/>
-                <a:ea typeface="Arial" pitchFamily="34" charset="-122"/>
-                <a:cs typeface="Arial" pitchFamily="34" charset="-120"/>
-              </a:rPr>
-              <a:t>"Same answer. The sūtra is just the identity, made into a mnemonic."</a:t>
-            </a:r>
-            <a:endParaRPr lang="en-US" sz="1200" dirty="0"/>
-          </a:p>
-        </p:txBody>
-      </p:sp>
-      <p:sp>
-        <p:nvSpPr>
-          <p:cNvPr id="27" name="Text 25"/>
-          <p:cNvSpPr/>
-          <p:nvPr/>
-        </p:nvSpPr>
-        <p:spPr>
-          <a:xfrm>
-            <a:off x="634901" y="7179915"/>
-            <a:ext cx="8102798" cy="281880"/>
-          </a:xfrm>
-          <a:prstGeom prst="rect">
-            <a:avLst/>
-          </a:prstGeom>
-          <a:noFill/>
-          <a:ln/>
-        </p:spPr>
-        <p:txBody>
-          <a:bodyPr wrap="square" lIns="0" tIns="0" rIns="0" bIns="0" rtlCol="0" anchor="t"/>
-          <a:lstStyle/>
-          <a:p>
-            <a:pPr algn="l" marL="342900" indent="-342900">
-              <a:lnSpc>
-                <a:spcPts val="1620"/>
-              </a:lnSpc>
-              <a:spcAft>
-                <a:spcPts val="300"/>
-              </a:spcAft>
-              <a:buSzPct val="100000"/>
-              <a:buChar char="•"/>
-            </a:pPr>
-            <a:r>
-              <a:rPr lang="en-US" sz="1200" b="1" dirty="0">
-                <a:solidFill>
-                  <a:srgbClr val="1C2833"/>
-                </a:solidFill>
-                <a:latin typeface="Arial" pitchFamily="34" charset="0"/>
-                <a:ea typeface="Arial" pitchFamily="34" charset="-122"/>
-                <a:cs typeface="Arial" pitchFamily="34" charset="-120"/>
-              </a:rPr>
-              <a:t>Bar model.</a:t>
-            </a:r>
-            <a:endParaRPr lang="en-US" sz="1200" dirty="0"/>
-          </a:p>
-        </p:txBody>
-      </p:sp>
-      <p:sp>
-        <p:nvSpPr>
-          <p:cNvPr id="28" name="Text 26"/>
-          <p:cNvSpPr/>
-          <p:nvPr/>
-        </p:nvSpPr>
-        <p:spPr>
-          <a:xfrm>
-            <a:off x="406301" y="7550646"/>
-            <a:ext cx="8498026" cy="436066"/>
-          </a:xfrm>
-          <a:prstGeom prst="rect">
-            <a:avLst/>
-          </a:prstGeom>
-          <a:noFill/>
-          <a:ln/>
-        </p:spPr>
-        <p:txBody>
-          <a:bodyPr wrap="square" lIns="0" tIns="0" rIns="0" bIns="0" rtlCol="0" anchor="t"/>
-          <a:lstStyle/>
-          <a:p>
-            <a:pPr algn="l" indent="0" marL="0">
-              <a:lnSpc>
-                <a:spcPts val="1680"/>
-              </a:lnSpc>
-              <a:spcBef>
-                <a:spcPts val="300"/>
-              </a:spcBef>
-              <a:spcAft>
-                <a:spcPts val="300"/>
-              </a:spcAft>
-              <a:buNone/>
-            </a:pPr>
-            <a:r>
-              <a:rPr lang="en-US" sz="1200" dirty="0">
-                <a:solidFill>
-                  <a:srgbClr val="1C2833"/>
-                </a:solidFill>
-                <a:latin typeface="Arial" pitchFamily="34" charset="0"/>
-                <a:ea typeface="Arial" pitchFamily="34" charset="-122"/>
-                <a:cs typeface="Arial" pitchFamily="34" charset="-120"/>
-              </a:rPr>
-              <a:t>Draw a long horizontal bar labelled </a:t>
-            </a:r>
-            <a:pPr algn="l" indent="0" marL="0">
-              <a:lnSpc>
-                <a:spcPts val="1680"/>
-              </a:lnSpc>
-              <a:spcBef>
-                <a:spcPts val="300"/>
-              </a:spcBef>
-              <a:spcAft>
-                <a:spcPts val="300"/>
-              </a:spcAft>
-              <a:buNone/>
-            </a:pPr>
-            <a:r>
-              <a:rPr lang="en-US" sz="1200" dirty="0">
-                <a:solidFill>
-                  <a:srgbClr val="1C2833"/>
-                </a:solidFill>
-                <a:latin typeface="Arial" pitchFamily="34" charset="0"/>
-                <a:ea typeface="Arial" pitchFamily="34" charset="-122"/>
-                <a:cs typeface="Arial" pitchFamily="34" charset="-120"/>
-              </a:rPr>
-              <a:t>1000</a:t>
-            </a:r>
-            <a:pPr algn="l" indent="0" marL="0">
-              <a:lnSpc>
-                <a:spcPts val="1680"/>
-              </a:lnSpc>
-              <a:spcBef>
-                <a:spcPts val="300"/>
-              </a:spcBef>
-              <a:spcAft>
-                <a:spcPts val="300"/>
-              </a:spcAft>
-              <a:buNone/>
-            </a:pPr>
-            <a:r>
-              <a:rPr lang="en-US" sz="1200" dirty="0">
-                <a:solidFill>
-                  <a:srgbClr val="1C2833"/>
-                </a:solidFill>
-                <a:latin typeface="Arial" pitchFamily="34" charset="0"/>
-                <a:ea typeface="Arial" pitchFamily="34" charset="-122"/>
-                <a:cs typeface="Arial" pitchFamily="34" charset="-120"/>
-              </a:rPr>
-              <a:t>. Inside, mark off a left segment labelled </a:t>
-            </a:r>
-            <a:pPr algn="l" indent="0" marL="0">
-              <a:lnSpc>
-                <a:spcPts val="1680"/>
-              </a:lnSpc>
-              <a:spcBef>
-                <a:spcPts val="300"/>
-              </a:spcBef>
-              <a:spcAft>
-                <a:spcPts val="300"/>
-              </a:spcAft>
-              <a:buNone/>
-            </a:pPr>
-            <a:r>
-              <a:rPr lang="en-US" sz="1200" dirty="0">
-                <a:solidFill>
-                  <a:srgbClr val="1C2833"/>
-                </a:solidFill>
-                <a:latin typeface="Arial" pitchFamily="34" charset="0"/>
-                <a:ea typeface="Arial" pitchFamily="34" charset="-122"/>
-                <a:cs typeface="Arial" pitchFamily="34" charset="-120"/>
-              </a:rPr>
-              <a:t>567</a:t>
-            </a:r>
-            <a:pPr algn="l" indent="0" marL="0">
-              <a:lnSpc>
-                <a:spcPts val="1680"/>
-              </a:lnSpc>
-              <a:spcBef>
-                <a:spcPts val="300"/>
-              </a:spcBef>
-              <a:spcAft>
-                <a:spcPts val="300"/>
-              </a:spcAft>
-              <a:buNone/>
-            </a:pPr>
-            <a:r>
-              <a:rPr lang="en-US" sz="1200" dirty="0">
-                <a:solidFill>
-                  <a:srgbClr val="1C2833"/>
-                </a:solidFill>
-                <a:latin typeface="Arial" pitchFamily="34" charset="0"/>
-                <a:ea typeface="Arial" pitchFamily="34" charset="-122"/>
-                <a:cs typeface="Arial" pitchFamily="34" charset="-120"/>
-              </a:rPr>
-              <a:t> and a right segment labelled </a:t>
-            </a:r>
-            <a:pPr algn="l" indent="0" marL="0">
-              <a:lnSpc>
-                <a:spcPts val="1680"/>
-              </a:lnSpc>
-              <a:spcBef>
-                <a:spcPts val="300"/>
-              </a:spcBef>
-              <a:spcAft>
-                <a:spcPts val="300"/>
-              </a:spcAft>
-              <a:buNone/>
-            </a:pPr>
-            <a:r>
-              <a:rPr lang="en-US" sz="1200" dirty="0">
-                <a:solidFill>
-                  <a:srgbClr val="1C2833"/>
-                </a:solidFill>
-                <a:latin typeface="Arial" pitchFamily="34" charset="0"/>
-                <a:ea typeface="Arial" pitchFamily="34" charset="-122"/>
-                <a:cs typeface="Arial" pitchFamily="34" charset="-120"/>
-              </a:rPr>
-              <a:t>?</a:t>
-            </a:r>
-            <a:pPr algn="l" indent="0" marL="0">
-              <a:lnSpc>
-                <a:spcPts val="1680"/>
-              </a:lnSpc>
-              <a:spcBef>
-                <a:spcPts val="300"/>
-              </a:spcBef>
-              <a:spcAft>
-                <a:spcPts val="300"/>
-              </a:spcAft>
-              <a:buNone/>
-            </a:pPr>
-            <a:r>
-              <a:rPr lang="en-US" sz="1200" dirty="0">
-                <a:solidFill>
-                  <a:srgbClr val="1C2833"/>
-                </a:solidFill>
-                <a:latin typeface="Arial" pitchFamily="34" charset="0"/>
-                <a:ea typeface="Arial" pitchFamily="34" charset="-122"/>
-                <a:cs typeface="Arial" pitchFamily="34" charset="-120"/>
-              </a:rPr>
-              <a:t> (the unknown). </a:t>
-            </a:r>
-            <a:pPr algn="l" indent="0" marL="0">
-              <a:lnSpc>
-                <a:spcPts val="1680"/>
-              </a:lnSpc>
-              <a:spcBef>
-                <a:spcPts val="300"/>
-              </a:spcBef>
-              <a:spcAft>
-                <a:spcPts val="300"/>
-              </a:spcAft>
-              <a:buNone/>
-            </a:pPr>
-            <a:r>
-              <a:rPr lang="en-US" sz="1200" i="1" dirty="0">
-                <a:solidFill>
-                  <a:srgbClr val="1C2833"/>
-                </a:solidFill>
-                <a:latin typeface="Arial" pitchFamily="34" charset="0"/>
-                <a:ea typeface="Arial" pitchFamily="34" charset="-122"/>
-                <a:cs typeface="Arial" pitchFamily="34" charset="-120"/>
-              </a:rPr>
-              <a:t>"What we want is the right segment."</a:t>
-            </a:r>
-            <a:endParaRPr lang="en-US" sz="1200" dirty="0"/>
-          </a:p>
-        </p:txBody>
-      </p:sp>
-      <p:sp>
-        <p:nvSpPr>
-          <p:cNvPr id="29" name="Text 27"/>
-          <p:cNvSpPr/>
-          <p:nvPr/>
-        </p:nvSpPr>
-        <p:spPr>
-          <a:xfrm>
-            <a:off x="406301" y="8062913"/>
-            <a:ext cx="8498026" cy="222796"/>
-          </a:xfrm>
-          <a:prstGeom prst="rect">
-            <a:avLst/>
-          </a:prstGeom>
-          <a:noFill/>
-          <a:ln/>
-        </p:spPr>
-        <p:txBody>
-          <a:bodyPr wrap="square" lIns="0" tIns="0" rIns="0" bIns="0" rtlCol="0" anchor="t"/>
-          <a:lstStyle/>
-          <a:p>
-            <a:pPr algn="l" indent="0" marL="0">
-              <a:lnSpc>
-                <a:spcPts val="1680"/>
-              </a:lnSpc>
-              <a:spcBef>
-                <a:spcPts val="300"/>
-              </a:spcBef>
-              <a:spcAft>
-                <a:spcPts val="300"/>
-              </a:spcAft>
-              <a:buNone/>
-            </a:pPr>
-            <a:r>
-              <a:rPr lang="en-US" sz="1200" dirty="0">
-                <a:solidFill>
-                  <a:srgbClr val="1C2833"/>
-                </a:solidFill>
-                <a:latin typeface="Arial" pitchFamily="34" charset="0"/>
-                <a:ea typeface="Arial" pitchFamily="34" charset="-122"/>
-                <a:cs typeface="Arial" pitchFamily="34" charset="-120"/>
-              </a:rPr>
-              <a:t>Now ask: </a:t>
-            </a:r>
-            <a:pPr algn="l" indent="0" marL="0">
-              <a:lnSpc>
-                <a:spcPts val="1680"/>
-              </a:lnSpc>
-              <a:spcBef>
-                <a:spcPts val="300"/>
-              </a:spcBef>
-              <a:spcAft>
-                <a:spcPts val="300"/>
-              </a:spcAft>
-              <a:buNone/>
-            </a:pPr>
-            <a:r>
-              <a:rPr lang="en-US" sz="1200" i="1" dirty="0">
-                <a:solidFill>
-                  <a:srgbClr val="1C2833"/>
-                </a:solidFill>
-                <a:latin typeface="Arial" pitchFamily="34" charset="0"/>
-                <a:ea typeface="Arial" pitchFamily="34" charset="-122"/>
-                <a:cs typeface="Arial" pitchFamily="34" charset="-120"/>
-              </a:rPr>
-              <a:t>"What's the length of the bar minus 1?"</a:t>
-            </a:r>
-            <a:pPr algn="l" indent="0" marL="0">
-              <a:lnSpc>
-                <a:spcPts val="1680"/>
-              </a:lnSpc>
-              <a:spcBef>
-                <a:spcPts val="300"/>
-              </a:spcBef>
-              <a:spcAft>
-                <a:spcPts val="300"/>
-              </a:spcAft>
-              <a:buNone/>
-            </a:pPr>
-            <a:r>
-              <a:rPr lang="en-US" sz="1200" dirty="0">
-                <a:solidFill>
-                  <a:srgbClr val="1C2833"/>
-                </a:solidFill>
-                <a:latin typeface="Arial" pitchFamily="34" charset="0"/>
-                <a:ea typeface="Arial" pitchFamily="34" charset="-122"/>
-                <a:cs typeface="Arial" pitchFamily="34" charset="-120"/>
-              </a:rPr>
-              <a:t> — Answer: </a:t>
-            </a:r>
-            <a:pPr algn="l" indent="0" marL="0">
-              <a:lnSpc>
-                <a:spcPts val="1680"/>
-              </a:lnSpc>
-              <a:spcBef>
-                <a:spcPts val="300"/>
-              </a:spcBef>
-              <a:spcAft>
-                <a:spcPts val="300"/>
-              </a:spcAft>
-              <a:buNone/>
-            </a:pPr>
-            <a:r>
-              <a:rPr lang="en-US" sz="1200" dirty="0">
-                <a:solidFill>
-                  <a:srgbClr val="1C2833"/>
-                </a:solidFill>
-                <a:latin typeface="Arial" pitchFamily="34" charset="0"/>
-                <a:ea typeface="Arial" pitchFamily="34" charset="-122"/>
-                <a:cs typeface="Arial" pitchFamily="34" charset="-120"/>
-              </a:rPr>
-              <a:t>999</a:t>
-            </a:r>
-            <a:pPr algn="l" indent="0" marL="0">
-              <a:lnSpc>
-                <a:spcPts val="1680"/>
-              </a:lnSpc>
-              <a:spcBef>
-                <a:spcPts val="300"/>
-              </a:spcBef>
-              <a:spcAft>
-                <a:spcPts val="300"/>
-              </a:spcAft>
-              <a:buNone/>
-            </a:pPr>
-            <a:r>
-              <a:rPr lang="en-US" sz="1200" dirty="0">
-                <a:solidFill>
-                  <a:srgbClr val="1C2833"/>
-                </a:solidFill>
-                <a:latin typeface="Arial" pitchFamily="34" charset="0"/>
-                <a:ea typeface="Arial" pitchFamily="34" charset="-122"/>
-                <a:cs typeface="Arial" pitchFamily="34" charset="-120"/>
-              </a:rPr>
-              <a:t>.</a:t>
-            </a:r>
-            <a:endParaRPr lang="en-US" sz="1200" dirty="0"/>
-          </a:p>
-        </p:txBody>
-      </p:sp>
-      <p:sp>
-        <p:nvSpPr>
-          <p:cNvPr id="30" name="Text 28"/>
-          <p:cNvSpPr/>
-          <p:nvPr/>
-        </p:nvSpPr>
-        <p:spPr>
-          <a:xfrm>
-            <a:off x="406301" y="8361908"/>
-            <a:ext cx="8498026" cy="445591"/>
-          </a:xfrm>
-          <a:prstGeom prst="rect">
-            <a:avLst/>
-          </a:prstGeom>
-          <a:noFill/>
-          <a:ln/>
-        </p:spPr>
-        <p:txBody>
-          <a:bodyPr wrap="square" lIns="0" tIns="0" rIns="0" bIns="0" rtlCol="0" anchor="t"/>
-          <a:lstStyle/>
-          <a:p>
-            <a:pPr algn="l" indent="0" marL="0">
-              <a:lnSpc>
-                <a:spcPts val="1680"/>
-              </a:lnSpc>
-              <a:spcBef>
-                <a:spcPts val="300"/>
-              </a:spcBef>
-              <a:spcAft>
-                <a:spcPts val="300"/>
-              </a:spcAft>
-              <a:buNone/>
-            </a:pPr>
-            <a:r>
-              <a:rPr lang="en-US" sz="1200" dirty="0">
-                <a:solidFill>
-                  <a:srgbClr val="1C2833"/>
-                </a:solidFill>
-                <a:latin typeface="Arial" pitchFamily="34" charset="0"/>
-                <a:ea typeface="Arial" pitchFamily="34" charset="-122"/>
-                <a:cs typeface="Arial" pitchFamily="34" charset="-120"/>
-              </a:rPr>
-              <a:t>Mark a tiny </a:t>
-            </a:r>
-            <a:pPr algn="l" indent="0" marL="0">
-              <a:lnSpc>
-                <a:spcPts val="1680"/>
-              </a:lnSpc>
-              <a:spcBef>
-                <a:spcPts val="300"/>
-              </a:spcBef>
-              <a:spcAft>
-                <a:spcPts val="300"/>
-              </a:spcAft>
-              <a:buNone/>
-            </a:pPr>
-            <a:r>
-              <a:rPr lang="en-US" sz="1200" dirty="0">
-                <a:solidFill>
-                  <a:srgbClr val="1C2833"/>
-                </a:solidFill>
-                <a:latin typeface="Arial" pitchFamily="34" charset="0"/>
-                <a:ea typeface="Arial" pitchFamily="34" charset="-122"/>
-                <a:cs typeface="Arial" pitchFamily="34" charset="-120"/>
-              </a:rPr>
-              <a:t>+1</a:t>
-            </a:r>
-            <a:pPr algn="l" indent="0" marL="0">
-              <a:lnSpc>
-                <a:spcPts val="1680"/>
-              </a:lnSpc>
-              <a:spcBef>
-                <a:spcPts val="300"/>
-              </a:spcBef>
-              <a:spcAft>
-                <a:spcPts val="300"/>
-              </a:spcAft>
-              <a:buNone/>
-            </a:pPr>
-            <a:r>
-              <a:rPr lang="en-US" sz="1200" dirty="0">
-                <a:solidFill>
-                  <a:srgbClr val="1C2833"/>
-                </a:solidFill>
-                <a:latin typeface="Arial" pitchFamily="34" charset="0"/>
-                <a:ea typeface="Arial" pitchFamily="34" charset="-122"/>
-                <a:cs typeface="Arial" pitchFamily="34" charset="-120"/>
-              </a:rPr>
-              <a:t> sliver at the right end of the bar. Now </a:t>
-            </a:r>
-            <a:pPr algn="l" indent="0" marL="0">
-              <a:lnSpc>
-                <a:spcPts val="1680"/>
-              </a:lnSpc>
-              <a:spcBef>
-                <a:spcPts val="300"/>
-              </a:spcBef>
-              <a:spcAft>
-                <a:spcPts val="300"/>
-              </a:spcAft>
-              <a:buNone/>
-            </a:pPr>
-            <a:r>
-              <a:rPr lang="en-US" sz="1200" dirty="0">
-                <a:solidFill>
-                  <a:srgbClr val="1C2833"/>
-                </a:solidFill>
-                <a:latin typeface="Arial" pitchFamily="34" charset="0"/>
-                <a:ea typeface="Arial" pitchFamily="34" charset="-122"/>
-                <a:cs typeface="Arial" pitchFamily="34" charset="-120"/>
-              </a:rPr>
-              <a:t>999 = 567 + (right segment − 1)</a:t>
-            </a:r>
-            <a:pPr algn="l" indent="0" marL="0">
-              <a:lnSpc>
-                <a:spcPts val="1680"/>
-              </a:lnSpc>
-              <a:spcBef>
-                <a:spcPts val="300"/>
-              </a:spcBef>
-              <a:spcAft>
-                <a:spcPts val="300"/>
-              </a:spcAft>
-              <a:buNone/>
-            </a:pPr>
-            <a:r>
-              <a:rPr lang="en-US" sz="1200" dirty="0">
-                <a:solidFill>
-                  <a:srgbClr val="1C2833"/>
-                </a:solidFill>
-                <a:latin typeface="Arial" pitchFamily="34" charset="0"/>
-                <a:ea typeface="Arial" pitchFamily="34" charset="-122"/>
-                <a:cs typeface="Arial" pitchFamily="34" charset="-120"/>
-              </a:rPr>
-              <a:t>, so right segment = </a:t>
-            </a:r>
-            <a:pPr algn="l" indent="0" marL="0">
-              <a:lnSpc>
-                <a:spcPts val="1680"/>
-              </a:lnSpc>
-              <a:spcBef>
-                <a:spcPts val="300"/>
-              </a:spcBef>
-              <a:spcAft>
-                <a:spcPts val="300"/>
-              </a:spcAft>
-              <a:buNone/>
-            </a:pPr>
-            <a:r>
-              <a:rPr lang="en-US" sz="1200" dirty="0">
-                <a:solidFill>
-                  <a:srgbClr val="1C2833"/>
-                </a:solidFill>
-                <a:latin typeface="Arial" pitchFamily="34" charset="0"/>
-                <a:ea typeface="Arial" pitchFamily="34" charset="-122"/>
-                <a:cs typeface="Arial" pitchFamily="34" charset="-120"/>
-              </a:rPr>
-              <a:t>(999 − 567) + 1 = 432 + 1 = 433</a:t>
-            </a:r>
-            <a:pPr algn="l" indent="0" marL="0">
-              <a:lnSpc>
-                <a:spcPts val="1680"/>
-              </a:lnSpc>
-              <a:spcBef>
-                <a:spcPts val="300"/>
-              </a:spcBef>
-              <a:spcAft>
-                <a:spcPts val="300"/>
-              </a:spcAft>
-              <a:buNone/>
-            </a:pPr>
-            <a:r>
-              <a:rPr lang="en-US" sz="1200" dirty="0">
-                <a:solidFill>
-                  <a:srgbClr val="1C2833"/>
-                </a:solidFill>
-                <a:latin typeface="Arial" pitchFamily="34" charset="0"/>
-                <a:ea typeface="Arial" pitchFamily="34" charset="-122"/>
-                <a:cs typeface="Arial" pitchFamily="34" charset="-120"/>
-              </a:rPr>
-              <a:t>.</a:t>
-            </a:r>
-            <a:endParaRPr lang="en-US" sz="1200" dirty="0"/>
-          </a:p>
-        </p:txBody>
-      </p:sp>
-      <p:sp>
-        <p:nvSpPr>
-          <p:cNvPr id="31" name="Text 29"/>
-          <p:cNvSpPr/>
-          <p:nvPr/>
-        </p:nvSpPr>
-        <p:spPr>
-          <a:xfrm>
-            <a:off x="406301" y="8883700"/>
-            <a:ext cx="8498026" cy="213271"/>
-          </a:xfrm>
-          <a:prstGeom prst="rect">
-            <a:avLst/>
-          </a:prstGeom>
-          <a:noFill/>
-          <a:ln/>
-        </p:spPr>
-        <p:txBody>
-          <a:bodyPr wrap="square" lIns="0" tIns="0" rIns="0" bIns="0" rtlCol="0" anchor="t"/>
-          <a:lstStyle/>
-          <a:p>
-            <a:pPr algn="l" indent="0" marL="0">
-              <a:lnSpc>
-                <a:spcPts val="1680"/>
-              </a:lnSpc>
-              <a:spcBef>
-                <a:spcPts val="300"/>
-              </a:spcBef>
-              <a:spcAft>
-                <a:spcPts val="300"/>
-              </a:spcAft>
-              <a:buNone/>
-            </a:pPr>
-            <a:r>
-              <a:rPr lang="en-US" sz="1200" i="1" dirty="0">
-                <a:solidFill>
-                  <a:srgbClr val="1C2833"/>
-                </a:solidFill>
-                <a:latin typeface="Arial" pitchFamily="34" charset="0"/>
-                <a:ea typeface="Arial" pitchFamily="34" charset="-122"/>
-                <a:cs typeface="Arial" pitchFamily="34" charset="-120"/>
-              </a:rPr>
-              <a:t>"That's the picture-version of the algebra. Same thing."</a:t>
-            </a:r>
-            <a:endParaRPr lang="en-US" sz="1200" dirty="0"/>
-          </a:p>
-        </p:txBody>
-      </p:sp>
-      <p:sp>
-        <p:nvSpPr>
-          <p:cNvPr id="32" name="Text 30"/>
-          <p:cNvSpPr/>
-          <p:nvPr/>
-        </p:nvSpPr>
-        <p:spPr>
-          <a:xfrm>
-            <a:off x="406301" y="9249370"/>
+          <p:cNvPr id="5" name="Text 3"/>
+          <p:cNvSpPr/>
+          <p:nvPr/>
+        </p:nvSpPr>
+        <p:spPr>
+          <a:xfrm>
+            <a:off x="406301" y="4434929"/>
             <a:ext cx="8498026" cy="213271"/>
           </a:xfrm>
           <a:prstGeom prst="rect">
@@ -5681,7 +8369,7 @@
                 <a:ea typeface="Georgia" pitchFamily="34" charset="-122"/>
                 <a:cs typeface="Georgia" pitchFamily="34" charset="-120"/>
               </a:rPr>
-              <a:t>Activity (15 min) — Explain to a friend</a:t>
+              <a:t>Core (20 min) — The mathematical reason</a:t>
             </a:r>
             <a:endParaRPr lang="en-US" sz="1800" dirty="0"/>
           </a:p>
@@ -5695,8 +8383,8 @@
         </p:nvSpPr>
         <p:spPr>
           <a:xfrm>
-            <a:off x="406301" y="870942"/>
-            <a:ext cx="8498026" cy="213271"/>
+            <a:off x="634901" y="883593"/>
+            <a:ext cx="8102798" cy="281880"/>
           </a:xfrm>
           <a:prstGeom prst="rect">
             <a:avLst/>
@@ -5708,9 +8396,108 @@
           <a:bodyPr wrap="square" lIns="0" tIns="0" rIns="0" bIns="0" rtlCol="0" anchor="t"/>
           <a:lstStyle/>
           <a:p>
-            <a:pPr algn="l" indent="0" marL="0">
-              <a:lnSpc>
-                <a:spcPts val="1680"/>
+            <a:pPr algn="l" marL="342900" indent="-342900">
+              <a:lnSpc>
+                <a:spcPts val="1620"/>
+              </a:lnSpc>
+              <a:spcAft>
+                <a:spcPts val="300"/>
+              </a:spcAft>
+              <a:buSzPct val="100000"/>
+              <a:buChar char="•"/>
+            </a:pPr>
+            <a:r>
+              <a:rPr lang="en-US" sz="1200" b="1" dirty="0">
+                <a:solidFill>
+                  <a:srgbClr val="1C2833"/>
+                </a:solidFill>
+                <a:latin typeface="Arial" pitchFamily="34" charset="0"/>
+                <a:ea typeface="Arial" pitchFamily="34" charset="-122"/>
+                <a:cs typeface="Arial" pitchFamily="34" charset="-120"/>
+              </a:rPr>
+              <a:t>The core identity (write boxed on the board):</a:t>
+            </a:r>
+            <a:endParaRPr lang="en-US" sz="1200" dirty="0"/>
+          </a:p>
+        </p:txBody>
+      </p:sp>
+      <p:sp>
+        <p:nvSpPr>
+          <p:cNvPr id="5" name="Text 3"/>
+          <p:cNvSpPr/>
+          <p:nvPr/>
+        </p:nvSpPr>
+        <p:spPr>
+          <a:xfrm>
+            <a:off x="406301" y="1266974"/>
+            <a:ext cx="8331398" cy="611981"/>
+          </a:xfrm>
+          <a:prstGeom prst="rect">
+            <a:avLst/>
+          </a:prstGeom>
+          <a:solidFill>
+            <a:srgbClr val="F4F8F9"/>
+          </a:solidFill>
+          <a:ln/>
+        </p:spPr>
+        <p:txBody>
+          <a:bodyPr wrap="square" rtlCol="0" anchor="ctr"/>
+          <a:lstStyle/>
+          <a:p>
+            <a:pPr indent="0" marL="0">
+              <a:buNone/>
+            </a:pPr>
+            <a:endParaRPr lang="en-US" dirty="0"/>
+          </a:p>
+        </p:txBody>
+      </p:sp>
+      <p:sp>
+        <p:nvSpPr>
+          <p:cNvPr id="6" name="Shape 4"/>
+          <p:cNvSpPr/>
+          <p:nvPr/>
+        </p:nvSpPr>
+        <p:spPr>
+          <a:xfrm>
+            <a:off x="434876" y="1266974"/>
+            <a:ext cx="0" cy="611981"/>
+          </a:xfrm>
+          <a:prstGeom prst="line">
+            <a:avLst/>
+          </a:prstGeom>
+          <a:noFill/>
+          <a:ln w="57150">
+            <a:solidFill>
+              <a:srgbClr val="FE4447"/>
+            </a:solidFill>
+            <a:prstDash val="solid"/>
+          </a:ln>
+        </p:spPr>
+      </p:sp>
+      <p:sp>
+        <p:nvSpPr>
+          <p:cNvPr id="7" name="Text 5"/>
+          <p:cNvSpPr/>
+          <p:nvPr/>
+        </p:nvSpPr>
+        <p:spPr>
+          <a:xfrm>
+            <a:off x="692051" y="1457474"/>
+            <a:ext cx="7973389" cy="230981"/>
+          </a:xfrm>
+          <a:prstGeom prst="rect">
+            <a:avLst/>
+          </a:prstGeom>
+          <a:noFill/>
+          <a:ln/>
+        </p:spPr>
+        <p:txBody>
+          <a:bodyPr wrap="square" lIns="0" tIns="0" rIns="0" bIns="0" rtlCol="0" anchor="t"/>
+          <a:lstStyle/>
+          <a:p>
+            <a:pPr algn="l" indent="0" marL="0">
+              <a:lnSpc>
+                <a:spcPts val="1820"/>
               </a:lnSpc>
               <a:spcBef>
                 <a:spcPts val="300"/>
@@ -5721,6 +8508,72 @@
               <a:buNone/>
             </a:pPr>
             <a:r>
+              <a:rPr lang="en-US" sz="1300" b="1" i="1" dirty="0">
+                <a:solidFill>
+                  <a:srgbClr val="1C2833"/>
+                </a:solidFill>
+                <a:latin typeface="Georgia" pitchFamily="34" charset="0"/>
+                <a:ea typeface="Georgia" pitchFamily="34" charset="-122"/>
+                <a:cs typeface="Georgia" pitchFamily="34" charset="-120"/>
+              </a:rPr>
+              <a:t>10ⁿ − A = (10ⁿ − 1) − A + 1</a:t>
+            </a:r>
+            <a:endParaRPr lang="en-US" sz="1300" dirty="0"/>
+          </a:p>
+        </p:txBody>
+      </p:sp>
+      <p:sp>
+        <p:nvSpPr>
+          <p:cNvPr id="8" name="Text 6"/>
+          <p:cNvSpPr/>
+          <p:nvPr/>
+        </p:nvSpPr>
+        <p:spPr>
+          <a:xfrm>
+            <a:off x="634901" y="1980456"/>
+            <a:ext cx="8102798" cy="712291"/>
+          </a:xfrm>
+          <a:prstGeom prst="rect">
+            <a:avLst/>
+          </a:prstGeom>
+          <a:noFill/>
+          <a:ln/>
+        </p:spPr>
+        <p:txBody>
+          <a:bodyPr wrap="square" lIns="0" tIns="0" rIns="0" bIns="0" rtlCol="0" anchor="t"/>
+          <a:lstStyle/>
+          <a:p>
+            <a:pPr algn="l" marL="342900" indent="-342900">
+              <a:lnSpc>
+                <a:spcPts val="1620"/>
+              </a:lnSpc>
+              <a:spcAft>
+                <a:spcPts val="300"/>
+              </a:spcAft>
+              <a:buSzPct val="100000"/>
+              <a:buChar char="•"/>
+            </a:pPr>
+            <a:r>
+              <a:rPr lang="en-US" sz="1200" b="1" dirty="0">
+                <a:solidFill>
+                  <a:srgbClr val="1C2833"/>
+                </a:solidFill>
+                <a:latin typeface="Arial" pitchFamily="34" charset="0"/>
+                <a:ea typeface="Arial" pitchFamily="34" charset="-122"/>
+                <a:cs typeface="Arial" pitchFamily="34" charset="-120"/>
+              </a:rPr>
+              <a:t>Why this identity?</a:t>
+            </a:r>
+            <a:pPr algn="l" indent="0" marL="0">
+              <a:lnSpc>
+                <a:spcPts val="1620"/>
+              </a:lnSpc>
+              <a:spcAft>
+                <a:spcPts val="300"/>
+              </a:spcAft>
+              <a:buNone/>
+            </a:pPr>
+            <a:r>
               <a:rPr lang="en-US" sz="1200" dirty="0">
                 <a:solidFill>
                   <a:srgbClr val="1C2833"/>
@@ -5729,7 +8582,187 @@
                 <a:ea typeface="Arial" pitchFamily="34" charset="-122"/>
                 <a:cs typeface="Arial" pitchFamily="34" charset="-120"/>
               </a:rPr>
-              <a:t>– Worksheet prompt:</a:t>
+              <a:t> </a:t>
+            </a:r>
+            <a:pPr algn="l" indent="0" marL="0">
+              <a:lnSpc>
+                <a:spcPts val="1620"/>
+              </a:lnSpc>
+              <a:spcAft>
+                <a:spcPts val="300"/>
+              </a:spcAft>
+              <a:buNone/>
+            </a:pPr>
+            <a:r>
+              <a:rPr lang="en-US" sz="1200" i="1" dirty="0">
+                <a:solidFill>
+                  <a:srgbClr val="1C2833"/>
+                </a:solidFill>
+                <a:latin typeface="Arial" pitchFamily="34" charset="0"/>
+                <a:ea typeface="Arial" pitchFamily="34" charset="-122"/>
+                <a:cs typeface="Arial" pitchFamily="34" charset="-120"/>
+              </a:rPr>
+              <a:t>"</a:t>
+            </a:r>
+            <a:pPr algn="l" indent="0" marL="0">
+              <a:lnSpc>
+                <a:spcPts val="1620"/>
+              </a:lnSpc>
+              <a:spcAft>
+                <a:spcPts val="300"/>
+              </a:spcAft>
+              <a:buNone/>
+            </a:pPr>
+            <a:r>
+              <a:rPr lang="en-US" sz="1200" i="1" dirty="0">
+                <a:solidFill>
+                  <a:srgbClr val="1C2833"/>
+                </a:solidFill>
+                <a:latin typeface="Arial" pitchFamily="34" charset="0"/>
+                <a:ea typeface="Arial" pitchFamily="34" charset="-122"/>
+                <a:cs typeface="Arial" pitchFamily="34" charset="-120"/>
+              </a:rPr>
+              <a:t>10ⁿ</a:t>
+            </a:r>
+            <a:pPr algn="l" indent="0" marL="0">
+              <a:lnSpc>
+                <a:spcPts val="1620"/>
+              </a:lnSpc>
+              <a:spcAft>
+                <a:spcPts val="300"/>
+              </a:spcAft>
+              <a:buNone/>
+            </a:pPr>
+            <a:r>
+              <a:rPr lang="en-US" sz="1200" i="1" dirty="0">
+                <a:solidFill>
+                  <a:srgbClr val="1C2833"/>
+                </a:solidFill>
+                <a:latin typeface="Arial" pitchFamily="34" charset="0"/>
+                <a:ea typeface="Arial" pitchFamily="34" charset="-122"/>
+                <a:cs typeface="Arial" pitchFamily="34" charset="-120"/>
+              </a:rPr>
+              <a:t> is </a:t>
+            </a:r>
+            <a:pPr algn="l" indent="0" marL="0">
+              <a:lnSpc>
+                <a:spcPts val="1620"/>
+              </a:lnSpc>
+              <a:spcAft>
+                <a:spcPts val="300"/>
+              </a:spcAft>
+              <a:buNone/>
+            </a:pPr>
+            <a:r>
+              <a:rPr lang="en-US" sz="1200" i="1" dirty="0">
+                <a:solidFill>
+                  <a:srgbClr val="1C2833"/>
+                </a:solidFill>
+                <a:latin typeface="Arial" pitchFamily="34" charset="0"/>
+                <a:ea typeface="Arial" pitchFamily="34" charset="-122"/>
+                <a:cs typeface="Arial" pitchFamily="34" charset="-120"/>
+              </a:rPr>
+              <a:t>1</a:t>
+            </a:r>
+            <a:pPr algn="l" indent="0" marL="0">
+              <a:lnSpc>
+                <a:spcPts val="1620"/>
+              </a:lnSpc>
+              <a:spcAft>
+                <a:spcPts val="300"/>
+              </a:spcAft>
+              <a:buNone/>
+            </a:pPr>
+            <a:r>
+              <a:rPr lang="en-US" sz="1200" i="1" dirty="0">
+                <a:solidFill>
+                  <a:srgbClr val="1C2833"/>
+                </a:solidFill>
+                <a:latin typeface="Arial" pitchFamily="34" charset="0"/>
+                <a:ea typeface="Arial" pitchFamily="34" charset="-122"/>
+                <a:cs typeface="Arial" pitchFamily="34" charset="-120"/>
+              </a:rPr>
+              <a:t> followed by </a:t>
+            </a:r>
+            <a:pPr algn="l" indent="0" marL="0">
+              <a:lnSpc>
+                <a:spcPts val="1620"/>
+              </a:lnSpc>
+              <a:spcAft>
+                <a:spcPts val="300"/>
+              </a:spcAft>
+              <a:buNone/>
+            </a:pPr>
+            <a:r>
+              <a:rPr lang="en-US" sz="1200" i="1" dirty="0">
+                <a:solidFill>
+                  <a:srgbClr val="1C2833"/>
+                </a:solidFill>
+                <a:latin typeface="Arial" pitchFamily="34" charset="0"/>
+                <a:ea typeface="Arial" pitchFamily="34" charset="-122"/>
+                <a:cs typeface="Arial" pitchFamily="34" charset="-120"/>
+              </a:rPr>
+              <a:t>n</a:t>
+            </a:r>
+            <a:pPr algn="l" indent="0" marL="0">
+              <a:lnSpc>
+                <a:spcPts val="1620"/>
+              </a:lnSpc>
+              <a:spcAft>
+                <a:spcPts val="300"/>
+              </a:spcAft>
+              <a:buNone/>
+            </a:pPr>
+            <a:r>
+              <a:rPr lang="en-US" sz="1200" i="1" dirty="0">
+                <a:solidFill>
+                  <a:srgbClr val="1C2833"/>
+                </a:solidFill>
+                <a:latin typeface="Arial" pitchFamily="34" charset="0"/>
+                <a:ea typeface="Arial" pitchFamily="34" charset="-122"/>
+                <a:cs typeface="Arial" pitchFamily="34" charset="-120"/>
+              </a:rPr>
+              <a:t> zeros — e.g. 1000 = 10³. </a:t>
+            </a:r>
+            <a:pPr algn="l" indent="0" marL="0">
+              <a:lnSpc>
+                <a:spcPts val="1620"/>
+              </a:lnSpc>
+              <a:spcAft>
+                <a:spcPts val="300"/>
+              </a:spcAft>
+              <a:buNone/>
+            </a:pPr>
+            <a:r>
+              <a:rPr lang="en-US" sz="1200" i="1" dirty="0">
+                <a:solidFill>
+                  <a:srgbClr val="1C2833"/>
+                </a:solidFill>
+                <a:latin typeface="Arial" pitchFamily="34" charset="0"/>
+                <a:ea typeface="Arial" pitchFamily="34" charset="-122"/>
+                <a:cs typeface="Arial" pitchFamily="34" charset="-120"/>
+              </a:rPr>
+              <a:t>10ⁿ − 1</a:t>
+            </a:r>
+            <a:pPr algn="l" indent="0" marL="0">
+              <a:lnSpc>
+                <a:spcPts val="1620"/>
+              </a:lnSpc>
+              <a:spcAft>
+                <a:spcPts val="300"/>
+              </a:spcAft>
+              <a:buNone/>
+            </a:pPr>
+            <a:r>
+              <a:rPr lang="en-US" sz="1200" i="1" dirty="0">
+                <a:solidFill>
+                  <a:srgbClr val="1C2833"/>
+                </a:solidFill>
+                <a:latin typeface="Arial" pitchFamily="34" charset="0"/>
+                <a:ea typeface="Arial" pitchFamily="34" charset="-122"/>
+                <a:cs typeface="Arial" pitchFamily="34" charset="-120"/>
+              </a:rPr>
+              <a:t> is the same number minus one — e.g. 999. That's just 'all nines.' So the identity says: subtracting A from a round base equals (subtracting A from all-nines) plus 1."</a:t>
             </a:r>
             <a:endParaRPr lang="en-US" sz="1200" dirty="0"/>
           </a:p>
@@ -5737,333 +8770,7 @@
       </p:sp>
       <p:sp>
         <p:nvSpPr>
-          <p:cNvPr id="5" name="Text 3"/>
-          <p:cNvSpPr/>
-          <p:nvPr/>
-        </p:nvSpPr>
-        <p:spPr>
-          <a:xfrm>
-            <a:off x="406301" y="1160413"/>
-            <a:ext cx="8498026" cy="426541"/>
-          </a:xfrm>
-          <a:prstGeom prst="rect">
-            <a:avLst/>
-          </a:prstGeom>
-          <a:noFill/>
-          <a:ln/>
-        </p:spPr>
-        <p:txBody>
-          <a:bodyPr wrap="square" lIns="0" tIns="0" rIns="0" bIns="0" rtlCol="0" anchor="t"/>
-          <a:lstStyle/>
-          <a:p>
-            <a:pPr algn="l" indent="0" marL="0">
-              <a:lnSpc>
-                <a:spcPts val="1680"/>
-              </a:lnSpc>
-              <a:spcBef>
-                <a:spcPts val="300"/>
-              </a:spcBef>
-              <a:spcAft>
-                <a:spcPts val="300"/>
-              </a:spcAft>
-              <a:buNone/>
-            </a:pPr>
-            <a:r>
-              <a:rPr lang="en-US" sz="1200" dirty="0">
-                <a:solidFill>
-                  <a:srgbClr val="1C2833"/>
-                </a:solidFill>
-                <a:latin typeface="Arial" pitchFamily="34" charset="0"/>
-                <a:ea typeface="Arial" pitchFamily="34" charset="-122"/>
-                <a:cs typeface="Arial" pitchFamily="34" charset="-120"/>
-              </a:rPr>
-              <a:t>&gt; Imagine your Grade 4 cousin asks: </a:t>
-            </a:r>
-            <a:pPr algn="l" indent="0" marL="0">
-              <a:lnSpc>
-                <a:spcPts val="1680"/>
-              </a:lnSpc>
-              <a:spcBef>
-                <a:spcPts val="300"/>
-              </a:spcBef>
-              <a:spcAft>
-                <a:spcPts val="300"/>
-              </a:spcAft>
-              <a:buNone/>
-            </a:pPr>
-            <a:r>
-              <a:rPr lang="en-US" sz="1200" i="1" dirty="0">
-                <a:solidFill>
-                  <a:srgbClr val="1C2833"/>
-                </a:solidFill>
-                <a:latin typeface="Arial" pitchFamily="34" charset="0"/>
-                <a:ea typeface="Arial" pitchFamily="34" charset="-122"/>
-                <a:cs typeface="Arial" pitchFamily="34" charset="-120"/>
-              </a:rPr>
-              <a:t>"Why does Nikhilam work? Isn't it just magic?"</a:t>
-            </a:r>
-            <a:pPr algn="l" indent="0" marL="0">
-              <a:lnSpc>
-                <a:spcPts val="1680"/>
-              </a:lnSpc>
-              <a:spcBef>
-                <a:spcPts val="300"/>
-              </a:spcBef>
-              <a:spcAft>
-                <a:spcPts val="300"/>
-              </a:spcAft>
-              <a:buNone/>
-            </a:pPr>
-            <a:r>
-              <a:rPr lang="en-US" sz="1200" dirty="0">
-                <a:solidFill>
-                  <a:srgbClr val="1C2833"/>
-                </a:solidFill>
-                <a:latin typeface="Arial" pitchFamily="34" charset="0"/>
-                <a:ea typeface="Arial" pitchFamily="34" charset="-122"/>
-                <a:cs typeface="Arial" pitchFamily="34" charset="-120"/>
-              </a:rPr>
-              <a:t> In 4–6 sentences, explain why it's NOT magic. Use the words </a:t>
-            </a:r>
-            <a:pPr algn="l" indent="0" marL="0">
-              <a:lnSpc>
-                <a:spcPts val="1680"/>
-              </a:lnSpc>
-              <a:spcBef>
-                <a:spcPts val="300"/>
-              </a:spcBef>
-              <a:spcAft>
-                <a:spcPts val="300"/>
-              </a:spcAft>
-              <a:buNone/>
-            </a:pPr>
-            <a:r>
-              <a:rPr lang="en-US" sz="1200" b="1" dirty="0">
-                <a:solidFill>
-                  <a:srgbClr val="1C2833"/>
-                </a:solidFill>
-                <a:latin typeface="Arial" pitchFamily="34" charset="0"/>
-                <a:ea typeface="Arial" pitchFamily="34" charset="-122"/>
-                <a:cs typeface="Arial" pitchFamily="34" charset="-120"/>
-              </a:rPr>
-              <a:t>nine</a:t>
-            </a:r>
-            <a:pPr algn="l" indent="0" marL="0">
-              <a:lnSpc>
-                <a:spcPts val="1680"/>
-              </a:lnSpc>
-              <a:spcBef>
-                <a:spcPts val="300"/>
-              </a:spcBef>
-              <a:spcAft>
-                <a:spcPts val="300"/>
-              </a:spcAft>
-              <a:buNone/>
-            </a:pPr>
-            <a:r>
-              <a:rPr lang="en-US" sz="1200" dirty="0">
-                <a:solidFill>
-                  <a:srgbClr val="1C2833"/>
-                </a:solidFill>
-                <a:latin typeface="Arial" pitchFamily="34" charset="0"/>
-                <a:ea typeface="Arial" pitchFamily="34" charset="-122"/>
-                <a:cs typeface="Arial" pitchFamily="34" charset="-120"/>
-              </a:rPr>
-              <a:t>, </a:t>
-            </a:r>
-            <a:pPr algn="l" indent="0" marL="0">
-              <a:lnSpc>
-                <a:spcPts val="1680"/>
-              </a:lnSpc>
-              <a:spcBef>
-                <a:spcPts val="300"/>
-              </a:spcBef>
-              <a:spcAft>
-                <a:spcPts val="300"/>
-              </a:spcAft>
-              <a:buNone/>
-            </a:pPr>
-            <a:r>
-              <a:rPr lang="en-US" sz="1200" b="1" dirty="0">
-                <a:solidFill>
-                  <a:srgbClr val="1C2833"/>
-                </a:solidFill>
-                <a:latin typeface="Arial" pitchFamily="34" charset="0"/>
-                <a:ea typeface="Arial" pitchFamily="34" charset="-122"/>
-                <a:cs typeface="Arial" pitchFamily="34" charset="-120"/>
-              </a:rPr>
-              <a:t>ten</a:t>
-            </a:r>
-            <a:pPr algn="l" indent="0" marL="0">
-              <a:lnSpc>
-                <a:spcPts val="1680"/>
-              </a:lnSpc>
-              <a:spcBef>
-                <a:spcPts val="300"/>
-              </a:spcBef>
-              <a:spcAft>
-                <a:spcPts val="300"/>
-              </a:spcAft>
-              <a:buNone/>
-            </a:pPr>
-            <a:r>
-              <a:rPr lang="en-US" sz="1200" dirty="0">
-                <a:solidFill>
-                  <a:srgbClr val="1C2833"/>
-                </a:solidFill>
-                <a:latin typeface="Arial" pitchFamily="34" charset="0"/>
-                <a:ea typeface="Arial" pitchFamily="34" charset="-122"/>
-                <a:cs typeface="Arial" pitchFamily="34" charset="-120"/>
-              </a:rPr>
-              <a:t>, </a:t>
-            </a:r>
-            <a:pPr algn="l" indent="0" marL="0">
-              <a:lnSpc>
-                <a:spcPts val="1680"/>
-              </a:lnSpc>
-              <a:spcBef>
-                <a:spcPts val="300"/>
-              </a:spcBef>
-              <a:spcAft>
-                <a:spcPts val="300"/>
-              </a:spcAft>
-              <a:buNone/>
-            </a:pPr>
-            <a:r>
-              <a:rPr lang="en-US" sz="1200" b="1" dirty="0">
-                <a:solidFill>
-                  <a:srgbClr val="1C2833"/>
-                </a:solidFill>
-                <a:latin typeface="Arial" pitchFamily="34" charset="0"/>
-                <a:ea typeface="Arial" pitchFamily="34" charset="-122"/>
-                <a:cs typeface="Arial" pitchFamily="34" charset="-120"/>
-              </a:rPr>
-              <a:t>plus one</a:t>
-            </a:r>
-            <a:pPr algn="l" indent="0" marL="0">
-              <a:lnSpc>
-                <a:spcPts val="1680"/>
-              </a:lnSpc>
-              <a:spcBef>
-                <a:spcPts val="300"/>
-              </a:spcBef>
-              <a:spcAft>
-                <a:spcPts val="300"/>
-              </a:spcAft>
-              <a:buNone/>
-            </a:pPr>
-            <a:r>
-              <a:rPr lang="en-US" sz="1200" dirty="0">
-                <a:solidFill>
-                  <a:srgbClr val="1C2833"/>
-                </a:solidFill>
-                <a:latin typeface="Arial" pitchFamily="34" charset="0"/>
-                <a:ea typeface="Arial" pitchFamily="34" charset="-122"/>
-                <a:cs typeface="Arial" pitchFamily="34" charset="-120"/>
-              </a:rPr>
-              <a:t>, and </a:t>
-            </a:r>
-            <a:pPr algn="l" indent="0" marL="0">
-              <a:lnSpc>
-                <a:spcPts val="1680"/>
-              </a:lnSpc>
-              <a:spcBef>
-                <a:spcPts val="300"/>
-              </a:spcBef>
-              <a:spcAft>
-                <a:spcPts val="300"/>
-              </a:spcAft>
-              <a:buNone/>
-            </a:pPr>
-            <a:r>
-              <a:rPr lang="en-US" sz="1200" b="1" dirty="0">
-                <a:solidFill>
-                  <a:srgbClr val="1C2833"/>
-                </a:solidFill>
-                <a:latin typeface="Arial" pitchFamily="34" charset="0"/>
-                <a:ea typeface="Arial" pitchFamily="34" charset="-122"/>
-                <a:cs typeface="Arial" pitchFamily="34" charset="-120"/>
-              </a:rPr>
-              <a:t>place value</a:t>
-            </a:r>
-            <a:pPr algn="l" indent="0" marL="0">
-              <a:lnSpc>
-                <a:spcPts val="1680"/>
-              </a:lnSpc>
-              <a:spcBef>
-                <a:spcPts val="300"/>
-              </a:spcBef>
-              <a:spcAft>
-                <a:spcPts val="300"/>
-              </a:spcAft>
-              <a:buNone/>
-            </a:pPr>
-            <a:r>
-              <a:rPr lang="en-US" sz="1200" dirty="0">
-                <a:solidFill>
-                  <a:srgbClr val="1C2833"/>
-                </a:solidFill>
-                <a:latin typeface="Arial" pitchFamily="34" charset="0"/>
-                <a:ea typeface="Arial" pitchFamily="34" charset="-122"/>
-                <a:cs typeface="Arial" pitchFamily="34" charset="-120"/>
-              </a:rPr>
-              <a:t>.</a:t>
-            </a:r>
-            <a:endParaRPr lang="en-US" sz="1200" dirty="0"/>
-          </a:p>
-        </p:txBody>
-      </p:sp>
-      <p:sp>
-        <p:nvSpPr>
-          <p:cNvPr id="6" name="Text 4"/>
-          <p:cNvSpPr/>
-          <p:nvPr/>
-        </p:nvSpPr>
-        <p:spPr>
-          <a:xfrm>
-            <a:off x="406301" y="1663154"/>
-            <a:ext cx="8498026" cy="426541"/>
-          </a:xfrm>
-          <a:prstGeom prst="rect">
-            <a:avLst/>
-          </a:prstGeom>
-          <a:noFill/>
-          <a:ln/>
-        </p:spPr>
-        <p:txBody>
-          <a:bodyPr wrap="square" lIns="0" tIns="0" rIns="0" bIns="0" rtlCol="0" anchor="t"/>
-          <a:lstStyle/>
-          <a:p>
-            <a:pPr algn="l" indent="0" marL="0">
-              <a:lnSpc>
-                <a:spcPts val="1680"/>
-              </a:lnSpc>
-              <a:spcBef>
-                <a:spcPts val="300"/>
-              </a:spcBef>
-              <a:spcAft>
-                <a:spcPts val="300"/>
-              </a:spcAft>
-              <a:buNone/>
-            </a:pPr>
-            <a:r>
-              <a:rPr lang="en-US" sz="1200" dirty="0">
-                <a:solidFill>
-                  <a:srgbClr val="1C2833"/>
-                </a:solidFill>
-                <a:latin typeface="Arial" pitchFamily="34" charset="0"/>
-                <a:ea typeface="Arial" pitchFamily="34" charset="-122"/>
-                <a:cs typeface="Arial" pitchFamily="34" charset="-120"/>
-              </a:rPr>
-              <a:t>– 10 min individual writing. – 5 min pair-share: each partner reads their paragraph; partner says one thing that's clear and one that's unclear.</a:t>
-            </a:r>
-            <a:endParaRPr lang="en-US" sz="1200" dirty="0"/>
-          </a:p>
-        </p:txBody>
-      </p:sp>
-      <p:sp>
-        <p:nvSpPr>
-          <p:cNvPr id="7" name="Text 5"/>
+          <p:cNvPr id="9" name="Text 7"/>
           <p:cNvSpPr/>
           <p:nvPr/>
         </p:nvSpPr>
@@ -6213,7 +8920,7 @@
                 <a:ea typeface="Georgia" pitchFamily="34" charset="-122"/>
                 <a:cs typeface="Georgia" pitchFamily="34" charset="-120"/>
               </a:rPr>
-              <a:t>Wrap-up (5 min)</a:t>
+              <a:t>Core (20 min) — The mathematical reason (cont.)</a:t>
             </a:r>
             <a:endParaRPr lang="en-US" sz="1800" dirty="0"/>
           </a:p>
@@ -6227,8 +8934,8 @@
         </p:nvSpPr>
         <p:spPr>
           <a:xfrm>
-            <a:off x="406301" y="870942"/>
-            <a:ext cx="8498026" cy="853083"/>
+            <a:off x="634901" y="883593"/>
+            <a:ext cx="8102798" cy="525661"/>
           </a:xfrm>
           <a:prstGeom prst="rect">
             <a:avLst/>
@@ -6240,13 +8947,31 @@
           <a:bodyPr wrap="square" lIns="0" tIns="0" rIns="0" bIns="0" rtlCol="0" anchor="t"/>
           <a:lstStyle/>
           <a:p>
-            <a:pPr algn="l" indent="0" marL="0">
-              <a:lnSpc>
-                <a:spcPts val="1680"/>
-              </a:lnSpc>
-              <a:spcBef>
-                <a:spcPts val="300"/>
-              </a:spcBef>
+            <a:pPr algn="l" marL="342900" indent="-342900">
+              <a:lnSpc>
+                <a:spcPts val="1620"/>
+              </a:lnSpc>
+              <a:spcAft>
+                <a:spcPts val="300"/>
+              </a:spcAft>
+              <a:buSzPct val="100000"/>
+              <a:buChar char="•"/>
+            </a:pPr>
+            <a:r>
+              <a:rPr lang="en-US" sz="1200" b="1" dirty="0">
+                <a:solidFill>
+                  <a:srgbClr val="1C2833"/>
+                </a:solidFill>
+                <a:latin typeface="Arial" pitchFamily="34" charset="0"/>
+                <a:ea typeface="Arial" pitchFamily="34" charset="-122"/>
+                <a:cs typeface="Arial" pitchFamily="34" charset="-120"/>
+              </a:rPr>
+              <a:t>Why does that help?</a:t>
+            </a:r>
+            <a:pPr algn="l" indent="0" marL="0">
+              <a:lnSpc>
+                <a:spcPts val="1620"/>
+              </a:lnSpc>
               <a:spcAft>
                 <a:spcPts val="300"/>
               </a:spcAft>
@@ -6261,15 +8986,12 @@
                 <a:ea typeface="Arial" pitchFamily="34" charset="-122"/>
                 <a:cs typeface="Arial" pitchFamily="34" charset="-120"/>
               </a:rPr>
-              <a:t>– Read one strong paragraph aloud (with permission). – Honest historical note: </a:t>
-            </a:r>
-            <a:pPr algn="l" indent="0" marL="0">
-              <a:lnSpc>
-                <a:spcPts val="1680"/>
-              </a:lnSpc>
-              <a:spcBef>
-                <a:spcPts val="300"/>
-              </a:spcBef>
+              <a:t> </a:t>
+            </a:r>
+            <a:pPr algn="l" indent="0" marL="0">
+              <a:lnSpc>
+                <a:spcPts val="1620"/>
+              </a:lnSpc>
               <a:spcAft>
                 <a:spcPts val="300"/>
               </a:spcAft>
@@ -6284,15 +9006,138 @@
                 <a:ea typeface="Arial" pitchFamily="34" charset="-122"/>
                 <a:cs typeface="Arial" pitchFamily="34" charset="-120"/>
               </a:rPr>
-              <a:t>"Tirthaji's book (1965) gives this rule. The rule itself is genuinely correct. Tirthaji's claim that it comes from a Vedic appendix has not been verified by other Sanskritists. We use the rule because it works. The history is younger than the name suggests."</a:t>
-            </a:r>
-            <a:pPr algn="l" indent="0" marL="0">
-              <a:lnSpc>
-                <a:spcPts val="1680"/>
-              </a:lnSpc>
-              <a:spcBef>
-                <a:spcPts val="300"/>
-              </a:spcBef>
+              <a:t>"Subtracting any digit from 9 is trivial — there's no borrow. We always have </a:t>
+            </a:r>
+            <a:pPr algn="l" indent="0" marL="0">
+              <a:lnSpc>
+                <a:spcPts val="1620"/>
+              </a:lnSpc>
+              <a:spcAft>
+                <a:spcPts val="300"/>
+              </a:spcAft>
+              <a:buNone/>
+            </a:pPr>
+            <a:r>
+              <a:rPr lang="en-US" sz="1200" i="1" dirty="0">
+                <a:solidFill>
+                  <a:srgbClr val="1C2833"/>
+                </a:solidFill>
+                <a:latin typeface="Arial" pitchFamily="34" charset="0"/>
+                <a:ea typeface="Arial" pitchFamily="34" charset="-122"/>
+                <a:cs typeface="Arial" pitchFamily="34" charset="-120"/>
+              </a:rPr>
+              <a:t>9 ≥ digit</a:t>
+            </a:r>
+            <a:pPr algn="l" indent="0" marL="0">
+              <a:lnSpc>
+                <a:spcPts val="1620"/>
+              </a:lnSpc>
+              <a:spcAft>
+                <a:spcPts val="300"/>
+              </a:spcAft>
+              <a:buNone/>
+            </a:pPr>
+            <a:r>
+              <a:rPr lang="en-US" sz="1200" i="1" dirty="0">
+                <a:solidFill>
+                  <a:srgbClr val="1C2833"/>
+                </a:solidFill>
+                <a:latin typeface="Arial" pitchFamily="34" charset="0"/>
+                <a:ea typeface="Arial" pitchFamily="34" charset="-122"/>
+                <a:cs typeface="Arial" pitchFamily="34" charset="-120"/>
+              </a:rPr>
+              <a:t>. So </a:t>
+            </a:r>
+            <a:pPr algn="l" indent="0" marL="0">
+              <a:lnSpc>
+                <a:spcPts val="1620"/>
+              </a:lnSpc>
+              <a:spcAft>
+                <a:spcPts val="300"/>
+              </a:spcAft>
+              <a:buNone/>
+            </a:pPr>
+            <a:r>
+              <a:rPr lang="en-US" sz="1200" i="1" dirty="0">
+                <a:solidFill>
+                  <a:srgbClr val="1C2833"/>
+                </a:solidFill>
+                <a:latin typeface="Arial" pitchFamily="34" charset="0"/>
+                <a:ea typeface="Arial" pitchFamily="34" charset="-122"/>
+                <a:cs typeface="Arial" pitchFamily="34" charset="-120"/>
+              </a:rPr>
+              <a:t>(10ⁿ − 1) − A</a:t>
+            </a:r>
+            <a:pPr algn="l" indent="0" marL="0">
+              <a:lnSpc>
+                <a:spcPts val="1620"/>
+              </a:lnSpc>
+              <a:spcAft>
+                <a:spcPts val="300"/>
+              </a:spcAft>
+              <a:buNone/>
+            </a:pPr>
+            <a:r>
+              <a:rPr lang="en-US" sz="1200" i="1" dirty="0">
+                <a:solidFill>
+                  <a:srgbClr val="1C2833"/>
+                </a:solidFill>
+                <a:latin typeface="Arial" pitchFamily="34" charset="0"/>
+                <a:ea typeface="Arial" pitchFamily="34" charset="-122"/>
+                <a:cs typeface="Arial" pitchFamily="34" charset="-120"/>
+              </a:rPr>
+              <a:t> is a clean digit-by-digit subtraction with no borrow. Then we add 1 at the end."</a:t>
+            </a:r>
+            <a:endParaRPr lang="en-US" sz="1200" dirty="0"/>
+          </a:p>
+        </p:txBody>
+      </p:sp>
+      <p:sp>
+        <p:nvSpPr>
+          <p:cNvPr id="5" name="Text 3"/>
+          <p:cNvSpPr/>
+          <p:nvPr/>
+        </p:nvSpPr>
+        <p:spPr>
+          <a:xfrm>
+            <a:off x="634901" y="1510754"/>
+            <a:ext cx="8102798" cy="487561"/>
+          </a:xfrm>
+          <a:prstGeom prst="rect">
+            <a:avLst/>
+          </a:prstGeom>
+          <a:noFill/>
+          <a:ln/>
+        </p:spPr>
+        <p:txBody>
+          <a:bodyPr wrap="square" lIns="0" tIns="0" rIns="0" bIns="0" rtlCol="0" anchor="t"/>
+          <a:lstStyle/>
+          <a:p>
+            <a:pPr algn="l" marL="342900" indent="-342900">
+              <a:lnSpc>
+                <a:spcPts val="1620"/>
+              </a:lnSpc>
+              <a:spcAft>
+                <a:spcPts val="300"/>
+              </a:spcAft>
+              <a:buSzPct val="100000"/>
+              <a:buChar char="•"/>
+            </a:pPr>
+            <a:r>
+              <a:rPr lang="en-US" sz="1200" b="1" dirty="0">
+                <a:solidFill>
+                  <a:srgbClr val="1C2833"/>
+                </a:solidFill>
+                <a:latin typeface="Arial" pitchFamily="34" charset="0"/>
+                <a:ea typeface="Arial" pitchFamily="34" charset="-122"/>
+                <a:cs typeface="Arial" pitchFamily="34" charset="-120"/>
+              </a:rPr>
+              <a:t>Where does the "+1" go?</a:t>
+            </a:r>
+            <a:pPr algn="l" indent="0" marL="0">
+              <a:lnSpc>
+                <a:spcPts val="1620"/>
+              </a:lnSpc>
               <a:spcAft>
                 <a:spcPts val="300"/>
               </a:spcAft>
@@ -6307,15 +9152,12 @@
                 <a:ea typeface="Arial" pitchFamily="34" charset="-122"/>
                 <a:cs typeface="Arial" pitchFamily="34" charset="-120"/>
               </a:rPr>
-              <a:t> – Preview Day 7: </a:t>
-            </a:r>
-            <a:pPr algn="l" indent="0" marL="0">
-              <a:lnSpc>
-                <a:spcPts val="1680"/>
-              </a:lnSpc>
-              <a:spcBef>
-                <a:spcPts val="300"/>
-              </a:spcBef>
+              <a:t> </a:t>
+            </a:r>
+            <a:pPr algn="l" indent="0" marL="0">
+              <a:lnSpc>
+                <a:spcPts val="1620"/>
+              </a:lnSpc>
               <a:spcAft>
                 <a:spcPts val="300"/>
               </a:spcAft>
@@ -6330,7 +9172,47 @@
                 <a:ea typeface="Arial" pitchFamily="34" charset="-122"/>
                 <a:cs typeface="Arial" pitchFamily="34" charset="-120"/>
               </a:rPr>
-              <a:t>"Tomorrow — a surprise. The same rule is built into how computers subtract. It's called 'two's complement.'"</a:t>
+              <a:t>"Into the last digit. So instead of doing 'from 9' on the last digit and then '+1,' we just do 'from 10' on the last digit. Same thing. That's why the sūtra says 'all from nine and </a:t>
+            </a:r>
+            <a:pPr algn="l" indent="0" marL="0">
+              <a:lnSpc>
+                <a:spcPts val="1620"/>
+              </a:lnSpc>
+              <a:spcAft>
+                <a:spcPts val="300"/>
+              </a:spcAft>
+              <a:buNone/>
+            </a:pPr>
+            <a:r>
+              <a:rPr lang="en-US" sz="1200" b="1" i="1" dirty="0">
+                <a:solidFill>
+                  <a:srgbClr val="1C2833"/>
+                </a:solidFill>
+                <a:latin typeface="Arial" pitchFamily="34" charset="0"/>
+                <a:ea typeface="Arial" pitchFamily="34" charset="-122"/>
+                <a:cs typeface="Arial" pitchFamily="34" charset="-120"/>
+              </a:rPr>
+              <a:t>the last from ten</a:t>
+            </a:r>
+            <a:pPr algn="l" indent="0" marL="0">
+              <a:lnSpc>
+                <a:spcPts val="1620"/>
+              </a:lnSpc>
+              <a:spcAft>
+                <a:spcPts val="300"/>
+              </a:spcAft>
+              <a:buNone/>
+            </a:pPr>
+            <a:r>
+              <a:rPr lang="en-US" sz="1200" i="1" dirty="0">
+                <a:solidFill>
+                  <a:srgbClr val="1C2833"/>
+                </a:solidFill>
+                <a:latin typeface="Arial" pitchFamily="34" charset="0"/>
+                <a:ea typeface="Arial" pitchFamily="34" charset="-122"/>
+                <a:cs typeface="Arial" pitchFamily="34" charset="-120"/>
+              </a:rPr>
+              <a:t>.'"</a:t>
             </a:r>
             <a:endParaRPr lang="en-US" sz="1200" dirty="0"/>
           </a:p>
@@ -6338,7 +9220,7 @@
       </p:sp>
       <p:sp>
         <p:nvSpPr>
-          <p:cNvPr id="5" name="Text 3"/>
+          <p:cNvPr id="6" name="Text 4"/>
           <p:cNvSpPr/>
           <p:nvPr/>
         </p:nvSpPr>
@@ -6488,7 +9370,7 @@
                 <a:ea typeface="Georgia" pitchFamily="34" charset="-122"/>
                 <a:cs typeface="Georgia" pitchFamily="34" charset="-120"/>
               </a:rPr>
-              <a:t>Homework</a:t>
+              <a:t>Core (20 min) — The mathematical reason (cont.)</a:t>
             </a:r>
             <a:endParaRPr lang="en-US" sz="1800" dirty="0"/>
           </a:p>
@@ -6502,8 +9384,8 @@
         </p:nvSpPr>
         <p:spPr>
           <a:xfrm>
-            <a:off x="406301" y="870942"/>
-            <a:ext cx="8498026" cy="649337"/>
+            <a:off x="634901" y="883593"/>
+            <a:ext cx="8102798" cy="281880"/>
           </a:xfrm>
           <a:prstGeom prst="rect">
             <a:avLst/>
@@ -6515,74 +9397,26 @@
           <a:bodyPr wrap="square" lIns="0" tIns="0" rIns="0" bIns="0" rtlCol="0" anchor="t"/>
           <a:lstStyle/>
           <a:p>
-            <a:pPr algn="l" indent="0" marL="0">
-              <a:lnSpc>
-                <a:spcPts val="1680"/>
-              </a:lnSpc>
-              <a:spcBef>
-                <a:spcPts val="300"/>
-              </a:spcBef>
-              <a:spcAft>
-                <a:spcPts val="300"/>
-              </a:spcAft>
-              <a:buNone/>
-            </a:pPr>
-            <a:r>
-              <a:rPr lang="en-US" sz="1200" dirty="0">
-                <a:solidFill>
-                  <a:srgbClr val="1C2833"/>
-                </a:solidFill>
-                <a:latin typeface="Arial" pitchFamily="34" charset="0"/>
-                <a:ea typeface="Arial" pitchFamily="34" charset="-122"/>
-                <a:cs typeface="Arial" pitchFamily="34" charset="-120"/>
-              </a:rPr>
-              <a:t>– Find ONE moment in your daily life where you naturally "round to the nearest 100 / 1000" without thinking. Write 2 sentences describing it. (E.g. tipping at a restaurant. Counting change. Comparing prices.) – Practise: complement of </a:t>
-            </a:r>
-            <a:pPr algn="l" indent="0" marL="0">
-              <a:lnSpc>
-                <a:spcPts val="1680"/>
-              </a:lnSpc>
-              <a:spcBef>
-                <a:spcPts val="300"/>
-              </a:spcBef>
-              <a:spcAft>
-                <a:spcPts val="300"/>
-              </a:spcAft>
-              <a:buNone/>
-            </a:pPr>
-            <a:r>
-              <a:rPr lang="en-US" sz="1200" dirty="0">
-                <a:solidFill>
-                  <a:srgbClr val="1C2833"/>
-                </a:solidFill>
-                <a:latin typeface="Arial" pitchFamily="34" charset="0"/>
-                <a:ea typeface="Arial" pitchFamily="34" charset="-122"/>
-                <a:cs typeface="Arial" pitchFamily="34" charset="-120"/>
-              </a:rPr>
-              <a:t>4321</a:t>
-            </a:r>
-            <a:pPr algn="l" indent="0" marL="0">
-              <a:lnSpc>
-                <a:spcPts val="1680"/>
-              </a:lnSpc>
-              <a:spcBef>
-                <a:spcPts val="300"/>
-              </a:spcBef>
-              <a:spcAft>
-                <a:spcPts val="300"/>
-              </a:spcAft>
-              <a:buNone/>
-            </a:pPr>
-            <a:r>
-              <a:rPr lang="en-US" sz="1200" dirty="0">
-                <a:solidFill>
-                  <a:srgbClr val="1C2833"/>
-                </a:solidFill>
-                <a:latin typeface="Arial" pitchFamily="34" charset="0"/>
-                <a:ea typeface="Arial" pitchFamily="34" charset="-122"/>
-                <a:cs typeface="Arial" pitchFamily="34" charset="-120"/>
-              </a:rPr>
-              <a:t> to 10 000. Show the algebraic identity for this one (the same way the lesson did 1000 − 567).</a:t>
+            <a:pPr algn="l" marL="342900" indent="-342900">
+              <a:lnSpc>
+                <a:spcPts val="1620"/>
+              </a:lnSpc>
+              <a:spcAft>
+                <a:spcPts val="300"/>
+              </a:spcAft>
+              <a:buSzPct val="100000"/>
+              <a:buChar char="•"/>
+            </a:pPr>
+            <a:r>
+              <a:rPr lang="en-US" sz="1200" b="1" dirty="0">
+                <a:solidFill>
+                  <a:srgbClr val="1C2833"/>
+                </a:solidFill>
+                <a:latin typeface="Arial" pitchFamily="34" charset="0"/>
+                <a:ea typeface="Arial" pitchFamily="34" charset="-122"/>
+                <a:cs typeface="Arial" pitchFamily="34" charset="-120"/>
+              </a:rPr>
+              <a:t>Walk through a concrete example with full algebra:</a:t>
             </a:r>
             <a:endParaRPr lang="en-US" sz="1200" dirty="0"/>
           </a:p>
@@ -6740,7 +9574,7 @@
                 <a:ea typeface="Georgia" pitchFamily="34" charset="-122"/>
                 <a:cs typeface="Georgia" pitchFamily="34" charset="-120"/>
               </a:rPr>
-              <a:t>Differentiation</a:t>
+              <a:t>Core (20 min) — The mathematical reason (cont.)</a:t>
             </a:r>
             <a:endParaRPr lang="en-US" sz="1800" dirty="0"/>
           </a:p>
@@ -6754,151 +9588,348 @@
         </p:nvSpPr>
         <p:spPr>
           <a:xfrm>
-            <a:off x="634901" y="883593"/>
-            <a:ext cx="8102798" cy="769441"/>
-          </a:xfrm>
-          <a:prstGeom prst="rect">
+            <a:off x="406301" y="883593"/>
+            <a:ext cx="8331398" cy="1475929"/>
+          </a:xfrm>
+          <a:prstGeom prst="rect">
+            <a:avLst/>
+          </a:prstGeom>
+          <a:solidFill>
+            <a:srgbClr val="F4F8F9"/>
+          </a:solidFill>
+          <a:ln/>
+        </p:spPr>
+        <p:txBody>
+          <a:bodyPr wrap="square" rtlCol="0" anchor="ctr"/>
+          <a:lstStyle/>
+          <a:p>
+            <a:pPr indent="0" marL="0">
+              <a:buNone/>
+            </a:pPr>
+            <a:endParaRPr lang="en-US" dirty="0"/>
+          </a:p>
+        </p:txBody>
+      </p:sp>
+      <p:sp>
+        <p:nvSpPr>
+          <p:cNvPr id="5" name="Shape 3"/>
+          <p:cNvSpPr/>
+          <p:nvPr/>
+        </p:nvSpPr>
+        <p:spPr>
+          <a:xfrm>
+            <a:off x="430113" y="883593"/>
+            <a:ext cx="0" cy="1475929"/>
+          </a:xfrm>
+          <a:prstGeom prst="line">
             <a:avLst/>
           </a:prstGeom>
           <a:noFill/>
+          <a:ln w="47625">
+            <a:solidFill>
+              <a:srgbClr val="277884"/>
+            </a:solidFill>
+            <a:prstDash val="solid"/>
+          </a:ln>
+        </p:spPr>
+      </p:sp>
+      <p:sp>
+        <p:nvSpPr>
+          <p:cNvPr id="6" name="Text 4"/>
+          <p:cNvSpPr/>
+          <p:nvPr/>
+        </p:nvSpPr>
+        <p:spPr>
+          <a:xfrm>
+            <a:off x="631627" y="1010543"/>
+            <a:ext cx="8086939" cy="174575"/>
+          </a:xfrm>
+          <a:prstGeom prst="rect">
+            <a:avLst/>
+          </a:prstGeom>
+          <a:noFill/>
           <a:ln/>
         </p:spPr>
         <p:txBody>
           <a:bodyPr wrap="square" lIns="0" tIns="0" rIns="0" bIns="0" rtlCol="0" anchor="t"/>
           <a:lstStyle/>
           <a:p>
-            <a:pPr algn="l" marL="342900" indent="-342900">
-              <a:lnSpc>
-                <a:spcPts val="1620"/>
-              </a:lnSpc>
-              <a:spcAft>
-                <a:spcPts val="300"/>
-              </a:spcAft>
-              <a:buSzPct val="100000"/>
-              <a:buChar char="•"/>
-            </a:pPr>
-            <a:r>
-              <a:rPr lang="en-US" sz="1200" b="1" dirty="0">
-                <a:solidFill>
-                  <a:srgbClr val="1C2833"/>
-                </a:solidFill>
-                <a:latin typeface="Arial" pitchFamily="34" charset="0"/>
-                <a:ea typeface="Arial" pitchFamily="34" charset="-122"/>
-                <a:cs typeface="Arial" pitchFamily="34" charset="-120"/>
-              </a:rPr>
-              <a:t>Tier up:</a:t>
-            </a:r>
-            <a:pPr algn="l" indent="0" marL="0">
-              <a:lnSpc>
-                <a:spcPts val="1620"/>
-              </a:lnSpc>
-              <a:spcAft>
-                <a:spcPts val="300"/>
-              </a:spcAft>
-              <a:buNone/>
-            </a:pPr>
-            <a:r>
-              <a:rPr lang="en-US" sz="1200" dirty="0">
-                <a:solidFill>
-                  <a:srgbClr val="1C2833"/>
-                </a:solidFill>
-                <a:latin typeface="Arial" pitchFamily="34" charset="0"/>
-                <a:ea typeface="Arial" pitchFamily="34" charset="-122"/>
-                <a:cs typeface="Arial" pitchFamily="34" charset="-120"/>
-              </a:rPr>
-              <a:t> Write the explanation for a Grade 11 student. Use formal notation. Show the identity holds for any base b: </a:t>
-            </a:r>
-            <a:pPr algn="l" indent="0" marL="0">
-              <a:lnSpc>
-                <a:spcPts val="1620"/>
-              </a:lnSpc>
-              <a:spcAft>
-                <a:spcPts val="300"/>
-              </a:spcAft>
-              <a:buNone/>
-            </a:pPr>
-            <a:r>
-              <a:rPr lang="en-US" sz="1200" dirty="0">
-                <a:solidFill>
-                  <a:srgbClr val="1C2833"/>
-                </a:solidFill>
-                <a:latin typeface="Arial" pitchFamily="34" charset="0"/>
-                <a:ea typeface="Arial" pitchFamily="34" charset="-122"/>
-                <a:cs typeface="Arial" pitchFamily="34" charset="-120"/>
-              </a:rPr>
-              <a:t>bⁿ − A = (bⁿ − 1) − A + 1</a:t>
-            </a:r>
-            <a:pPr algn="l" indent="0" marL="0">
-              <a:lnSpc>
-                <a:spcPts val="1620"/>
-              </a:lnSpc>
-              <a:spcAft>
-                <a:spcPts val="300"/>
-              </a:spcAft>
-              <a:buNone/>
-            </a:pPr>
-            <a:r>
-              <a:rPr lang="en-US" sz="1200" dirty="0">
-                <a:solidFill>
-                  <a:srgbClr val="1C2833"/>
-                </a:solidFill>
-                <a:latin typeface="Arial" pitchFamily="34" charset="0"/>
-                <a:ea typeface="Arial" pitchFamily="34" charset="-122"/>
-                <a:cs typeface="Arial" pitchFamily="34" charset="-120"/>
-              </a:rPr>
-              <a:t>. Preview Day 7's binary case.</a:t>
-            </a:r>
-            <a:endParaRPr lang="en-US" sz="1200" dirty="0"/>
-          </a:p>
-          <a:p>
-            <a:pPr algn="l" marL="342900" indent="-342900">
-              <a:lnSpc>
-                <a:spcPts val="1620"/>
-              </a:lnSpc>
-              <a:spcAft>
-                <a:spcPts val="300"/>
-              </a:spcAft>
-              <a:buSzPct val="100000"/>
-              <a:buChar char="•"/>
-            </a:pPr>
-            <a:r>
-              <a:rPr lang="en-US" sz="1200" b="1" dirty="0">
-                <a:solidFill>
-                  <a:srgbClr val="1C2833"/>
-                </a:solidFill>
-                <a:latin typeface="Arial" pitchFamily="34" charset="0"/>
-                <a:ea typeface="Arial" pitchFamily="34" charset="-122"/>
-                <a:cs typeface="Arial" pitchFamily="34" charset="-120"/>
-              </a:rPr>
-              <a:t>Tier down:</a:t>
-            </a:r>
-            <a:pPr algn="l" indent="0" marL="0">
-              <a:lnSpc>
-                <a:spcPts val="1620"/>
-              </a:lnSpc>
-              <a:spcAft>
-                <a:spcPts val="300"/>
-              </a:spcAft>
-              <a:buNone/>
-            </a:pPr>
-            <a:r>
-              <a:rPr lang="en-US" sz="1200" dirty="0">
-                <a:solidFill>
-                  <a:srgbClr val="1C2833"/>
-                </a:solidFill>
-                <a:latin typeface="Arial" pitchFamily="34" charset="0"/>
-                <a:ea typeface="Arial" pitchFamily="34" charset="-122"/>
-                <a:cs typeface="Arial" pitchFamily="34" charset="-120"/>
-              </a:rPr>
-              <a:t> Skip the written explanation. Verbalise to your partner. Use the bar-model picture as scaffold.</a:t>
-            </a:r>
-            <a:endParaRPr lang="en-US" sz="1200" dirty="0"/>
-          </a:p>
-        </p:txBody>
-      </p:sp>
-      <p:sp>
-        <p:nvSpPr>
-          <p:cNvPr id="5" name="Text 3"/>
+            <a:pPr algn="l" indent="0" marL="0">
+              <a:lnSpc>
+                <a:spcPts val="1375"/>
+              </a:lnSpc>
+              <a:buNone/>
+            </a:pPr>
+            <a:r>
+              <a:rPr lang="en-US" sz="1100" dirty="0">
+                <a:solidFill>
+                  <a:srgbClr val="1C2833"/>
+                </a:solidFill>
+                <a:latin typeface="Courier New" pitchFamily="34" charset="0"/>
+                <a:ea typeface="Courier New" pitchFamily="34" charset="-122"/>
+                <a:cs typeface="Courier New" pitchFamily="34" charset="-120"/>
+              </a:rPr>
+              <a:t>1000 − 567</a:t>
+            </a:r>
+            <a:endParaRPr lang="en-US" sz="1100" dirty="0"/>
+          </a:p>
+        </p:txBody>
+      </p:sp>
+      <p:sp>
+        <p:nvSpPr>
+          <p:cNvPr id="7" name="Text 5"/>
+          <p:cNvSpPr/>
+          <p:nvPr/>
+        </p:nvSpPr>
+        <p:spPr>
+          <a:xfrm>
+            <a:off x="631627" y="1185118"/>
+            <a:ext cx="8086939" cy="174575"/>
+          </a:xfrm>
+          <a:prstGeom prst="rect">
+            <a:avLst/>
+          </a:prstGeom>
+          <a:noFill/>
+          <a:ln/>
+        </p:spPr>
+        <p:txBody>
+          <a:bodyPr wrap="square" lIns="0" tIns="0" rIns="0" bIns="0" rtlCol="0" anchor="t"/>
+          <a:lstStyle/>
+          <a:p>
+            <a:pPr algn="l" indent="0" marL="0">
+              <a:lnSpc>
+                <a:spcPts val="1375"/>
+              </a:lnSpc>
+              <a:buNone/>
+            </a:pPr>
+            <a:r>
+              <a:rPr lang="en-US" sz="1100" dirty="0">
+                <a:solidFill>
+                  <a:srgbClr val="1C2833"/>
+                </a:solidFill>
+                <a:latin typeface="Courier New" pitchFamily="34" charset="0"/>
+                <a:ea typeface="Courier New" pitchFamily="34" charset="-122"/>
+                <a:cs typeface="Courier New" pitchFamily="34" charset="-120"/>
+              </a:rPr>
+              <a:t>= (1000 − 1) − 567 + 1     ← identity</a:t>
+            </a:r>
+            <a:endParaRPr lang="en-US" sz="1100" dirty="0"/>
+          </a:p>
+        </p:txBody>
+      </p:sp>
+      <p:sp>
+        <p:nvSpPr>
+          <p:cNvPr id="8" name="Text 6"/>
+          <p:cNvSpPr/>
+          <p:nvPr/>
+        </p:nvSpPr>
+        <p:spPr>
+          <a:xfrm>
+            <a:off x="631627" y="1359694"/>
+            <a:ext cx="8086939" cy="174575"/>
+          </a:xfrm>
+          <a:prstGeom prst="rect">
+            <a:avLst/>
+          </a:prstGeom>
+          <a:noFill/>
+          <a:ln/>
+        </p:spPr>
+        <p:txBody>
+          <a:bodyPr wrap="square" lIns="0" tIns="0" rIns="0" bIns="0" rtlCol="0" anchor="t"/>
+          <a:lstStyle/>
+          <a:p>
+            <a:pPr algn="l" indent="0" marL="0">
+              <a:lnSpc>
+                <a:spcPts val="1375"/>
+              </a:lnSpc>
+              <a:buNone/>
+            </a:pPr>
+            <a:r>
+              <a:rPr lang="en-US" sz="1100" dirty="0">
+                <a:solidFill>
+                  <a:srgbClr val="1C2833"/>
+                </a:solidFill>
+                <a:latin typeface="Courier New" pitchFamily="34" charset="0"/>
+                <a:ea typeface="Courier New" pitchFamily="34" charset="-122"/>
+                <a:cs typeface="Courier New" pitchFamily="34" charset="-120"/>
+              </a:rPr>
+              <a:t>= 999 − 567 + 1</a:t>
+            </a:r>
+            <a:endParaRPr lang="en-US" sz="1100" dirty="0"/>
+          </a:p>
+        </p:txBody>
+      </p:sp>
+      <p:sp>
+        <p:nvSpPr>
+          <p:cNvPr id="9" name="Text 7"/>
+          <p:cNvSpPr/>
+          <p:nvPr/>
+        </p:nvSpPr>
+        <p:spPr>
+          <a:xfrm>
+            <a:off x="631627" y="1534269"/>
+            <a:ext cx="8086939" cy="174575"/>
+          </a:xfrm>
+          <a:prstGeom prst="rect">
+            <a:avLst/>
+          </a:prstGeom>
+          <a:noFill/>
+          <a:ln/>
+        </p:spPr>
+        <p:txBody>
+          <a:bodyPr wrap="square" lIns="0" tIns="0" rIns="0" bIns="0" rtlCol="0" anchor="t"/>
+          <a:lstStyle/>
+          <a:p>
+            <a:pPr algn="l" indent="0" marL="0">
+              <a:lnSpc>
+                <a:spcPts val="1375"/>
+              </a:lnSpc>
+              <a:buNone/>
+            </a:pPr>
+            <a:r>
+              <a:rPr lang="en-US" sz="1100" dirty="0">
+                <a:solidFill>
+                  <a:srgbClr val="1C2833"/>
+                </a:solidFill>
+                <a:latin typeface="Courier New" pitchFamily="34" charset="0"/>
+                <a:ea typeface="Courier New" pitchFamily="34" charset="-122"/>
+                <a:cs typeface="Courier New" pitchFamily="34" charset="-120"/>
+              </a:rPr>
+              <a:t>= (9-5)(9-6)(9-7) + 1      ← digit-wise from 9 — no borrow!</a:t>
+            </a:r>
+            <a:endParaRPr lang="en-US" sz="1100" dirty="0"/>
+          </a:p>
+        </p:txBody>
+      </p:sp>
+      <p:sp>
+        <p:nvSpPr>
+          <p:cNvPr id="10" name="Text 8"/>
+          <p:cNvSpPr/>
+          <p:nvPr/>
+        </p:nvSpPr>
+        <p:spPr>
+          <a:xfrm>
+            <a:off x="631627" y="1708845"/>
+            <a:ext cx="8086939" cy="174575"/>
+          </a:xfrm>
+          <a:prstGeom prst="rect">
+            <a:avLst/>
+          </a:prstGeom>
+          <a:noFill/>
+          <a:ln/>
+        </p:spPr>
+        <p:txBody>
+          <a:bodyPr wrap="square" lIns="0" tIns="0" rIns="0" bIns="0" rtlCol="0" anchor="t"/>
+          <a:lstStyle/>
+          <a:p>
+            <a:pPr algn="l" indent="0" marL="0">
+              <a:lnSpc>
+                <a:spcPts val="1375"/>
+              </a:lnSpc>
+              <a:buNone/>
+            </a:pPr>
+            <a:r>
+              <a:rPr lang="en-US" sz="1100" dirty="0">
+                <a:solidFill>
+                  <a:srgbClr val="1C2833"/>
+                </a:solidFill>
+                <a:latin typeface="Courier New" pitchFamily="34" charset="0"/>
+                <a:ea typeface="Courier New" pitchFamily="34" charset="-122"/>
+                <a:cs typeface="Courier New" pitchFamily="34" charset="-120"/>
+              </a:rPr>
+              <a:t>= 4 3 2 + 1</a:t>
+            </a:r>
+            <a:endParaRPr lang="en-US" sz="1100" dirty="0"/>
+          </a:p>
+        </p:txBody>
+      </p:sp>
+      <p:sp>
+        <p:nvSpPr>
+          <p:cNvPr id="11" name="Text 9"/>
+          <p:cNvSpPr/>
+          <p:nvPr/>
+        </p:nvSpPr>
+        <p:spPr>
+          <a:xfrm>
+            <a:off x="631627" y="1883420"/>
+            <a:ext cx="8086939" cy="174575"/>
+          </a:xfrm>
+          <a:prstGeom prst="rect">
+            <a:avLst/>
+          </a:prstGeom>
+          <a:noFill/>
+          <a:ln/>
+        </p:spPr>
+        <p:txBody>
+          <a:bodyPr wrap="square" lIns="0" tIns="0" rIns="0" bIns="0" rtlCol="0" anchor="t"/>
+          <a:lstStyle/>
+          <a:p>
+            <a:pPr algn="l" indent="0" marL="0">
+              <a:lnSpc>
+                <a:spcPts val="1375"/>
+              </a:lnSpc>
+              <a:buNone/>
+            </a:pPr>
+            <a:r>
+              <a:rPr lang="en-US" sz="1100" dirty="0">
+                <a:solidFill>
+                  <a:srgbClr val="1C2833"/>
+                </a:solidFill>
+                <a:latin typeface="Courier New" pitchFamily="34" charset="0"/>
+                <a:ea typeface="Courier New" pitchFamily="34" charset="-122"/>
+                <a:cs typeface="Courier New" pitchFamily="34" charset="-120"/>
+              </a:rPr>
+              <a:t>= 432 + 1</a:t>
+            </a:r>
+            <a:endParaRPr lang="en-US" sz="1100" dirty="0"/>
+          </a:p>
+        </p:txBody>
+      </p:sp>
+      <p:sp>
+        <p:nvSpPr>
+          <p:cNvPr id="12" name="Text 10"/>
+          <p:cNvSpPr/>
+          <p:nvPr/>
+        </p:nvSpPr>
+        <p:spPr>
+          <a:xfrm>
+            <a:off x="631627" y="2057995"/>
+            <a:ext cx="8086939" cy="174575"/>
+          </a:xfrm>
+          <a:prstGeom prst="rect">
+            <a:avLst/>
+          </a:prstGeom>
+          <a:noFill/>
+          <a:ln/>
+        </p:spPr>
+        <p:txBody>
+          <a:bodyPr wrap="square" lIns="0" tIns="0" rIns="0" bIns="0" rtlCol="0" anchor="t"/>
+          <a:lstStyle/>
+          <a:p>
+            <a:pPr algn="l" indent="0" marL="0">
+              <a:lnSpc>
+                <a:spcPts val="1375"/>
+              </a:lnSpc>
+              <a:buNone/>
+            </a:pPr>
+            <a:r>
+              <a:rPr lang="en-US" sz="1100" dirty="0">
+                <a:solidFill>
+                  <a:srgbClr val="1C2833"/>
+                </a:solidFill>
+                <a:latin typeface="Courier New" pitchFamily="34" charset="0"/>
+                <a:ea typeface="Courier New" pitchFamily="34" charset="-122"/>
+                <a:cs typeface="Courier New" pitchFamily="34" charset="-120"/>
+              </a:rPr>
+              <a:t>= 433.                     ✓</a:t>
+            </a:r>
+            <a:endParaRPr lang="en-US" sz="1100" dirty="0"/>
+          </a:p>
+        </p:txBody>
+      </p:sp>
+      <p:sp>
+        <p:nvSpPr>
+          <p:cNvPr id="13" name="Text 11"/>
           <p:cNvSpPr/>
           <p:nvPr/>
         </p:nvSpPr>
